--- a/python class/Python Class.pptx
+++ b/python class/Python Class.pptx
@@ -5,7 +5,7 @@
     <p:sldMasterId id="2147483660" r:id="rId1"/>
   </p:sldMasterIdLst>
   <p:notesMasterIdLst>
-    <p:notesMasterId r:id="rId40"/>
+    <p:notesMasterId r:id="rId41"/>
   </p:notesMasterIdLst>
   <p:sldIdLst>
     <p:sldId id="256" r:id="rId2"/>
@@ -27,25 +27,26 @@
     <p:sldId id="274" r:id="rId18"/>
     <p:sldId id="272" r:id="rId19"/>
     <p:sldId id="276" r:id="rId20"/>
-    <p:sldId id="277" r:id="rId21"/>
-    <p:sldId id="289" r:id="rId22"/>
-    <p:sldId id="278" r:id="rId23"/>
-    <p:sldId id="281" r:id="rId24"/>
-    <p:sldId id="273" r:id="rId25"/>
-    <p:sldId id="282" r:id="rId26"/>
-    <p:sldId id="292" r:id="rId27"/>
-    <p:sldId id="291" r:id="rId28"/>
-    <p:sldId id="286" r:id="rId29"/>
-    <p:sldId id="283" r:id="rId30"/>
-    <p:sldId id="288" r:id="rId31"/>
-    <p:sldId id="275" r:id="rId32"/>
-    <p:sldId id="287" r:id="rId33"/>
+    <p:sldId id="294" r:id="rId21"/>
+    <p:sldId id="277" r:id="rId22"/>
+    <p:sldId id="289" r:id="rId23"/>
+    <p:sldId id="278" r:id="rId24"/>
+    <p:sldId id="281" r:id="rId25"/>
+    <p:sldId id="273" r:id="rId26"/>
+    <p:sldId id="282" r:id="rId27"/>
+    <p:sldId id="292" r:id="rId28"/>
+    <p:sldId id="291" r:id="rId29"/>
+    <p:sldId id="286" r:id="rId30"/>
+    <p:sldId id="283" r:id="rId31"/>
+    <p:sldId id="288" r:id="rId32"/>
+    <p:sldId id="275" r:id="rId33"/>
     <p:sldId id="280" r:id="rId34"/>
     <p:sldId id="290" r:id="rId35"/>
     <p:sldId id="293" r:id="rId36"/>
-    <p:sldId id="279" r:id="rId37"/>
-    <p:sldId id="284" r:id="rId38"/>
-    <p:sldId id="285" r:id="rId39"/>
+    <p:sldId id="287" r:id="rId37"/>
+    <p:sldId id="279" r:id="rId38"/>
+    <p:sldId id="284" r:id="rId39"/>
+    <p:sldId id="285" r:id="rId40"/>
   </p:sldIdLst>
   <p:sldSz cx="12192000" cy="6858000"/>
   <p:notesSz cx="7104063" cy="10234613"/>
@@ -234,7 +235,7 @@
           <a:p>
             <a:fld id="{C7300FFE-222E-424B-A24A-B86ADB1660A8}" type="datetimeFigureOut">
               <a:rPr lang="en-IN" smtClean="0"/>
-              <a:t>14-08-2026</a:t>
+              <a:t>24-08-2026</a:t>
             </a:fld>
             <a:endParaRPr lang="en-IN" dirty="0"/>
           </a:p>
@@ -662,7 +663,7 @@
           <a:p>
             <a:fld id="{AD501974-91E0-4A6C-BF4F-18DDA0DBE697}" type="datetime1">
               <a:rPr lang="en-IN" smtClean="0"/>
-              <a:t>14-08-2026</a:t>
+              <a:t>24-08-2026</a:t>
             </a:fld>
             <a:endParaRPr lang="en-IN" dirty="0"/>
           </a:p>
@@ -787,7 +788,7 @@
           <a:p>
             <a:fld id="{340C70EA-229A-4802-A7BC-A1799783BDD3}" type="datetime1">
               <a:rPr lang="en-IN" smtClean="0"/>
-              <a:t>14-08-2026</a:t>
+              <a:t>24-08-2026</a:t>
             </a:fld>
             <a:endParaRPr lang="en-IN" dirty="0"/>
           </a:p>
@@ -1074,7 +1075,7 @@
           <a:p>
             <a:fld id="{BD944048-9929-4BB2-BADE-62F9A707015B}" type="datetime1">
               <a:rPr lang="en-IN" smtClean="0"/>
-              <a:t>14-08-2026</a:t>
+              <a:t>24-08-2026</a:t>
             </a:fld>
             <a:endParaRPr lang="en-IN" dirty="0"/>
           </a:p>
@@ -1380,7 +1381,7 @@
           <a:p>
             <a:fld id="{09A388D1-7504-45FD-847C-EF9E921E08DF}" type="datetime1">
               <a:rPr lang="en-IN" smtClean="0"/>
-              <a:t>14-08-2026</a:t>
+              <a:t>24-08-2026</a:t>
             </a:fld>
             <a:endParaRPr lang="en-IN" dirty="0"/>
           </a:p>
@@ -1609,7 +1610,7 @@
           <a:p>
             <a:fld id="{6015BE80-B03C-48AB-B3E2-19C5F4D60D3C}" type="datetime1">
               <a:rPr lang="en-IN" smtClean="0"/>
-              <a:t>14-08-2026</a:t>
+              <a:t>24-08-2026</a:t>
             </a:fld>
             <a:endParaRPr lang="en-IN" dirty="0"/>
           </a:p>
@@ -1880,7 +1881,7 @@
           <a:p>
             <a:fld id="{450E9977-AF0E-4B1A-B2BF-2416B4828E95}" type="datetime1">
               <a:rPr lang="en-IN" smtClean="0"/>
-              <a:t>14-08-2026</a:t>
+              <a:t>24-08-2026</a:t>
             </a:fld>
             <a:endParaRPr lang="en-IN" dirty="0"/>
           </a:p>
@@ -2107,7 +2108,7 @@
           <a:p>
             <a:fld id="{972A712B-80AB-4FDB-AFE5-C959280677B9}" type="datetime1">
               <a:rPr lang="en-IN" smtClean="0"/>
-              <a:t>14-08-2026</a:t>
+              <a:t>24-08-2026</a:t>
             </a:fld>
             <a:endParaRPr lang="en-IN" dirty="0"/>
           </a:p>
@@ -2398,7 +2399,7 @@
           <a:p>
             <a:fld id="{78FC1D50-5769-4793-A6D0-4C61D943385E}" type="datetime1">
               <a:rPr lang="en-IN" smtClean="0"/>
-              <a:t>14-08-2026</a:t>
+              <a:t>24-08-2026</a:t>
             </a:fld>
             <a:endParaRPr lang="en-IN" dirty="0"/>
           </a:p>
@@ -2663,7 +2664,7 @@
           <a:p>
             <a:fld id="{1093E9E7-66F0-49C7-87AF-7A91F126A0CA}" type="datetime1">
               <a:rPr lang="en-IN" smtClean="0"/>
-              <a:t>14-08-2026</a:t>
+              <a:t>24-08-2026</a:t>
             </a:fld>
             <a:endParaRPr lang="en-IN" dirty="0"/>
           </a:p>
@@ -3109,7 +3110,7 @@
           <a:p>
             <a:fld id="{4802E001-56FE-4C01-9545-A69D840AB1F5}" type="datetime1">
               <a:rPr lang="en-IN" smtClean="0"/>
-              <a:t>14-08-2026</a:t>
+              <a:t>24-08-2026</a:t>
             </a:fld>
             <a:endParaRPr lang="en-IN" dirty="0"/>
           </a:p>
@@ -3273,7 +3274,7 @@
           <a:p>
             <a:fld id="{FC628212-ABC2-4EAF-BB21-53D61AEEEA49}" type="datetime1">
               <a:rPr lang="en-IN" smtClean="0"/>
-              <a:t>14-08-2026</a:t>
+              <a:t>24-08-2026</a:t>
             </a:fld>
             <a:endParaRPr lang="en-IN" dirty="0"/>
           </a:p>
@@ -3437,7 +3438,7 @@
           <a:p>
             <a:fld id="{83F0C27E-97BD-4ACD-AFDF-13985BE88ECF}" type="datetime1">
               <a:rPr lang="en-IN" smtClean="0"/>
-              <a:t>14-08-2026</a:t>
+              <a:t>24-08-2026</a:t>
             </a:fld>
             <a:endParaRPr lang="en-IN" dirty="0"/>
           </a:p>
@@ -3635,7 +3636,7 @@
           <a:p>
             <a:fld id="{10A04BDC-9A72-4B08-81B7-A336A5B4E254}" type="datetime1">
               <a:rPr lang="en-IN" smtClean="0"/>
-              <a:t>14-08-2026</a:t>
+              <a:t>24-08-2026</a:t>
             </a:fld>
             <a:endParaRPr lang="en-IN" dirty="0"/>
           </a:p>
@@ -3833,7 +3834,7 @@
           <a:p>
             <a:fld id="{2E5D08A3-D96A-4309-8AF3-C610782BB2D3}" type="datetime1">
               <a:rPr lang="en-IN" smtClean="0"/>
-              <a:t>14-08-2026</a:t>
+              <a:t>24-08-2026</a:t>
             </a:fld>
             <a:endParaRPr lang="en-IN" dirty="0"/>
           </a:p>
@@ -7127,7 +7128,7 @@
           <p:cNvPr id="2" name="Title 1">
             <a:extLst>
               <a:ext uri="{FF2B5EF4-FFF2-40B4-BE49-F238E27FC236}">
-                <a16:creationId xmlns:a16="http://schemas.microsoft.com/office/drawing/2014/main" id="{AC33EE2A-E291-6B6C-4692-69F438D2D122}"/>
+                <a16:creationId xmlns:a16="http://schemas.microsoft.com/office/drawing/2014/main" id="{0414ACF4-81E6-4D83-8804-9989A2875B12}"/>
               </a:ext>
             </a:extLst>
           </p:cNvPr>
@@ -7144,128 +7145,129 @@
           <a:lstStyle/>
           <a:p>
             <a:r>
+              <a:rPr lang="en-IN" dirty="0"/>
+              <a:t>Comprehensions</a:t>
+            </a:r>
+          </a:p>
+        </p:txBody>
+      </p:sp>
+      <p:sp>
+        <p:nvSpPr>
+          <p:cNvPr id="3" name="Content Placeholder 2">
+            <a:extLst>
+              <a:ext uri="{FF2B5EF4-FFF2-40B4-BE49-F238E27FC236}">
+                <a16:creationId xmlns:a16="http://schemas.microsoft.com/office/drawing/2014/main" id="{8013955C-7F4D-8DFC-FB20-0F3CE581F83B}"/>
+              </a:ext>
+            </a:extLst>
+          </p:cNvPr>
+          <p:cNvSpPr>
+            <a:spLocks noGrp="1"/>
+          </p:cNvSpPr>
+          <p:nvPr>
+            <p:ph idx="1"/>
+          </p:nvPr>
+        </p:nvSpPr>
+        <p:spPr/>
+        <p:txBody>
+          <a:bodyPr/>
+          <a:lstStyle/>
+          <a:p>
+            <a:r>
+              <a:rPr lang="en-IN" dirty="0"/>
+              <a:t> Python Comprehensions - efficient way to create new </a:t>
+            </a:r>
+            <a:r>
+              <a:rPr lang="en-IN"/>
+              <a:t>data structure.</a:t>
+            </a:r>
+            <a:endParaRPr lang="en-IN" dirty="0"/>
+          </a:p>
+          <a:p>
+            <a:r>
+              <a:rPr lang="en-IN" dirty="0"/>
+              <a:t> mainly used in list , set , dictionary &amp; generators.</a:t>
+            </a:r>
+          </a:p>
+          <a:p>
+            <a:r>
+              <a:rPr lang="en-IN" dirty="0"/>
+              <a:t> </a:t>
+            </a:r>
+            <a:r>
+              <a:rPr lang="en-IN" b="1" dirty="0"/>
+              <a:t>Example : </a:t>
+            </a:r>
+          </a:p>
+          <a:p>
+            <a:pPr lvl="1"/>
+            <a:r>
+              <a:rPr lang="en-IN" b="1" dirty="0"/>
+              <a:t> list : </a:t>
+            </a:r>
+            <a:r>
               <a:rPr lang="en-GB" dirty="0"/>
-              <a:t>Exception Handling</a:t>
-            </a:r>
-            <a:endParaRPr lang="en-IN" dirty="0"/>
-          </a:p>
-        </p:txBody>
-      </p:sp>
-      <p:sp>
-        <p:nvSpPr>
-          <p:cNvPr id="3" name="Content Placeholder 2">
-            <a:extLst>
-              <a:ext uri="{FF2B5EF4-FFF2-40B4-BE49-F238E27FC236}">
-                <a16:creationId xmlns:a16="http://schemas.microsoft.com/office/drawing/2014/main" id="{20DD8D14-6237-1982-4EB8-681E3F06B371}"/>
-              </a:ext>
-            </a:extLst>
-          </p:cNvPr>
-          <p:cNvSpPr>
-            <a:spLocks noGrp="1"/>
-          </p:cNvSpPr>
-          <p:nvPr>
-            <p:ph idx="1"/>
-          </p:nvPr>
-        </p:nvSpPr>
-        <p:spPr/>
-        <p:txBody>
-          <a:bodyPr/>
-          <a:lstStyle/>
-          <a:p>
+              <a:t>[expression for item in iterable]</a:t>
+            </a:r>
+          </a:p>
+          <a:p>
+            <a:pPr lvl="1"/>
             <a:r>
               <a:rPr lang="en-GB" dirty="0"/>
               <a:t> </a:t>
             </a:r>
             <a:r>
               <a:rPr lang="en-GB" b="1" dirty="0"/>
-              <a:t>keywords : </a:t>
+              <a:t>set : </a:t>
+            </a:r>
+            <a:r>
+              <a:rPr lang="en-GB" dirty="0"/>
+              <a:t>{expression for item in iterable}</a:t>
             </a:r>
           </a:p>
           <a:p>
             <a:pPr lvl="1"/>
             <a:r>
               <a:rPr lang="en-GB" dirty="0"/>
-              <a:t> try</a:t>
-            </a:r>
+              <a:t> </a:t>
+            </a:r>
+            <a:r>
+              <a:rPr lang="en-GB" b="1" dirty="0"/>
+              <a:t>dictionary : </a:t>
+            </a:r>
+            <a:r>
+              <a:rPr lang="en-GB" dirty="0"/>
+              <a:t>{key:value for item in iterable}</a:t>
+            </a:r>
+            <a:endParaRPr lang="en-IN" dirty="0"/>
+          </a:p>
+          <a:p>
+            <a:r>
+              <a:rPr lang="en-IN" dirty="0"/>
+              <a:t> </a:t>
+            </a:r>
+            <a:r>
+              <a:rPr lang="en-IN" b="1" dirty="0"/>
+              <a:t>Conditions : </a:t>
+            </a:r>
+            <a:endParaRPr lang="en-IN" dirty="0"/>
           </a:p>
           <a:p>
             <a:pPr lvl="1"/>
             <a:r>
+              <a:rPr lang="en-IN" dirty="0"/>
+              <a:t> Single Condition (Only-IF) : </a:t>
+            </a:r>
+            <a:r>
               <a:rPr lang="en-GB" dirty="0"/>
-              <a:t> except</a:t>
+              <a:t>expression for item in iterable if condition.</a:t>
             </a:r>
           </a:p>
           <a:p>
             <a:pPr lvl="1"/>
             <a:r>
               <a:rPr lang="en-GB" dirty="0"/>
-              <a:t> else</a:t>
-            </a:r>
-          </a:p>
-          <a:p>
-            <a:pPr lvl="1"/>
-            <a:r>
-              <a:rPr lang="en-GB" dirty="0"/>
-              <a:t> finally</a:t>
-            </a:r>
-            <a:endParaRPr lang="en-IN" dirty="0"/>
-          </a:p>
-          <a:p>
-            <a:r>
-              <a:rPr lang="en-IN" dirty="0"/>
-              <a:t> </a:t>
-            </a:r>
-            <a:r>
-              <a:rPr lang="en-IN" b="1" dirty="0"/>
-              <a:t>try : </a:t>
-            </a:r>
-            <a:r>
-              <a:rPr lang="en-IN" dirty="0"/>
-              <a:t>try to execute the block</a:t>
-            </a:r>
-          </a:p>
-          <a:p>
-            <a:r>
-              <a:rPr lang="en-IN" dirty="0"/>
-              <a:t> </a:t>
-            </a:r>
-            <a:r>
-              <a:rPr lang="en-IN" b="1" dirty="0"/>
-              <a:t>except : </a:t>
-            </a:r>
-            <a:r>
-              <a:rPr lang="en-IN" dirty="0"/>
-              <a:t>executes when the exception occurs</a:t>
-            </a:r>
-          </a:p>
-          <a:p>
-            <a:r>
-              <a:rPr lang="en-IN" dirty="0"/>
-              <a:t> </a:t>
-            </a:r>
-            <a:r>
-              <a:rPr lang="en-IN" b="1" dirty="0"/>
-              <a:t>else : </a:t>
-            </a:r>
-            <a:r>
-              <a:rPr lang="en-IN" dirty="0"/>
-              <a:t>runs when no exception occurs</a:t>
-            </a:r>
-          </a:p>
-          <a:p>
-            <a:r>
-              <a:rPr lang="en-IN" dirty="0"/>
-              <a:t> </a:t>
-            </a:r>
-            <a:r>
-              <a:rPr lang="en-IN" b="1" dirty="0"/>
-              <a:t>finally : </a:t>
-            </a:r>
-            <a:r>
-              <a:rPr lang="en-IN" dirty="0"/>
-              <a:t>this block always executes</a:t>
-            </a:r>
-            <a:endParaRPr lang="en-GB" dirty="0"/>
+              <a:t> Two Conditions (IF-ELSE) : expression1 if condition else expression2 for item in iterable.</a:t>
+            </a:r>
           </a:p>
         </p:txBody>
       </p:sp>
@@ -7274,7 +7276,7 @@
           <p:cNvPr id="4" name="Footer Placeholder 3">
             <a:extLst>
               <a:ext uri="{FF2B5EF4-FFF2-40B4-BE49-F238E27FC236}">
-                <a16:creationId xmlns:a16="http://schemas.microsoft.com/office/drawing/2014/main" id="{72BD80CB-A028-534E-3E57-441FF63C0AAD}"/>
+                <a16:creationId xmlns:a16="http://schemas.microsoft.com/office/drawing/2014/main" id="{6C116E01-451E-9C60-11F3-57A524028D0A}"/>
               </a:ext>
             </a:extLst>
           </p:cNvPr>
@@ -7303,7 +7305,7 @@
           <p:cNvPr id="5" name="Slide Number Placeholder 4">
             <a:extLst>
               <a:ext uri="{FF2B5EF4-FFF2-40B4-BE49-F238E27FC236}">
-                <a16:creationId xmlns:a16="http://schemas.microsoft.com/office/drawing/2014/main" id="{0E5822AE-D486-BA76-0E08-1D718A0A6BE3}"/>
+                <a16:creationId xmlns:a16="http://schemas.microsoft.com/office/drawing/2014/main" id="{AEBE23D3-BEEB-06EB-F36A-AAEADD6314EB}"/>
               </a:ext>
             </a:extLst>
           </p:cNvPr>
@@ -7330,7 +7332,7 @@
     </p:spTree>
     <p:extLst>
       <p:ext uri="{BB962C8B-B14F-4D97-AF65-F5344CB8AC3E}">
-        <p14:creationId xmlns:p14="http://schemas.microsoft.com/office/powerpoint/2010/main" val="1480239433"/>
+        <p14:creationId xmlns:p14="http://schemas.microsoft.com/office/powerpoint/2010/main" val="528628243"/>
       </p:ext>
     </p:extLst>
   </p:cSld>
@@ -7362,7 +7364,7 @@
           <p:cNvPr id="2" name="Title 1">
             <a:extLst>
               <a:ext uri="{FF2B5EF4-FFF2-40B4-BE49-F238E27FC236}">
-                <a16:creationId xmlns:a16="http://schemas.microsoft.com/office/drawing/2014/main" id="{6037DABA-6315-8D57-BB48-0E452943FE7C}"/>
+                <a16:creationId xmlns:a16="http://schemas.microsoft.com/office/drawing/2014/main" id="{AC33EE2A-E291-6B6C-4692-69F438D2D122}"/>
               </a:ext>
             </a:extLst>
           </p:cNvPr>
@@ -7379,9 +7381,10 @@
           <a:lstStyle/>
           <a:p>
             <a:r>
-              <a:rPr lang="en-IN" dirty="0"/>
-              <a:t>Problems</a:t>
-            </a:r>
+              <a:rPr lang="en-GB" dirty="0"/>
+              <a:t>Exception Handling</a:t>
+            </a:r>
+            <a:endParaRPr lang="en-IN" dirty="0"/>
           </a:p>
         </p:txBody>
       </p:sp>
@@ -7390,7 +7393,7 @@
           <p:cNvPr id="3" name="Content Placeholder 2">
             <a:extLst>
               <a:ext uri="{FF2B5EF4-FFF2-40B4-BE49-F238E27FC236}">
-                <a16:creationId xmlns:a16="http://schemas.microsoft.com/office/drawing/2014/main" id="{B51B7CBC-3FC4-960A-3DED-6D0F670713EF}"/>
+                <a16:creationId xmlns:a16="http://schemas.microsoft.com/office/drawing/2014/main" id="{20DD8D14-6237-1982-4EB8-681E3F06B371}"/>
               </a:ext>
             </a:extLst>
           </p:cNvPr>
@@ -7407,33 +7410,99 @@
           <a:lstStyle/>
           <a:p>
             <a:r>
-              <a:rPr lang="en-IN" dirty="0"/>
-              <a:t> simple calculator which works on any inputs.</a:t>
-            </a:r>
-          </a:p>
-          <a:p>
-            <a:r>
-              <a:rPr lang="en-IN" dirty="0"/>
-              <a:t> invalid input.</a:t>
-            </a:r>
-          </a:p>
-          <a:p>
-            <a:r>
-              <a:rPr lang="en-IN" dirty="0"/>
-              <a:t> string and list indexing.</a:t>
-            </a:r>
-          </a:p>
-          <a:p>
-            <a:r>
-              <a:rPr lang="en-IN" dirty="0"/>
-              <a:t> file operations.</a:t>
-            </a:r>
-          </a:p>
-          <a:p>
-            <a:r>
-              <a:rPr lang="en-IN" dirty="0"/>
-              <a:t> database operations.</a:t>
-            </a:r>
+              <a:rPr lang="en-GB" dirty="0"/>
+              <a:t> </a:t>
+            </a:r>
+            <a:r>
+              <a:rPr lang="en-GB" b="1" dirty="0"/>
+              <a:t>keywords : </a:t>
+            </a:r>
+          </a:p>
+          <a:p>
+            <a:pPr lvl="1"/>
+            <a:r>
+              <a:rPr lang="en-GB" dirty="0"/>
+              <a:t> try</a:t>
+            </a:r>
+          </a:p>
+          <a:p>
+            <a:pPr lvl="1"/>
+            <a:r>
+              <a:rPr lang="en-GB" dirty="0"/>
+              <a:t> except</a:t>
+            </a:r>
+          </a:p>
+          <a:p>
+            <a:pPr lvl="1"/>
+            <a:r>
+              <a:rPr lang="en-GB" dirty="0"/>
+              <a:t> else</a:t>
+            </a:r>
+          </a:p>
+          <a:p>
+            <a:pPr lvl="1"/>
+            <a:r>
+              <a:rPr lang="en-GB" dirty="0"/>
+              <a:t> finally</a:t>
+            </a:r>
+            <a:endParaRPr lang="en-IN" dirty="0"/>
+          </a:p>
+          <a:p>
+            <a:r>
+              <a:rPr lang="en-IN" dirty="0"/>
+              <a:t> </a:t>
+            </a:r>
+            <a:r>
+              <a:rPr lang="en-IN" b="1" dirty="0"/>
+              <a:t>try : </a:t>
+            </a:r>
+            <a:r>
+              <a:rPr lang="en-IN" dirty="0"/>
+              <a:t>try to execute the block</a:t>
+            </a:r>
+          </a:p>
+          <a:p>
+            <a:r>
+              <a:rPr lang="en-IN" dirty="0"/>
+              <a:t> </a:t>
+            </a:r>
+            <a:r>
+              <a:rPr lang="en-IN" b="1" dirty="0"/>
+              <a:t>except : </a:t>
+            </a:r>
+            <a:r>
+              <a:rPr lang="en-IN" dirty="0"/>
+              <a:t>executes when the exception occurs</a:t>
+            </a:r>
+          </a:p>
+          <a:p>
+            <a:r>
+              <a:rPr lang="en-IN" dirty="0"/>
+              <a:t> </a:t>
+            </a:r>
+            <a:r>
+              <a:rPr lang="en-IN" b="1" dirty="0"/>
+              <a:t>else : </a:t>
+            </a:r>
+            <a:r>
+              <a:rPr lang="en-IN" dirty="0"/>
+              <a:t>runs when no exception occurs</a:t>
+            </a:r>
+          </a:p>
+          <a:p>
+            <a:r>
+              <a:rPr lang="en-IN" dirty="0"/>
+              <a:t> </a:t>
+            </a:r>
+            <a:r>
+              <a:rPr lang="en-IN" b="1" dirty="0"/>
+              <a:t>finally : </a:t>
+            </a:r>
+            <a:r>
+              <a:rPr lang="en-IN" dirty="0"/>
+              <a:t>this block always executes</a:t>
+            </a:r>
+            <a:endParaRPr lang="en-GB" dirty="0"/>
           </a:p>
         </p:txBody>
       </p:sp>
@@ -7442,7 +7511,7 @@
           <p:cNvPr id="4" name="Footer Placeholder 3">
             <a:extLst>
               <a:ext uri="{FF2B5EF4-FFF2-40B4-BE49-F238E27FC236}">
-                <a16:creationId xmlns:a16="http://schemas.microsoft.com/office/drawing/2014/main" id="{793E04A4-1AA9-224D-956E-0338B88C51F4}"/>
+                <a16:creationId xmlns:a16="http://schemas.microsoft.com/office/drawing/2014/main" id="{72BD80CB-A028-534E-3E57-441FF63C0AAD}"/>
               </a:ext>
             </a:extLst>
           </p:cNvPr>
@@ -7471,7 +7540,7 @@
           <p:cNvPr id="5" name="Slide Number Placeholder 4">
             <a:extLst>
               <a:ext uri="{FF2B5EF4-FFF2-40B4-BE49-F238E27FC236}">
-                <a16:creationId xmlns:a16="http://schemas.microsoft.com/office/drawing/2014/main" id="{9FCD9DAB-05EF-3B1B-496B-CCCBE53F0A3E}"/>
+                <a16:creationId xmlns:a16="http://schemas.microsoft.com/office/drawing/2014/main" id="{0E5822AE-D486-BA76-0E08-1D718A0A6BE3}"/>
               </a:ext>
             </a:extLst>
           </p:cNvPr>
@@ -7498,7 +7567,7 @@
     </p:spTree>
     <p:extLst>
       <p:ext uri="{BB962C8B-B14F-4D97-AF65-F5344CB8AC3E}">
-        <p14:creationId xmlns:p14="http://schemas.microsoft.com/office/powerpoint/2010/main" val="2145168545"/>
+        <p14:creationId xmlns:p14="http://schemas.microsoft.com/office/powerpoint/2010/main" val="1480239433"/>
       </p:ext>
     </p:extLst>
   </p:cSld>
@@ -7530,7 +7599,7 @@
           <p:cNvPr id="2" name="Title 1">
             <a:extLst>
               <a:ext uri="{FF2B5EF4-FFF2-40B4-BE49-F238E27FC236}">
-                <a16:creationId xmlns:a16="http://schemas.microsoft.com/office/drawing/2014/main" id="{1FCB99E7-F51A-5F8F-0A2B-A1B4E791D20E}"/>
+                <a16:creationId xmlns:a16="http://schemas.microsoft.com/office/drawing/2014/main" id="{6037DABA-6315-8D57-BB48-0E452943FE7C}"/>
               </a:ext>
             </a:extLst>
           </p:cNvPr>
@@ -7548,7 +7617,7 @@
           <a:p>
             <a:r>
               <a:rPr lang="en-IN" dirty="0"/>
-              <a:t>Modules &amp; Packages</a:t>
+              <a:t>Problems</a:t>
             </a:r>
           </a:p>
         </p:txBody>
@@ -7558,7 +7627,7 @@
           <p:cNvPr id="3" name="Content Placeholder 2">
             <a:extLst>
               <a:ext uri="{FF2B5EF4-FFF2-40B4-BE49-F238E27FC236}">
-                <a16:creationId xmlns:a16="http://schemas.microsoft.com/office/drawing/2014/main" id="{7409316D-8C26-7210-C0E1-CFFF704126C4}"/>
+                <a16:creationId xmlns:a16="http://schemas.microsoft.com/office/drawing/2014/main" id="{B51B7CBC-3FC4-960A-3DED-6D0F670713EF}"/>
               </a:ext>
             </a:extLst>
           </p:cNvPr>
@@ -7575,111 +7644,33 @@
           <a:lstStyle/>
           <a:p>
             <a:r>
-              <a:rPr lang="en-GB" dirty="0"/>
-              <a:t> </a:t>
-            </a:r>
-            <a:r>
-              <a:rPr lang="en-GB" b="1" dirty="0"/>
-              <a:t>3 Types of Library Packages &amp; Modules : </a:t>
-            </a:r>
-          </a:p>
-          <a:p>
-            <a:pPr lvl="1"/>
-            <a:r>
-              <a:rPr lang="en-GB" dirty="0"/>
-              <a:t> Built-In.</a:t>
-            </a:r>
-          </a:p>
-          <a:p>
-            <a:pPr lvl="1"/>
-            <a:r>
-              <a:rPr lang="en-GB" dirty="0"/>
-              <a:t> User-Defined.</a:t>
-            </a:r>
-          </a:p>
-          <a:p>
-            <a:pPr lvl="1"/>
-            <a:r>
-              <a:rPr lang="en-GB" dirty="0"/>
-              <a:t> External.</a:t>
-            </a:r>
-          </a:p>
-          <a:p>
-            <a:r>
-              <a:rPr lang="en-GB" dirty="0"/>
-              <a:t> </a:t>
-            </a:r>
-            <a:r>
-              <a:rPr lang="en-GB" b="1" dirty="0"/>
-              <a:t>Built-In : </a:t>
-            </a:r>
-            <a:r>
-              <a:rPr lang="en-GB" dirty="0"/>
-              <a:t>pre-build python modules (os , datetime , math , random).</a:t>
-            </a:r>
-            <a:endParaRPr lang="en-GB" b="1" dirty="0"/>
-          </a:p>
-          <a:p>
-            <a:r>
-              <a:rPr lang="en-GB" dirty="0"/>
-              <a:t> </a:t>
-            </a:r>
-            <a:r>
-              <a:rPr lang="en-GB" b="1" dirty="0"/>
-              <a:t>User-Defined : </a:t>
-            </a:r>
-            <a:r>
-              <a:rPr lang="en-IN" dirty="0"/>
-              <a:t>custom modules created by developers.</a:t>
-            </a:r>
-            <a:endParaRPr lang="en-GB" dirty="0"/>
-          </a:p>
-          <a:p>
-            <a:r>
-              <a:rPr lang="en-GB" dirty="0"/>
-              <a:t> </a:t>
-            </a:r>
-            <a:r>
-              <a:rPr lang="en-GB" b="1" dirty="0"/>
-              <a:t>External : </a:t>
-            </a:r>
-            <a:r>
-              <a:rPr lang="en-IN" dirty="0"/>
-              <a:t>built by independent developers and open-source community . These modules can be installed through the </a:t>
-            </a:r>
-            <a:r>
-              <a:rPr lang="en-IN" b="1" dirty="0"/>
-              <a:t>command : pip install </a:t>
-            </a:r>
-            <a:r>
-              <a:rPr lang="en-IN" dirty="0"/>
-              <a:t>module</a:t>
-            </a:r>
-          </a:p>
-          <a:p>
-            <a:r>
-              <a:rPr lang="en-IN" b="1" dirty="0"/>
-              <a:t> Importing : </a:t>
-            </a:r>
-          </a:p>
-          <a:p>
-            <a:pPr lvl="1"/>
-            <a:r>
-              <a:rPr lang="en-IN" dirty="0"/>
-              <a:t> import module_name</a:t>
-            </a:r>
-          </a:p>
-          <a:p>
-            <a:pPr lvl="1"/>
-            <a:r>
-              <a:rPr lang="en-IN" b="1" dirty="0"/>
-              <a:t> </a:t>
-            </a:r>
-            <a:r>
-              <a:rPr lang="en-IN" dirty="0"/>
-              <a:t>from module_name import *</a:t>
-            </a:r>
-            <a:endParaRPr lang="en-GB" b="1" dirty="0"/>
+              <a:rPr lang="en-IN" dirty="0"/>
+              <a:t> simple calculator which works on any inputs.</a:t>
+            </a:r>
+          </a:p>
+          <a:p>
+            <a:r>
+              <a:rPr lang="en-IN" dirty="0"/>
+              <a:t> invalid input.</a:t>
+            </a:r>
+          </a:p>
+          <a:p>
+            <a:r>
+              <a:rPr lang="en-IN" dirty="0"/>
+              <a:t> string and list indexing.</a:t>
+            </a:r>
+          </a:p>
+          <a:p>
+            <a:r>
+              <a:rPr lang="en-IN" dirty="0"/>
+              <a:t> file operations.</a:t>
+            </a:r>
+          </a:p>
+          <a:p>
+            <a:r>
+              <a:rPr lang="en-IN" dirty="0"/>
+              <a:t> database operations.</a:t>
+            </a:r>
           </a:p>
         </p:txBody>
       </p:sp>
@@ -7688,7 +7679,7 @@
           <p:cNvPr id="4" name="Footer Placeholder 3">
             <a:extLst>
               <a:ext uri="{FF2B5EF4-FFF2-40B4-BE49-F238E27FC236}">
-                <a16:creationId xmlns:a16="http://schemas.microsoft.com/office/drawing/2014/main" id="{284EDD6F-94F9-AD66-7AD0-71560E0948EC}"/>
+                <a16:creationId xmlns:a16="http://schemas.microsoft.com/office/drawing/2014/main" id="{793E04A4-1AA9-224D-956E-0338B88C51F4}"/>
               </a:ext>
             </a:extLst>
           </p:cNvPr>
@@ -7717,7 +7708,7 @@
           <p:cNvPr id="5" name="Slide Number Placeholder 4">
             <a:extLst>
               <a:ext uri="{FF2B5EF4-FFF2-40B4-BE49-F238E27FC236}">
-                <a16:creationId xmlns:a16="http://schemas.microsoft.com/office/drawing/2014/main" id="{A30DD123-3895-9857-EA37-0C3847200B56}"/>
+                <a16:creationId xmlns:a16="http://schemas.microsoft.com/office/drawing/2014/main" id="{9FCD9DAB-05EF-3B1B-496B-CCCBE53F0A3E}"/>
               </a:ext>
             </a:extLst>
           </p:cNvPr>
@@ -7744,7 +7735,7 @@
     </p:spTree>
     <p:extLst>
       <p:ext uri="{BB962C8B-B14F-4D97-AF65-F5344CB8AC3E}">
-        <p14:creationId xmlns:p14="http://schemas.microsoft.com/office/powerpoint/2010/main" val="1780490698"/>
+        <p14:creationId xmlns:p14="http://schemas.microsoft.com/office/powerpoint/2010/main" val="2145168545"/>
       </p:ext>
     </p:extLst>
   </p:cSld>
@@ -7776,7 +7767,7 @@
           <p:cNvPr id="2" name="Title 1">
             <a:extLst>
               <a:ext uri="{FF2B5EF4-FFF2-40B4-BE49-F238E27FC236}">
-                <a16:creationId xmlns:a16="http://schemas.microsoft.com/office/drawing/2014/main" id="{4E910C82-F4D6-8BAD-4B49-32DCFF98126F}"/>
+                <a16:creationId xmlns:a16="http://schemas.microsoft.com/office/drawing/2014/main" id="{1FCB99E7-F51A-5F8F-0A2B-A1B4E791D20E}"/>
               </a:ext>
             </a:extLst>
           </p:cNvPr>
@@ -7793,129 +7784,139 @@
           <a:lstStyle/>
           <a:p>
             <a:r>
+              <a:rPr lang="en-IN" dirty="0"/>
+              <a:t>Modules &amp; Packages</a:t>
+            </a:r>
+          </a:p>
+        </p:txBody>
+      </p:sp>
+      <p:sp>
+        <p:nvSpPr>
+          <p:cNvPr id="3" name="Content Placeholder 2">
+            <a:extLst>
+              <a:ext uri="{FF2B5EF4-FFF2-40B4-BE49-F238E27FC236}">
+                <a16:creationId xmlns:a16="http://schemas.microsoft.com/office/drawing/2014/main" id="{7409316D-8C26-7210-C0E1-CFFF704126C4}"/>
+              </a:ext>
+            </a:extLst>
+          </p:cNvPr>
+          <p:cNvSpPr>
+            <a:spLocks noGrp="1"/>
+          </p:cNvSpPr>
+          <p:nvPr>
+            <p:ph idx="1"/>
+          </p:nvPr>
+        </p:nvSpPr>
+        <p:spPr/>
+        <p:txBody>
+          <a:bodyPr/>
+          <a:lstStyle/>
+          <a:p>
+            <a:r>
               <a:rPr lang="en-GB" dirty="0"/>
-              <a:t>Virtual Environment</a:t>
-            </a:r>
-            <a:endParaRPr lang="en-IN" dirty="0"/>
-          </a:p>
-        </p:txBody>
-      </p:sp>
-      <p:sp>
-        <p:nvSpPr>
-          <p:cNvPr id="3" name="Content Placeholder 2">
-            <a:extLst>
-              <a:ext uri="{FF2B5EF4-FFF2-40B4-BE49-F238E27FC236}">
-                <a16:creationId xmlns:a16="http://schemas.microsoft.com/office/drawing/2014/main" id="{0543EA3C-E07C-5917-5EBD-2B2AB33F4B98}"/>
-              </a:ext>
-            </a:extLst>
-          </p:cNvPr>
-          <p:cNvSpPr>
-            <a:spLocks noGrp="1"/>
-          </p:cNvSpPr>
-          <p:nvPr>
-            <p:ph idx="1"/>
-          </p:nvPr>
-        </p:nvSpPr>
-        <p:spPr/>
-        <p:txBody>
-          <a:bodyPr/>
-          <a:lstStyle/>
-          <a:p>
-            <a:r>
-              <a:rPr lang="en-IN" dirty="0"/>
               <a:t> </a:t>
             </a:r>
             <a:r>
+              <a:rPr lang="en-GB" b="1" dirty="0"/>
+              <a:t>3 Types of Library Packages &amp; Modules : </a:t>
+            </a:r>
+          </a:p>
+          <a:p>
+            <a:pPr lvl="1"/>
+            <a:r>
+              <a:rPr lang="en-GB" dirty="0"/>
+              <a:t> Built-In.</a:t>
+            </a:r>
+          </a:p>
+          <a:p>
+            <a:pPr lvl="1"/>
+            <a:r>
+              <a:rPr lang="en-GB" dirty="0"/>
+              <a:t> User-Defined.</a:t>
+            </a:r>
+          </a:p>
+          <a:p>
+            <a:pPr lvl="1"/>
+            <a:r>
+              <a:rPr lang="en-GB" dirty="0"/>
+              <a:t> External.</a:t>
+            </a:r>
+          </a:p>
+          <a:p>
+            <a:r>
+              <a:rPr lang="en-GB" dirty="0"/>
+              <a:t> </a:t>
+            </a:r>
+            <a:r>
+              <a:rPr lang="en-GB" b="1" dirty="0"/>
+              <a:t>Built-In : </a:t>
+            </a:r>
+            <a:r>
+              <a:rPr lang="en-GB" dirty="0"/>
+              <a:t>pre-build python modules (os , datetime , math , random).</a:t>
+            </a:r>
+            <a:endParaRPr lang="en-GB" b="1" dirty="0"/>
+          </a:p>
+          <a:p>
+            <a:r>
+              <a:rPr lang="en-GB" dirty="0"/>
+              <a:t> </a:t>
+            </a:r>
+            <a:r>
+              <a:rPr lang="en-GB" b="1" dirty="0"/>
+              <a:t>User-Defined : </a:t>
+            </a:r>
+            <a:r>
+              <a:rPr lang="en-IN" dirty="0"/>
+              <a:t>custom modules created by developers.</a:t>
+            </a:r>
+            <a:endParaRPr lang="en-GB" dirty="0"/>
+          </a:p>
+          <a:p>
+            <a:r>
+              <a:rPr lang="en-GB" dirty="0"/>
+              <a:t> </a:t>
+            </a:r>
+            <a:r>
+              <a:rPr lang="en-GB" b="1" dirty="0"/>
+              <a:t>External : </a:t>
+            </a:r>
+            <a:r>
+              <a:rPr lang="en-IN" dirty="0"/>
+              <a:t>built by independent developers and open-source community . These modules can be installed through the </a:t>
+            </a:r>
+            <a:r>
               <a:rPr lang="en-IN" b="1" dirty="0"/>
-              <a:t>Python Main Environment Types : </a:t>
+              <a:t>command : pip install </a:t>
+            </a:r>
+            <a:r>
+              <a:rPr lang="en-IN" dirty="0"/>
+              <a:t>module</a:t>
+            </a:r>
+          </a:p>
+          <a:p>
+            <a:r>
+              <a:rPr lang="en-IN" b="1" dirty="0"/>
+              <a:t> Importing : </a:t>
             </a:r>
           </a:p>
           <a:p>
             <a:pPr lvl="1"/>
             <a:r>
               <a:rPr lang="en-IN" dirty="0"/>
-              <a:t> Global Environment.</a:t>
+              <a:t> import module_name</a:t>
             </a:r>
           </a:p>
           <a:p>
             <a:pPr lvl="1"/>
             <a:r>
-              <a:rPr lang="en-IN" dirty="0"/>
-              <a:t> Virtual Environment.</a:t>
-            </a:r>
-          </a:p>
-          <a:p>
-            <a:r>
-              <a:rPr lang="en-IN" dirty="0"/>
+              <a:rPr lang="en-IN" b="1" dirty="0"/>
               <a:t> </a:t>
             </a:r>
             <a:r>
-              <a:rPr lang="en-IN" b="1" dirty="0"/>
-              <a:t>Why Virtual Environment?</a:t>
-            </a:r>
-          </a:p>
-          <a:p>
-            <a:pPr lvl="1"/>
-            <a:r>
-              <a:rPr lang="en-IN" dirty="0"/>
-              <a:t> numpy 0.0.1 already exists in global environment.</a:t>
-            </a:r>
-          </a:p>
-          <a:p>
-            <a:pPr lvl="1"/>
-            <a:r>
-              <a:rPr lang="en-IN" dirty="0"/>
-              <a:t> project 1 : requires numpy 0.0.1.</a:t>
-            </a:r>
-          </a:p>
-          <a:p>
-            <a:pPr lvl="1"/>
-            <a:r>
-              <a:rPr lang="en-IN" dirty="0"/>
-              <a:t> project 2 : requires numpy 0.1.1.</a:t>
-            </a:r>
-          </a:p>
-          <a:p>
-            <a:pPr lvl="1"/>
-            <a:r>
-              <a:rPr lang="en-IN" dirty="0"/>
-              <a:t> changes version of this package will affect any one of the projects.</a:t>
-            </a:r>
-          </a:p>
-          <a:p>
-            <a:pPr lvl="1"/>
-            <a:r>
-              <a:rPr lang="en-IN" dirty="0"/>
-              <a:t> to overcome those create project 2 in virtual environment.</a:t>
-            </a:r>
-          </a:p>
-          <a:p>
-            <a:r>
-              <a:rPr lang="en-IN" dirty="0"/>
-              <a:t> </a:t>
-            </a:r>
-            <a:r>
-              <a:rPr lang="en-IN" b="1" dirty="0"/>
-              <a:t>create VE : </a:t>
-            </a:r>
-            <a:r>
-              <a:rPr lang="en-IN" dirty="0"/>
-              <a:t>python –m venv VEname</a:t>
-            </a:r>
-          </a:p>
-          <a:p>
-            <a:r>
-              <a:rPr lang="en-IN" dirty="0"/>
-              <a:t> </a:t>
-            </a:r>
-            <a:r>
-              <a:rPr lang="en-IN" b="1" dirty="0"/>
-              <a:t>Activation : </a:t>
-            </a:r>
-            <a:r>
-              <a:rPr lang="en-IN" dirty="0"/>
-              <a:t>In cmd change directory to scripts and enter activate.</a:t>
-            </a:r>
+              <a:rPr lang="en-IN" dirty="0"/>
+              <a:t>from module_name import *</a:t>
+            </a:r>
+            <a:endParaRPr lang="en-GB" b="1" dirty="0"/>
           </a:p>
         </p:txBody>
       </p:sp>
@@ -7924,7 +7925,7 @@
           <p:cNvPr id="4" name="Footer Placeholder 3">
             <a:extLst>
               <a:ext uri="{FF2B5EF4-FFF2-40B4-BE49-F238E27FC236}">
-                <a16:creationId xmlns:a16="http://schemas.microsoft.com/office/drawing/2014/main" id="{43D502F0-E14F-C473-977F-40A61FF19039}"/>
+                <a16:creationId xmlns:a16="http://schemas.microsoft.com/office/drawing/2014/main" id="{284EDD6F-94F9-AD66-7AD0-71560E0948EC}"/>
               </a:ext>
             </a:extLst>
           </p:cNvPr>
@@ -7953,7 +7954,7 @@
           <p:cNvPr id="5" name="Slide Number Placeholder 4">
             <a:extLst>
               <a:ext uri="{FF2B5EF4-FFF2-40B4-BE49-F238E27FC236}">
-                <a16:creationId xmlns:a16="http://schemas.microsoft.com/office/drawing/2014/main" id="{6706342E-FF86-F190-355B-93898D5F2A83}"/>
+                <a16:creationId xmlns:a16="http://schemas.microsoft.com/office/drawing/2014/main" id="{A30DD123-3895-9857-EA37-0C3847200B56}"/>
               </a:ext>
             </a:extLst>
           </p:cNvPr>
@@ -7980,7 +7981,7 @@
     </p:spTree>
     <p:extLst>
       <p:ext uri="{BB962C8B-B14F-4D97-AF65-F5344CB8AC3E}">
-        <p14:creationId xmlns:p14="http://schemas.microsoft.com/office/powerpoint/2010/main" val="2155345922"/>
+        <p14:creationId xmlns:p14="http://schemas.microsoft.com/office/powerpoint/2010/main" val="1780490698"/>
       </p:ext>
     </p:extLst>
   </p:cSld>
@@ -8012,7 +8013,7 @@
           <p:cNvPr id="2" name="Title 1">
             <a:extLst>
               <a:ext uri="{FF2B5EF4-FFF2-40B4-BE49-F238E27FC236}">
-                <a16:creationId xmlns:a16="http://schemas.microsoft.com/office/drawing/2014/main" id="{5CA56418-8A9A-5805-BCBB-4959E5ABF278}"/>
+                <a16:creationId xmlns:a16="http://schemas.microsoft.com/office/drawing/2014/main" id="{4E910C82-F4D6-8BAD-4B49-32DCFF98126F}"/>
               </a:ext>
             </a:extLst>
           </p:cNvPr>
@@ -8029,9 +8030,10 @@
           <a:lstStyle/>
           <a:p>
             <a:r>
-              <a:rPr lang="en-IN" dirty="0"/>
-              <a:t>Collections</a:t>
-            </a:r>
+              <a:rPr lang="en-GB" dirty="0"/>
+              <a:t>Virtual Environment</a:t>
+            </a:r>
+            <a:endParaRPr lang="en-IN" dirty="0"/>
           </a:p>
         </p:txBody>
       </p:sp>
@@ -8040,7 +8042,7 @@
           <p:cNvPr id="3" name="Content Placeholder 2">
             <a:extLst>
               <a:ext uri="{FF2B5EF4-FFF2-40B4-BE49-F238E27FC236}">
-                <a16:creationId xmlns:a16="http://schemas.microsoft.com/office/drawing/2014/main" id="{03DD4096-0D2C-E2BF-FF90-6117481C3C05}"/>
+                <a16:creationId xmlns:a16="http://schemas.microsoft.com/office/drawing/2014/main" id="{0543EA3C-E07C-5917-5EBD-2B2AB33F4B98}"/>
               </a:ext>
             </a:extLst>
           </p:cNvPr>
@@ -8062,65 +8064,94 @@
             </a:r>
             <a:r>
               <a:rPr lang="en-IN" b="1" dirty="0"/>
-              <a:t>Import : </a:t>
-            </a:r>
-            <a:r>
-              <a:rPr lang="en-IN" dirty="0"/>
-              <a:t>from collections import *</a:t>
-            </a:r>
-          </a:p>
-          <a:p>
+              <a:t>Python Main Environment Types : </a:t>
+            </a:r>
+          </a:p>
+          <a:p>
+            <a:pPr lvl="1"/>
+            <a:r>
+              <a:rPr lang="en-IN" dirty="0"/>
+              <a:t> Global Environment.</a:t>
+            </a:r>
+          </a:p>
+          <a:p>
+            <a:pPr lvl="1"/>
+            <a:r>
+              <a:rPr lang="en-IN" dirty="0"/>
+              <a:t> Virtual Environment.</a:t>
+            </a:r>
+          </a:p>
+          <a:p>
+            <a:r>
+              <a:rPr lang="en-IN" dirty="0"/>
+              <a:t> </a:t>
+            </a:r>
             <a:r>
               <a:rPr lang="en-IN" b="1" dirty="0"/>
-              <a:t> Counter : </a:t>
-            </a:r>
-            <a:r>
-              <a:rPr lang="en-IN" dirty="0"/>
-              <a:t>returns frequency as a dictionary.</a:t>
-            </a:r>
-          </a:p>
-          <a:p>
+              <a:t>Why Virtual Environment?</a:t>
+            </a:r>
+          </a:p>
+          <a:p>
+            <a:pPr lvl="1"/>
+            <a:r>
+              <a:rPr lang="en-IN" dirty="0"/>
+              <a:t> numpy 0.0.1 already exists in global environment.</a:t>
+            </a:r>
+          </a:p>
+          <a:p>
+            <a:pPr lvl="1"/>
+            <a:r>
+              <a:rPr lang="en-IN" dirty="0"/>
+              <a:t> project 1 : requires numpy 0.0.1.</a:t>
+            </a:r>
+          </a:p>
+          <a:p>
+            <a:pPr lvl="1"/>
+            <a:r>
+              <a:rPr lang="en-IN" dirty="0"/>
+              <a:t> project 2 : requires numpy 0.1.1.</a:t>
+            </a:r>
+          </a:p>
+          <a:p>
+            <a:pPr lvl="1"/>
+            <a:r>
+              <a:rPr lang="en-IN" dirty="0"/>
+              <a:t> changes version of this package will affect any one of the projects.</a:t>
+            </a:r>
+          </a:p>
+          <a:p>
+            <a:pPr lvl="1"/>
+            <a:r>
+              <a:rPr lang="en-IN" dirty="0"/>
+              <a:t> to overcome those create project 2 in virtual environment.</a:t>
+            </a:r>
+          </a:p>
+          <a:p>
+            <a:r>
+              <a:rPr lang="en-IN" dirty="0"/>
+              <a:t> </a:t>
+            </a:r>
             <a:r>
               <a:rPr lang="en-IN" b="1" dirty="0"/>
-              <a:t> defaultdict : </a:t>
-            </a:r>
-            <a:r>
-              <a:rPr lang="en-IN" dirty="0"/>
-              <a:t>dictionary with default key as 0.</a:t>
-            </a:r>
-          </a:p>
-          <a:p>
+              <a:t>create VE : </a:t>
+            </a:r>
+            <a:r>
+              <a:rPr lang="en-IN" dirty="0"/>
+              <a:t>python –m venv VEname</a:t>
+            </a:r>
+          </a:p>
+          <a:p>
+            <a:r>
+              <a:rPr lang="en-IN" dirty="0"/>
+              <a:t> </a:t>
+            </a:r>
             <a:r>
               <a:rPr lang="en-IN" b="1" dirty="0"/>
-              <a:t> ChainMap : </a:t>
-            </a:r>
-            <a:r>
-              <a:rPr lang="en-IN" dirty="0"/>
-              <a:t>for updation it creates a new index not modifies.</a:t>
-            </a:r>
-          </a:p>
-          <a:p>
-            <a:r>
-              <a:rPr lang="en-IN" b="1" dirty="0"/>
-              <a:t> OrderedDict : </a:t>
-            </a:r>
-            <a:r>
-              <a:rPr lang="en-IN" dirty="0"/>
-              <a:t>order of the updation not change.</a:t>
-            </a:r>
-          </a:p>
-          <a:p>
-            <a:r>
-              <a:rPr lang="en-IN" dirty="0"/>
-              <a:t> </a:t>
-            </a:r>
-            <a:r>
-              <a:rPr lang="en-IN" b="1" dirty="0"/>
-              <a:t>Dequeue : </a:t>
-            </a:r>
-            <a:r>
-              <a:rPr lang="en-IN" dirty="0"/>
-              <a:t>Implements Queue.</a:t>
+              <a:t>Activation : </a:t>
+            </a:r>
+            <a:r>
+              <a:rPr lang="en-IN" dirty="0"/>
+              <a:t>In cmd change directory to scripts and enter activate.</a:t>
             </a:r>
           </a:p>
         </p:txBody>
@@ -8130,7 +8161,7 @@
           <p:cNvPr id="4" name="Footer Placeholder 3">
             <a:extLst>
               <a:ext uri="{FF2B5EF4-FFF2-40B4-BE49-F238E27FC236}">
-                <a16:creationId xmlns:a16="http://schemas.microsoft.com/office/drawing/2014/main" id="{7551125C-0612-0BB6-4524-77CDC89E331C}"/>
+                <a16:creationId xmlns:a16="http://schemas.microsoft.com/office/drawing/2014/main" id="{43D502F0-E14F-C473-977F-40A61FF19039}"/>
               </a:ext>
             </a:extLst>
           </p:cNvPr>
@@ -8159,7 +8190,7 @@
           <p:cNvPr id="5" name="Slide Number Placeholder 4">
             <a:extLst>
               <a:ext uri="{FF2B5EF4-FFF2-40B4-BE49-F238E27FC236}">
-                <a16:creationId xmlns:a16="http://schemas.microsoft.com/office/drawing/2014/main" id="{31F5E781-B492-4D2E-A425-D3367CBF888C}"/>
+                <a16:creationId xmlns:a16="http://schemas.microsoft.com/office/drawing/2014/main" id="{6706342E-FF86-F190-355B-93898D5F2A83}"/>
               </a:ext>
             </a:extLst>
           </p:cNvPr>
@@ -8186,7 +8217,7 @@
     </p:spTree>
     <p:extLst>
       <p:ext uri="{BB962C8B-B14F-4D97-AF65-F5344CB8AC3E}">
-        <p14:creationId xmlns:p14="http://schemas.microsoft.com/office/powerpoint/2010/main" val="2843299797"/>
+        <p14:creationId xmlns:p14="http://schemas.microsoft.com/office/powerpoint/2010/main" val="2155345922"/>
       </p:ext>
     </p:extLst>
   </p:cSld>
@@ -8218,7 +8249,7 @@
           <p:cNvPr id="2" name="Title 1">
             <a:extLst>
               <a:ext uri="{FF2B5EF4-FFF2-40B4-BE49-F238E27FC236}">
-                <a16:creationId xmlns:a16="http://schemas.microsoft.com/office/drawing/2014/main" id="{96366A88-CFBD-B97A-00EB-C635FE8A19F8}"/>
+                <a16:creationId xmlns:a16="http://schemas.microsoft.com/office/drawing/2014/main" id="{5CA56418-8A9A-5805-BCBB-4959E5ABF278}"/>
               </a:ext>
             </a:extLst>
           </p:cNvPr>
@@ -8235,10 +8266,9 @@
           <a:lstStyle/>
           <a:p>
             <a:r>
-              <a:rPr lang="en-GB" dirty="0"/>
-              <a:t>OS</a:t>
-            </a:r>
-            <a:endParaRPr lang="en-IN" dirty="0"/>
+              <a:rPr lang="en-IN" dirty="0"/>
+              <a:t>Collections</a:t>
+            </a:r>
           </a:p>
         </p:txBody>
       </p:sp>
@@ -8247,7 +8277,7 @@
           <p:cNvPr id="3" name="Content Placeholder 2">
             <a:extLst>
               <a:ext uri="{FF2B5EF4-FFF2-40B4-BE49-F238E27FC236}">
-                <a16:creationId xmlns:a16="http://schemas.microsoft.com/office/drawing/2014/main" id="{E0C53D46-508B-CE03-C0C5-4A07BB8ECD8A}"/>
+                <a16:creationId xmlns:a16="http://schemas.microsoft.com/office/drawing/2014/main" id="{03DD4096-0D2C-E2BF-FF90-6117481C3C05}"/>
               </a:ext>
             </a:extLst>
           </p:cNvPr>
@@ -8264,44 +8294,71 @@
           <a:lstStyle/>
           <a:p>
             <a:r>
+              <a:rPr lang="en-IN" dirty="0"/>
+              <a:t> </a:t>
+            </a:r>
+            <a:r>
               <a:rPr lang="en-IN" b="1" dirty="0"/>
-              <a:t> Import : </a:t>
-            </a:r>
-            <a:r>
-              <a:rPr lang="en-IN" dirty="0"/>
-              <a:t>import os</a:t>
+              <a:t>Import : </a:t>
+            </a:r>
+            <a:r>
+              <a:rPr lang="en-IN" dirty="0"/>
+              <a:t>from collections import *</a:t>
             </a:r>
           </a:p>
           <a:p>
             <a:r>
               <a:rPr lang="en-IN" b="1" dirty="0"/>
-              <a:t> Uses : </a:t>
-            </a:r>
-            <a:r>
-              <a:rPr lang="en-IN" dirty="0"/>
-              <a:t>files &amp; folders operations</a:t>
+              <a:t> Counter : </a:t>
+            </a:r>
+            <a:r>
+              <a:rPr lang="en-IN" dirty="0"/>
+              <a:t>returns frequency as a dictionary.</a:t>
             </a:r>
           </a:p>
           <a:p>
             <a:r>
               <a:rPr lang="en-IN" b="1" dirty="0"/>
-              <a:t> Operations : </a:t>
-            </a:r>
-            <a:r>
-              <a:rPr lang="en-IN" dirty="0"/>
-              <a:t>makedir , listdir , system , path , startfile , getuser , rename , remove , rmdir</a:t>
+              <a:t> defaultdict : </a:t>
+            </a:r>
+            <a:r>
+              <a:rPr lang="en-IN" dirty="0"/>
+              <a:t>dictionary with default key as 0.</a:t>
             </a:r>
           </a:p>
           <a:p>
             <a:r>
               <a:rPr lang="en-IN" b="1" dirty="0"/>
+              <a:t> ChainMap : </a:t>
+            </a:r>
+            <a:r>
+              <a:rPr lang="en-IN" dirty="0"/>
+              <a:t>for updation it creates a new index not modifies.</a:t>
+            </a:r>
+          </a:p>
+          <a:p>
+            <a:r>
+              <a:rPr lang="en-IN" b="1" dirty="0"/>
+              <a:t> OrderedDict : </a:t>
+            </a:r>
+            <a:r>
+              <a:rPr lang="en-IN" dirty="0"/>
+              <a:t>order of the updation not change.</a:t>
+            </a:r>
+          </a:p>
+          <a:p>
+            <a:r>
+              <a:rPr lang="en-IN" dirty="0"/>
               <a:t> </a:t>
             </a:r>
             <a:r>
-              <a:rPr lang="en-IN" dirty="0"/>
-              <a:t>also used to execute the cmd commands.</a:t>
-            </a:r>
-            <a:endParaRPr lang="en-IN" b="1" dirty="0"/>
+              <a:rPr lang="en-IN" b="1" dirty="0"/>
+              <a:t>Dequeue : </a:t>
+            </a:r>
+            <a:r>
+              <a:rPr lang="en-IN" dirty="0"/>
+              <a:t>Implements Queue.</a:t>
+            </a:r>
           </a:p>
         </p:txBody>
       </p:sp>
@@ -8310,7 +8367,7 @@
           <p:cNvPr id="4" name="Footer Placeholder 3">
             <a:extLst>
               <a:ext uri="{FF2B5EF4-FFF2-40B4-BE49-F238E27FC236}">
-                <a16:creationId xmlns:a16="http://schemas.microsoft.com/office/drawing/2014/main" id="{C8996E58-34C6-D144-C03C-FBE8CD89090D}"/>
+                <a16:creationId xmlns:a16="http://schemas.microsoft.com/office/drawing/2014/main" id="{7551125C-0612-0BB6-4524-77CDC89E331C}"/>
               </a:ext>
             </a:extLst>
           </p:cNvPr>
@@ -8339,7 +8396,7 @@
           <p:cNvPr id="5" name="Slide Number Placeholder 4">
             <a:extLst>
               <a:ext uri="{FF2B5EF4-FFF2-40B4-BE49-F238E27FC236}">
-                <a16:creationId xmlns:a16="http://schemas.microsoft.com/office/drawing/2014/main" id="{A0B8147F-3551-F86D-E2DF-18461434347C}"/>
+                <a16:creationId xmlns:a16="http://schemas.microsoft.com/office/drawing/2014/main" id="{31F5E781-B492-4D2E-A425-D3367CBF888C}"/>
               </a:ext>
             </a:extLst>
           </p:cNvPr>
@@ -8366,7 +8423,7 @@
     </p:spTree>
     <p:extLst>
       <p:ext uri="{BB962C8B-B14F-4D97-AF65-F5344CB8AC3E}">
-        <p14:creationId xmlns:p14="http://schemas.microsoft.com/office/powerpoint/2010/main" val="609168797"/>
+        <p14:creationId xmlns:p14="http://schemas.microsoft.com/office/powerpoint/2010/main" val="2843299797"/>
       </p:ext>
     </p:extLst>
   </p:cSld>
@@ -8398,7 +8455,7 @@
           <p:cNvPr id="2" name="Title 1">
             <a:extLst>
               <a:ext uri="{FF2B5EF4-FFF2-40B4-BE49-F238E27FC236}">
-                <a16:creationId xmlns:a16="http://schemas.microsoft.com/office/drawing/2014/main" id="{434F5D56-38D2-FC34-E6C3-431B49D3B854}"/>
+                <a16:creationId xmlns:a16="http://schemas.microsoft.com/office/drawing/2014/main" id="{96366A88-CFBD-B97A-00EB-C635FE8A19F8}"/>
               </a:ext>
             </a:extLst>
           </p:cNvPr>
@@ -8415,9 +8472,10 @@
           <a:lstStyle/>
           <a:p>
             <a:r>
-              <a:rPr lang="en-IN" dirty="0"/>
-              <a:t>Math</a:t>
-            </a:r>
+              <a:rPr lang="en-GB" dirty="0"/>
+              <a:t>OS</a:t>
+            </a:r>
+            <a:endParaRPr lang="en-IN" dirty="0"/>
           </a:p>
         </p:txBody>
       </p:sp>
@@ -8426,7 +8484,7 @@
           <p:cNvPr id="3" name="Content Placeholder 2">
             <a:extLst>
               <a:ext uri="{FF2B5EF4-FFF2-40B4-BE49-F238E27FC236}">
-                <a16:creationId xmlns:a16="http://schemas.microsoft.com/office/drawing/2014/main" id="{223C7B8F-EBE5-9DE4-0F7D-695792180D17}"/>
+                <a16:creationId xmlns:a16="http://schemas.microsoft.com/office/drawing/2014/main" id="{E0C53D46-508B-CE03-C0C5-4A07BB8ECD8A}"/>
               </a:ext>
             </a:extLst>
           </p:cNvPr>
@@ -8443,37 +8501,44 @@
           <a:lstStyle/>
           <a:p>
             <a:r>
-              <a:rPr lang="en-IN" dirty="0"/>
+              <a:rPr lang="en-IN" b="1" dirty="0"/>
+              <a:t> Import : </a:t>
+            </a:r>
+            <a:r>
+              <a:rPr lang="en-IN" dirty="0"/>
+              <a:t>import os</a:t>
+            </a:r>
+          </a:p>
+          <a:p>
+            <a:r>
+              <a:rPr lang="en-IN" b="1" dirty="0"/>
+              <a:t> Uses : </a:t>
+            </a:r>
+            <a:r>
+              <a:rPr lang="en-IN" dirty="0"/>
+              <a:t>files &amp; folders operations</a:t>
+            </a:r>
+          </a:p>
+          <a:p>
+            <a:r>
+              <a:rPr lang="en-IN" b="1" dirty="0"/>
+              <a:t> Operations : </a:t>
+            </a:r>
+            <a:r>
+              <a:rPr lang="en-IN" dirty="0"/>
+              <a:t>makedir , listdir , system , path , startfile , getuser , rename , remove , rmdir</a:t>
+            </a:r>
+          </a:p>
+          <a:p>
+            <a:r>
+              <a:rPr lang="en-IN" b="1" dirty="0"/>
               <a:t> </a:t>
             </a:r>
             <a:r>
-              <a:rPr lang="en-IN" b="1" dirty="0"/>
-              <a:t>Package : </a:t>
-            </a:r>
-            <a:r>
-              <a:rPr lang="en-IN" dirty="0"/>
-              <a:t>math</a:t>
-            </a:r>
-          </a:p>
-          <a:p>
-            <a:r>
-              <a:rPr lang="en-IN" dirty="0"/>
-              <a:t> used for mathematical operations</a:t>
-            </a:r>
-          </a:p>
-          <a:p>
-            <a:r>
-              <a:rPr lang="en-IN" dirty="0"/>
-              <a:t> </a:t>
-            </a:r>
-            <a:r>
-              <a:rPr lang="en-IN" b="1" dirty="0"/>
-              <a:t>Functions : </a:t>
-            </a:r>
-            <a:r>
-              <a:rPr lang="en-IN" dirty="0"/>
-              <a:t>sqrt() , gcd() , lcm() , factorial() , floor() , ceil() , log() , pow() , prod() .</a:t>
-            </a:r>
+              <a:rPr lang="en-IN" dirty="0"/>
+              <a:t>also used to execute the cmd commands.</a:t>
+            </a:r>
+            <a:endParaRPr lang="en-IN" b="1" dirty="0"/>
           </a:p>
         </p:txBody>
       </p:sp>
@@ -8482,7 +8547,7 @@
           <p:cNvPr id="4" name="Footer Placeholder 3">
             <a:extLst>
               <a:ext uri="{FF2B5EF4-FFF2-40B4-BE49-F238E27FC236}">
-                <a16:creationId xmlns:a16="http://schemas.microsoft.com/office/drawing/2014/main" id="{5940098E-A127-E081-A037-48F29067B548}"/>
+                <a16:creationId xmlns:a16="http://schemas.microsoft.com/office/drawing/2014/main" id="{C8996E58-34C6-D144-C03C-FBE8CD89090D}"/>
               </a:ext>
             </a:extLst>
           </p:cNvPr>
@@ -8511,7 +8576,7 @@
           <p:cNvPr id="5" name="Slide Number Placeholder 4">
             <a:extLst>
               <a:ext uri="{FF2B5EF4-FFF2-40B4-BE49-F238E27FC236}">
-                <a16:creationId xmlns:a16="http://schemas.microsoft.com/office/drawing/2014/main" id="{F8AD206D-52F3-9A34-127F-2CD8392EBF28}"/>
+                <a16:creationId xmlns:a16="http://schemas.microsoft.com/office/drawing/2014/main" id="{A0B8147F-3551-F86D-E2DF-18461434347C}"/>
               </a:ext>
             </a:extLst>
           </p:cNvPr>
@@ -8538,7 +8603,7 @@
     </p:spTree>
     <p:extLst>
       <p:ext uri="{BB962C8B-B14F-4D97-AF65-F5344CB8AC3E}">
-        <p14:creationId xmlns:p14="http://schemas.microsoft.com/office/powerpoint/2010/main" val="2833460125"/>
+        <p14:creationId xmlns:p14="http://schemas.microsoft.com/office/powerpoint/2010/main" val="609168797"/>
       </p:ext>
     </p:extLst>
   </p:cSld>
@@ -8570,7 +8635,7 @@
           <p:cNvPr id="2" name="Title 1">
             <a:extLst>
               <a:ext uri="{FF2B5EF4-FFF2-40B4-BE49-F238E27FC236}">
-                <a16:creationId xmlns:a16="http://schemas.microsoft.com/office/drawing/2014/main" id="{F4F099D4-75DE-2228-3253-ECEEA4A44245}"/>
+                <a16:creationId xmlns:a16="http://schemas.microsoft.com/office/drawing/2014/main" id="{434F5D56-38D2-FC34-E6C3-431B49D3B854}"/>
               </a:ext>
             </a:extLst>
           </p:cNvPr>
@@ -8588,7 +8653,7 @@
           <a:p>
             <a:r>
               <a:rPr lang="en-IN" dirty="0"/>
-              <a:t>Data Generator</a:t>
+              <a:t>Math</a:t>
             </a:r>
           </a:p>
         </p:txBody>
@@ -8598,7 +8663,7 @@
           <p:cNvPr id="3" name="Content Placeholder 2">
             <a:extLst>
               <a:ext uri="{FF2B5EF4-FFF2-40B4-BE49-F238E27FC236}">
-                <a16:creationId xmlns:a16="http://schemas.microsoft.com/office/drawing/2014/main" id="{A799FB1B-936E-83C0-D314-A9D32BEFDC25}"/>
+                <a16:creationId xmlns:a16="http://schemas.microsoft.com/office/drawing/2014/main" id="{223C7B8F-EBE5-9DE4-0F7D-695792180D17}"/>
               </a:ext>
             </a:extLst>
           </p:cNvPr>
@@ -8624,7 +8689,13 @@
             </a:r>
             <a:r>
               <a:rPr lang="en-IN" dirty="0"/>
-              <a:t>faker</a:t>
+              <a:t>math</a:t>
+            </a:r>
+          </a:p>
+          <a:p>
+            <a:r>
+              <a:rPr lang="en-IN" dirty="0"/>
+              <a:t> used for mathematical operations</a:t>
             </a:r>
           </a:p>
           <a:p>
@@ -8634,23 +8705,12 @@
             </a:r>
             <a:r>
               <a:rPr lang="en-IN" b="1" dirty="0"/>
-              <a:t>Usage : </a:t>
-            </a:r>
-            <a:r>
-              <a:rPr lang="en-IN" dirty="0"/>
-              <a:t>generates fake data</a:t>
-            </a:r>
-          </a:p>
-          <a:p>
-            <a:r>
-              <a:rPr lang="en-IN" dirty="0"/>
-              <a:t> </a:t>
-            </a:r>
-            <a:r>
-              <a:rPr lang="en-IN" b="1" dirty="0"/>
-              <a:t>cmd : pip install faker</a:t>
-            </a:r>
-            <a:endParaRPr lang="en-IN" dirty="0"/>
+              <a:t>Functions : </a:t>
+            </a:r>
+            <a:r>
+              <a:rPr lang="en-IN" dirty="0"/>
+              <a:t>sqrt() , gcd() , lcm() , factorial() , floor() , ceil() , log() , pow() , prod() .</a:t>
+            </a:r>
           </a:p>
         </p:txBody>
       </p:sp>
@@ -8659,7 +8719,7 @@
           <p:cNvPr id="4" name="Footer Placeholder 3">
             <a:extLst>
               <a:ext uri="{FF2B5EF4-FFF2-40B4-BE49-F238E27FC236}">
-                <a16:creationId xmlns:a16="http://schemas.microsoft.com/office/drawing/2014/main" id="{707FD7A8-A650-29AB-1F96-AA998CE268BB}"/>
+                <a16:creationId xmlns:a16="http://schemas.microsoft.com/office/drawing/2014/main" id="{5940098E-A127-E081-A037-48F29067B548}"/>
               </a:ext>
             </a:extLst>
           </p:cNvPr>
@@ -8688,7 +8748,7 @@
           <p:cNvPr id="5" name="Slide Number Placeholder 4">
             <a:extLst>
               <a:ext uri="{FF2B5EF4-FFF2-40B4-BE49-F238E27FC236}">
-                <a16:creationId xmlns:a16="http://schemas.microsoft.com/office/drawing/2014/main" id="{4D8E87B5-D318-9AA5-634B-EFDFEA10639F}"/>
+                <a16:creationId xmlns:a16="http://schemas.microsoft.com/office/drawing/2014/main" id="{F8AD206D-52F3-9A34-127F-2CD8392EBF28}"/>
               </a:ext>
             </a:extLst>
           </p:cNvPr>
@@ -8715,7 +8775,7 @@
     </p:spTree>
     <p:extLst>
       <p:ext uri="{BB962C8B-B14F-4D97-AF65-F5344CB8AC3E}">
-        <p14:creationId xmlns:p14="http://schemas.microsoft.com/office/powerpoint/2010/main" val="683650118"/>
+        <p14:creationId xmlns:p14="http://schemas.microsoft.com/office/powerpoint/2010/main" val="2833460125"/>
       </p:ext>
     </p:extLst>
   </p:cSld>
@@ -8747,7 +8807,7 @@
           <p:cNvPr id="2" name="Title 1">
             <a:extLst>
               <a:ext uri="{FF2B5EF4-FFF2-40B4-BE49-F238E27FC236}">
-                <a16:creationId xmlns:a16="http://schemas.microsoft.com/office/drawing/2014/main" id="{9E6DD218-3F31-33F2-8CDB-7DA5BBC005B5}"/>
+                <a16:creationId xmlns:a16="http://schemas.microsoft.com/office/drawing/2014/main" id="{F4F099D4-75DE-2228-3253-ECEEA4A44245}"/>
               </a:ext>
             </a:extLst>
           </p:cNvPr>
@@ -8764,10 +8824,9 @@
           <a:lstStyle/>
           <a:p>
             <a:r>
-              <a:rPr lang="en-GB" dirty="0"/>
-              <a:t>Excel</a:t>
-            </a:r>
-            <a:endParaRPr lang="en-IN" dirty="0"/>
+              <a:rPr lang="en-IN" dirty="0"/>
+              <a:t>Data Generator</a:t>
+            </a:r>
           </a:p>
         </p:txBody>
       </p:sp>
@@ -8776,7 +8835,7 @@
           <p:cNvPr id="3" name="Content Placeholder 2">
             <a:extLst>
               <a:ext uri="{FF2B5EF4-FFF2-40B4-BE49-F238E27FC236}">
-                <a16:creationId xmlns:a16="http://schemas.microsoft.com/office/drawing/2014/main" id="{500E92CE-D89D-F2AE-C187-40E84467AA4A}"/>
+                <a16:creationId xmlns:a16="http://schemas.microsoft.com/office/drawing/2014/main" id="{A799FB1B-936E-83C0-D314-A9D32BEFDC25}"/>
               </a:ext>
             </a:extLst>
           </p:cNvPr>
@@ -8802,7 +8861,7 @@
             </a:r>
             <a:r>
               <a:rPr lang="en-IN" dirty="0"/>
-              <a:t>openpyxl</a:t>
+              <a:t>faker</a:t>
             </a:r>
           </a:p>
           <a:p>
@@ -8812,11 +8871,11 @@
             </a:r>
             <a:r>
               <a:rPr lang="en-IN" b="1" dirty="0"/>
-              <a:t>Operations : </a:t>
-            </a:r>
-            <a:r>
-              <a:rPr lang="en-IN" dirty="0"/>
-              <a:t>read , write , excel automation</a:t>
+              <a:t>Usage : </a:t>
+            </a:r>
+            <a:r>
+              <a:rPr lang="en-IN" dirty="0"/>
+              <a:t>generates fake data</a:t>
             </a:r>
           </a:p>
           <a:p>
@@ -8826,40 +8885,9 @@
             </a:r>
             <a:r>
               <a:rPr lang="en-IN" b="1" dirty="0"/>
-              <a:t>Sample Flow : </a:t>
-            </a:r>
-          </a:p>
-          <a:p>
-            <a:pPr lvl="1"/>
-            <a:r>
-              <a:rPr lang="en-IN" b="1" dirty="0"/>
-              <a:t> </a:t>
-            </a:r>
-            <a:r>
-              <a:rPr lang="en-IN" dirty="0"/>
-              <a:t>Create a WorkBook , Add WorkSheets , Rename Sheets , Create Tables.</a:t>
-            </a:r>
-          </a:p>
-          <a:p>
-            <a:pPr lvl="1"/>
-            <a:r>
-              <a:rPr lang="en-IN" dirty="0"/>
-              <a:t> When the WorkBook exists , load WorkBook.</a:t>
-            </a:r>
-          </a:p>
-          <a:p>
-            <a:pPr lvl="1"/>
-            <a:r>
-              <a:rPr lang="en-IN" dirty="0"/>
-              <a:t> Within WorkSheets add the data and read data.</a:t>
-            </a:r>
-          </a:p>
-          <a:p>
-            <a:pPr lvl="1"/>
-            <a:r>
-              <a:rPr lang="en-IN" dirty="0"/>
-              <a:t> Save the WorkBook.</a:t>
-            </a:r>
+              <a:t>cmd : pip install faker</a:t>
+            </a:r>
+            <a:endParaRPr lang="en-IN" dirty="0"/>
           </a:p>
         </p:txBody>
       </p:sp>
@@ -8868,7 +8896,7 @@
           <p:cNvPr id="4" name="Footer Placeholder 3">
             <a:extLst>
               <a:ext uri="{FF2B5EF4-FFF2-40B4-BE49-F238E27FC236}">
-                <a16:creationId xmlns:a16="http://schemas.microsoft.com/office/drawing/2014/main" id="{55C92561-856D-7F47-3708-294C94D9D3BA}"/>
+                <a16:creationId xmlns:a16="http://schemas.microsoft.com/office/drawing/2014/main" id="{707FD7A8-A650-29AB-1F96-AA998CE268BB}"/>
               </a:ext>
             </a:extLst>
           </p:cNvPr>
@@ -8897,7 +8925,7 @@
           <p:cNvPr id="5" name="Slide Number Placeholder 4">
             <a:extLst>
               <a:ext uri="{FF2B5EF4-FFF2-40B4-BE49-F238E27FC236}">
-                <a16:creationId xmlns:a16="http://schemas.microsoft.com/office/drawing/2014/main" id="{5A544846-71AE-4EED-7C71-69CBD266AB5B}"/>
+                <a16:creationId xmlns:a16="http://schemas.microsoft.com/office/drawing/2014/main" id="{4D8E87B5-D318-9AA5-634B-EFDFEA10639F}"/>
               </a:ext>
             </a:extLst>
           </p:cNvPr>
@@ -8924,7 +8952,7 @@
     </p:spTree>
     <p:extLst>
       <p:ext uri="{BB962C8B-B14F-4D97-AF65-F5344CB8AC3E}">
-        <p14:creationId xmlns:p14="http://schemas.microsoft.com/office/powerpoint/2010/main" val="1926792215"/>
+        <p14:creationId xmlns:p14="http://schemas.microsoft.com/office/powerpoint/2010/main" val="683650118"/>
       </p:ext>
     </p:extLst>
   </p:cSld>
@@ -8956,7 +8984,7 @@
           <p:cNvPr id="2" name="Title 1">
             <a:extLst>
               <a:ext uri="{FF2B5EF4-FFF2-40B4-BE49-F238E27FC236}">
-                <a16:creationId xmlns:a16="http://schemas.microsoft.com/office/drawing/2014/main" id="{9FDFE934-FCD7-0FF7-3D48-FE377DC2C4BB}"/>
+                <a16:creationId xmlns:a16="http://schemas.microsoft.com/office/drawing/2014/main" id="{9E6DD218-3F31-33F2-8CDB-7DA5BBC005B5}"/>
               </a:ext>
             </a:extLst>
           </p:cNvPr>
@@ -8974,7 +9002,7 @@
           <a:p>
             <a:r>
               <a:rPr lang="en-GB" dirty="0"/>
-              <a:t>Datetime</a:t>
+              <a:t>Excel</a:t>
             </a:r>
             <a:endParaRPr lang="en-IN" dirty="0"/>
           </a:p>
@@ -8985,7 +9013,7 @@
           <p:cNvPr id="3" name="Content Placeholder 2">
             <a:extLst>
               <a:ext uri="{FF2B5EF4-FFF2-40B4-BE49-F238E27FC236}">
-                <a16:creationId xmlns:a16="http://schemas.microsoft.com/office/drawing/2014/main" id="{39006957-BA22-F06D-3CB4-AD976E5ED1FC}"/>
+                <a16:creationId xmlns:a16="http://schemas.microsoft.com/office/drawing/2014/main" id="{500E92CE-D89D-F2AE-C187-40E84467AA4A}"/>
               </a:ext>
             </a:extLst>
           </p:cNvPr>
@@ -9002,59 +9030,72 @@
           <a:lstStyle/>
           <a:p>
             <a:r>
-              <a:rPr lang="en-GB" dirty="0"/>
+              <a:rPr lang="en-IN" dirty="0"/>
               <a:t> </a:t>
             </a:r>
             <a:r>
-              <a:rPr lang="en-GB" b="1" dirty="0"/>
-              <a:t>Import : </a:t>
-            </a:r>
-            <a:r>
-              <a:rPr lang="en-GB" dirty="0"/>
-              <a:t>import datetime	or	from datetime import *</a:t>
-            </a:r>
-          </a:p>
-          <a:p>
-            <a:r>
-              <a:rPr lang="en-GB" dirty="0"/>
+              <a:rPr lang="en-IN" b="1" dirty="0"/>
+              <a:t>Package : </a:t>
+            </a:r>
+            <a:r>
+              <a:rPr lang="en-IN" dirty="0"/>
+              <a:t>openpyxl</a:t>
+            </a:r>
+          </a:p>
+          <a:p>
+            <a:r>
+              <a:rPr lang="en-IN" dirty="0"/>
               <a:t> </a:t>
             </a:r>
             <a:r>
-              <a:rPr lang="en-GB" b="1" dirty="0"/>
-              <a:t>Uses : </a:t>
+              <a:rPr lang="en-IN" b="1" dirty="0"/>
+              <a:t>Operations : </a:t>
+            </a:r>
+            <a:r>
+              <a:rPr lang="en-IN" dirty="0"/>
+              <a:t>read , write , excel automation</a:t>
+            </a:r>
+          </a:p>
+          <a:p>
+            <a:r>
+              <a:rPr lang="en-IN" dirty="0"/>
+              <a:t> </a:t>
+            </a:r>
+            <a:r>
+              <a:rPr lang="en-IN" b="1" dirty="0"/>
+              <a:t>Sample Flow : </a:t>
             </a:r>
           </a:p>
           <a:p>
             <a:pPr lvl="1"/>
             <a:r>
-              <a:rPr lang="en-GB" b="1" dirty="0"/>
+              <a:rPr lang="en-IN" b="1" dirty="0"/>
               <a:t> </a:t>
             </a:r>
             <a:r>
-              <a:rPr lang="en-GB" dirty="0"/>
-              <a:t>get current date &amp; time.</a:t>
-            </a:r>
-            <a:endParaRPr lang="en-GB" b="1" dirty="0"/>
+              <a:rPr lang="en-IN" dirty="0"/>
+              <a:t>Create a WorkBook , Add WorkSheets , Rename Sheets , Create Tables.</a:t>
+            </a:r>
           </a:p>
           <a:p>
             <a:pPr lvl="1"/>
             <a:r>
-              <a:rPr lang="en-GB" dirty="0"/>
-              <a:t> datetime parser in different ways.</a:t>
+              <a:rPr lang="en-IN" dirty="0"/>
+              <a:t> When the WorkBook exists , load WorkBook.</a:t>
             </a:r>
           </a:p>
           <a:p>
             <a:pPr lvl="1"/>
             <a:r>
-              <a:rPr lang="en-GB" dirty="0"/>
-              <a:t> compare 2 dates.</a:t>
+              <a:rPr lang="en-IN" dirty="0"/>
+              <a:t> Within WorkSheets add the data and read data.</a:t>
             </a:r>
           </a:p>
           <a:p>
             <a:pPr lvl="1"/>
             <a:r>
-              <a:rPr lang="en-GB" dirty="0"/>
-              <a:t> date &amp; time calculations.</a:t>
+              <a:rPr lang="en-IN" dirty="0"/>
+              <a:t> Save the WorkBook.</a:t>
             </a:r>
           </a:p>
         </p:txBody>
@@ -9064,7 +9105,7 @@
           <p:cNvPr id="4" name="Footer Placeholder 3">
             <a:extLst>
               <a:ext uri="{FF2B5EF4-FFF2-40B4-BE49-F238E27FC236}">
-                <a16:creationId xmlns:a16="http://schemas.microsoft.com/office/drawing/2014/main" id="{723E5E67-40AC-20E1-815F-D843004BA175}"/>
+                <a16:creationId xmlns:a16="http://schemas.microsoft.com/office/drawing/2014/main" id="{55C92561-856D-7F47-3708-294C94D9D3BA}"/>
               </a:ext>
             </a:extLst>
           </p:cNvPr>
@@ -9093,7 +9134,7 @@
           <p:cNvPr id="5" name="Slide Number Placeholder 4">
             <a:extLst>
               <a:ext uri="{FF2B5EF4-FFF2-40B4-BE49-F238E27FC236}">
-                <a16:creationId xmlns:a16="http://schemas.microsoft.com/office/drawing/2014/main" id="{C7832505-4646-07D5-87EB-4E8F6703AB14}"/>
+                <a16:creationId xmlns:a16="http://schemas.microsoft.com/office/drawing/2014/main" id="{5A544846-71AE-4EED-7C71-69CBD266AB5B}"/>
               </a:ext>
             </a:extLst>
           </p:cNvPr>
@@ -9120,7 +9161,7 @@
     </p:spTree>
     <p:extLst>
       <p:ext uri="{BB962C8B-B14F-4D97-AF65-F5344CB8AC3E}">
-        <p14:creationId xmlns:p14="http://schemas.microsoft.com/office/powerpoint/2010/main" val="682083692"/>
+        <p14:creationId xmlns:p14="http://schemas.microsoft.com/office/powerpoint/2010/main" val="1926792215"/>
       </p:ext>
     </p:extLst>
   </p:cSld>
@@ -10091,7 +10132,7 @@
           <p:cNvPr id="2" name="Title 1">
             <a:extLst>
               <a:ext uri="{FF2B5EF4-FFF2-40B4-BE49-F238E27FC236}">
-                <a16:creationId xmlns:a16="http://schemas.microsoft.com/office/drawing/2014/main" id="{D70072C2-CAC4-C990-6527-C89C83DBC442}"/>
+                <a16:creationId xmlns:a16="http://schemas.microsoft.com/office/drawing/2014/main" id="{9FDFE934-FCD7-0FF7-3D48-FE377DC2C4BB}"/>
               </a:ext>
             </a:extLst>
           </p:cNvPr>
@@ -10109,7 +10150,7 @@
           <a:p>
             <a:r>
               <a:rPr lang="en-GB" dirty="0"/>
-              <a:t>Email</a:t>
+              <a:t>Datetime</a:t>
             </a:r>
             <a:endParaRPr lang="en-IN" dirty="0"/>
           </a:p>
@@ -10120,7 +10161,7 @@
           <p:cNvPr id="3" name="Content Placeholder 2">
             <a:extLst>
               <a:ext uri="{FF2B5EF4-FFF2-40B4-BE49-F238E27FC236}">
-                <a16:creationId xmlns:a16="http://schemas.microsoft.com/office/drawing/2014/main" id="{96D6ED05-9C2A-02BA-AAD4-D9D580B91181}"/>
+                <a16:creationId xmlns:a16="http://schemas.microsoft.com/office/drawing/2014/main" id="{39006957-BA22-F06D-3CB4-AD976E5ED1FC}"/>
               </a:ext>
             </a:extLst>
           </p:cNvPr>
@@ -10142,11 +10183,11 @@
             </a:r>
             <a:r>
               <a:rPr lang="en-GB" b="1" dirty="0"/>
-              <a:t>Packages : </a:t>
+              <a:t>Import : </a:t>
             </a:r>
             <a:r>
               <a:rPr lang="en-GB" dirty="0"/>
-              <a:t>smtplib , mimetype , email</a:t>
+              <a:t>import datetime	or	from datetime import *</a:t>
             </a:r>
           </a:p>
           <a:p>
@@ -10158,50 +10199,39 @@
               <a:rPr lang="en-GB" b="1" dirty="0"/>
               <a:t>Uses : </a:t>
             </a:r>
+          </a:p>
+          <a:p>
+            <a:pPr lvl="1"/>
+            <a:r>
+              <a:rPr lang="en-GB" b="1" dirty="0"/>
+              <a:t> </a:t>
+            </a:r>
             <a:r>
               <a:rPr lang="en-GB" dirty="0"/>
-              <a:t>send simple mail &amp; mail with attachments</a:t>
-            </a:r>
-          </a:p>
-          <a:p>
+              <a:t>get current date &amp; time.</a:t>
+            </a:r>
+            <a:endParaRPr lang="en-GB" b="1" dirty="0"/>
+          </a:p>
+          <a:p>
+            <a:pPr lvl="1"/>
             <a:r>
               <a:rPr lang="en-GB" dirty="0"/>
-              <a:t> </a:t>
-            </a:r>
-            <a:r>
-              <a:rPr lang="en-GB" b="1" dirty="0"/>
-              <a:t>Steps : </a:t>
-            </a:r>
-            <a:endParaRPr lang="en-GB" dirty="0"/>
+              <a:t> datetime parser in different ways.</a:t>
+            </a:r>
           </a:p>
           <a:p>
             <a:pPr lvl="1"/>
             <a:r>
               <a:rPr lang="en-GB" dirty="0"/>
-              <a:t> create the app password.</a:t>
+              <a:t> compare 2 dates.</a:t>
             </a:r>
           </a:p>
           <a:p>
             <a:pPr lvl="1"/>
             <a:r>
               <a:rPr lang="en-GB" dirty="0"/>
-              <a:t> two-step verification.</a:t>
-            </a:r>
-          </a:p>
-          <a:p>
-            <a:pPr lvl="1"/>
-            <a:r>
-              <a:rPr lang="en-GB" dirty="0"/>
-              <a:t> securely store and read the password.</a:t>
-            </a:r>
-          </a:p>
-          <a:p>
-            <a:pPr lvl="1"/>
-            <a:r>
-              <a:rPr lang="en-GB" dirty="0"/>
-              <a:t> make smtp encrypted connection.</a:t>
-            </a:r>
-            <a:endParaRPr lang="en-IN" dirty="0"/>
+              <a:t> date &amp; time calculations.</a:t>
+            </a:r>
           </a:p>
         </p:txBody>
       </p:sp>
@@ -10210,7 +10240,7 @@
           <p:cNvPr id="4" name="Footer Placeholder 3">
             <a:extLst>
               <a:ext uri="{FF2B5EF4-FFF2-40B4-BE49-F238E27FC236}">
-                <a16:creationId xmlns:a16="http://schemas.microsoft.com/office/drawing/2014/main" id="{EC9EC30D-1289-FA18-7D84-4F3CF09AC37C}"/>
+                <a16:creationId xmlns:a16="http://schemas.microsoft.com/office/drawing/2014/main" id="{723E5E67-40AC-20E1-815F-D843004BA175}"/>
               </a:ext>
             </a:extLst>
           </p:cNvPr>
@@ -10239,7 +10269,7 @@
           <p:cNvPr id="5" name="Slide Number Placeholder 4">
             <a:extLst>
               <a:ext uri="{FF2B5EF4-FFF2-40B4-BE49-F238E27FC236}">
-                <a16:creationId xmlns:a16="http://schemas.microsoft.com/office/drawing/2014/main" id="{B42736E2-8304-D2B5-5ADA-5F4CC1D080FA}"/>
+                <a16:creationId xmlns:a16="http://schemas.microsoft.com/office/drawing/2014/main" id="{C7832505-4646-07D5-87EB-4E8F6703AB14}"/>
               </a:ext>
             </a:extLst>
           </p:cNvPr>
@@ -10266,7 +10296,7 @@
     </p:spTree>
     <p:extLst>
       <p:ext uri="{BB962C8B-B14F-4D97-AF65-F5344CB8AC3E}">
-        <p14:creationId xmlns:p14="http://schemas.microsoft.com/office/powerpoint/2010/main" val="479021944"/>
+        <p14:creationId xmlns:p14="http://schemas.microsoft.com/office/powerpoint/2010/main" val="682083692"/>
       </p:ext>
     </p:extLst>
   </p:cSld>
@@ -10298,7 +10328,7 @@
           <p:cNvPr id="2" name="Title 1">
             <a:extLst>
               <a:ext uri="{FF2B5EF4-FFF2-40B4-BE49-F238E27FC236}">
-                <a16:creationId xmlns:a16="http://schemas.microsoft.com/office/drawing/2014/main" id="{7907DEEF-0FBD-20D9-2965-3ED3E721BD53}"/>
+                <a16:creationId xmlns:a16="http://schemas.microsoft.com/office/drawing/2014/main" id="{D70072C2-CAC4-C990-6527-C89C83DBC442}"/>
               </a:ext>
             </a:extLst>
           </p:cNvPr>
@@ -10316,7 +10346,7 @@
           <a:p>
             <a:r>
               <a:rPr lang="en-GB" dirty="0"/>
-              <a:t>MYSQL Connection</a:t>
+              <a:t>Email</a:t>
             </a:r>
             <a:endParaRPr lang="en-IN" dirty="0"/>
           </a:p>
@@ -10327,7 +10357,7 @@
           <p:cNvPr id="3" name="Content Placeholder 2">
             <a:extLst>
               <a:ext uri="{FF2B5EF4-FFF2-40B4-BE49-F238E27FC236}">
-                <a16:creationId xmlns:a16="http://schemas.microsoft.com/office/drawing/2014/main" id="{BD381BC6-08E5-488F-AD25-3B559783886A}"/>
+                <a16:creationId xmlns:a16="http://schemas.microsoft.com/office/drawing/2014/main" id="{96D6ED05-9C2A-02BA-AAD4-D9D580B91181}"/>
               </a:ext>
             </a:extLst>
           </p:cNvPr>
@@ -10349,52 +10379,66 @@
             </a:r>
             <a:r>
               <a:rPr lang="en-GB" b="1" dirty="0"/>
-              <a:t>cmd : pip install mysql-connector-python</a:t>
-            </a:r>
-          </a:p>
-          <a:p>
+              <a:t>Packages : </a:t>
+            </a:r>
+            <a:r>
+              <a:rPr lang="en-GB" dirty="0"/>
+              <a:t>smtplib , mimetype , email</a:t>
+            </a:r>
+          </a:p>
+          <a:p>
+            <a:r>
+              <a:rPr lang="en-GB" dirty="0"/>
+              <a:t> </a:t>
+            </a:r>
             <a:r>
               <a:rPr lang="en-GB" b="1" dirty="0"/>
-              <a:t> Connections : </a:t>
-            </a:r>
+              <a:t>Uses : </a:t>
+            </a:r>
+            <a:r>
+              <a:rPr lang="en-GB" dirty="0"/>
+              <a:t>send simple mail &amp; mail with attachments</a:t>
+            </a:r>
+          </a:p>
+          <a:p>
+            <a:r>
+              <a:rPr lang="en-GB" dirty="0"/>
+              <a:t> </a:t>
+            </a:r>
+            <a:r>
+              <a:rPr lang="en-GB" b="1" dirty="0"/>
+              <a:t>Steps : </a:t>
+            </a:r>
+            <a:endParaRPr lang="en-GB" dirty="0"/>
           </a:p>
           <a:p>
             <a:pPr lvl="1"/>
             <a:r>
-              <a:rPr lang="en-GB" b="1" dirty="0"/>
-              <a:t> </a:t>
-            </a:r>
-            <a:r>
               <a:rPr lang="en-GB" dirty="0"/>
-              <a:t>Normal Connection.</a:t>
+              <a:t> create the app password.</a:t>
             </a:r>
           </a:p>
           <a:p>
             <a:pPr lvl="1"/>
             <a:r>
               <a:rPr lang="en-GB" dirty="0"/>
-              <a:t> Connection Pooling.</a:t>
-            </a:r>
-          </a:p>
-          <a:p>
-            <a:r>
-              <a:rPr lang="en-IN" dirty="0"/>
-              <a:t> </a:t>
-            </a:r>
-            <a:r>
-              <a:rPr lang="en-GB" b="1" dirty="0"/>
-              <a:t>CURD</a:t>
-            </a:r>
+              <a:t> two-step verification.</a:t>
+            </a:r>
+          </a:p>
+          <a:p>
+            <a:pPr lvl="1"/>
             <a:r>
               <a:rPr lang="en-GB" dirty="0"/>
-              <a:t> Operations.</a:t>
-            </a:r>
-          </a:p>
-          <a:p>
-            <a:r>
-              <a:rPr lang="en-IN" dirty="0"/>
-              <a:t> Safe Connection handling.</a:t>
-            </a:r>
+              <a:t> securely store and read the password.</a:t>
+            </a:r>
+          </a:p>
+          <a:p>
+            <a:pPr lvl="1"/>
+            <a:r>
+              <a:rPr lang="en-GB" dirty="0"/>
+              <a:t> make smtp encrypted connection.</a:t>
+            </a:r>
+            <a:endParaRPr lang="en-IN" dirty="0"/>
           </a:p>
         </p:txBody>
       </p:sp>
@@ -10403,7 +10447,7 @@
           <p:cNvPr id="4" name="Footer Placeholder 3">
             <a:extLst>
               <a:ext uri="{FF2B5EF4-FFF2-40B4-BE49-F238E27FC236}">
-                <a16:creationId xmlns:a16="http://schemas.microsoft.com/office/drawing/2014/main" id="{F48C9E58-D3F1-09C7-FE6C-48D612C2329F}"/>
+                <a16:creationId xmlns:a16="http://schemas.microsoft.com/office/drawing/2014/main" id="{EC9EC30D-1289-FA18-7D84-4F3CF09AC37C}"/>
               </a:ext>
             </a:extLst>
           </p:cNvPr>
@@ -10432,7 +10476,7 @@
           <p:cNvPr id="5" name="Slide Number Placeholder 4">
             <a:extLst>
               <a:ext uri="{FF2B5EF4-FFF2-40B4-BE49-F238E27FC236}">
-                <a16:creationId xmlns:a16="http://schemas.microsoft.com/office/drawing/2014/main" id="{9208607B-2CC6-16D0-6988-4DB6A51DD176}"/>
+                <a16:creationId xmlns:a16="http://schemas.microsoft.com/office/drawing/2014/main" id="{B42736E2-8304-D2B5-5ADA-5F4CC1D080FA}"/>
               </a:ext>
             </a:extLst>
           </p:cNvPr>
@@ -10459,7 +10503,7 @@
     </p:spTree>
     <p:extLst>
       <p:ext uri="{BB962C8B-B14F-4D97-AF65-F5344CB8AC3E}">
-        <p14:creationId xmlns:p14="http://schemas.microsoft.com/office/powerpoint/2010/main" val="2713769145"/>
+        <p14:creationId xmlns:p14="http://schemas.microsoft.com/office/powerpoint/2010/main" val="479021944"/>
       </p:ext>
     </p:extLst>
   </p:cSld>
@@ -10491,7 +10535,7 @@
           <p:cNvPr id="2" name="Title 1">
             <a:extLst>
               <a:ext uri="{FF2B5EF4-FFF2-40B4-BE49-F238E27FC236}">
-                <a16:creationId xmlns:a16="http://schemas.microsoft.com/office/drawing/2014/main" id="{F0317199-3FE4-4011-E431-B733E11096CA}"/>
+                <a16:creationId xmlns:a16="http://schemas.microsoft.com/office/drawing/2014/main" id="{7907DEEF-0FBD-20D9-2965-3ED3E721BD53}"/>
               </a:ext>
             </a:extLst>
           </p:cNvPr>
@@ -10509,7 +10553,7 @@
           <a:p>
             <a:r>
               <a:rPr lang="en-GB" dirty="0"/>
-              <a:t>PDF</a:t>
+              <a:t>MYSQL Connection</a:t>
             </a:r>
             <a:endParaRPr lang="en-IN" dirty="0"/>
           </a:p>
@@ -10520,7 +10564,7 @@
           <p:cNvPr id="3" name="Content Placeholder 2">
             <a:extLst>
               <a:ext uri="{FF2B5EF4-FFF2-40B4-BE49-F238E27FC236}">
-                <a16:creationId xmlns:a16="http://schemas.microsoft.com/office/drawing/2014/main" id="{3417A133-ACB9-E81D-EC4A-0A5A4CF5DEE0}"/>
+                <a16:creationId xmlns:a16="http://schemas.microsoft.com/office/drawing/2014/main" id="{BD381BC6-08E5-488F-AD25-3B559783886A}"/>
               </a:ext>
             </a:extLst>
           </p:cNvPr>
@@ -10537,26 +10581,36 @@
           <a:lstStyle/>
           <a:p>
             <a:r>
-              <a:rPr lang="en-IN" dirty="0"/>
+              <a:rPr lang="en-GB" dirty="0"/>
               <a:t> </a:t>
             </a:r>
             <a:r>
-              <a:rPr lang="en-IN" b="1" dirty="0"/>
-              <a:t>Packages : </a:t>
+              <a:rPr lang="en-GB" b="1" dirty="0"/>
+              <a:t>cmd : pip install mysql-connector-python</a:t>
+            </a:r>
+          </a:p>
+          <a:p>
+            <a:r>
+              <a:rPr lang="en-GB" b="1" dirty="0"/>
+              <a:t> Connections : </a:t>
             </a:r>
           </a:p>
           <a:p>
             <a:pPr lvl="1"/>
             <a:r>
-              <a:rPr lang="en-IN" dirty="0"/>
-              <a:t> fpdf2 (Creating PDF’s).</a:t>
+              <a:rPr lang="en-GB" b="1" dirty="0"/>
+              <a:t> </a:t>
+            </a:r>
+            <a:r>
+              <a:rPr lang="en-GB" dirty="0"/>
+              <a:t>Normal Connection.</a:t>
             </a:r>
           </a:p>
           <a:p>
             <a:pPr lvl="1"/>
             <a:r>
-              <a:rPr lang="en-IN" dirty="0"/>
-              <a:t> borb (Advanced module for Creating &amp; Reading PDF’s).</a:t>
+              <a:rPr lang="en-GB" dirty="0"/>
+              <a:t> Connection Pooling.</a:t>
             </a:r>
           </a:p>
           <a:p>
@@ -10565,26 +10619,19 @@
               <a:t> </a:t>
             </a:r>
             <a:r>
-              <a:rPr lang="en-IN" b="1" dirty="0"/>
-              <a:t>Functions : </a:t>
-            </a:r>
-          </a:p>
-          <a:p>
-            <a:pPr lvl="1"/>
-            <a:r>
-              <a:rPr lang="en-IN" dirty="0"/>
-              <a:t> Creating PDF ,  Adding Pages , Font Styles , Table Creation , Image Import , etc.,.</a:t>
-            </a:r>
-          </a:p>
-          <a:p>
-            <a:pPr lvl="1"/>
-            <a:r>
-              <a:rPr lang="en-IN" dirty="0"/>
-              <a:t> PDF’s with Input Features.</a:t>
-            </a:r>
-          </a:p>
-          <a:p>
-            <a:endParaRPr lang="en-IN" dirty="0"/>
+              <a:rPr lang="en-GB" b="1" dirty="0"/>
+              <a:t>CURD</a:t>
+            </a:r>
+            <a:r>
+              <a:rPr lang="en-GB" dirty="0"/>
+              <a:t> Operations.</a:t>
+            </a:r>
+          </a:p>
+          <a:p>
+            <a:r>
+              <a:rPr lang="en-IN" dirty="0"/>
+              <a:t> Safe Connection handling.</a:t>
+            </a:r>
           </a:p>
         </p:txBody>
       </p:sp>
@@ -10593,7 +10640,7 @@
           <p:cNvPr id="4" name="Footer Placeholder 3">
             <a:extLst>
               <a:ext uri="{FF2B5EF4-FFF2-40B4-BE49-F238E27FC236}">
-                <a16:creationId xmlns:a16="http://schemas.microsoft.com/office/drawing/2014/main" id="{06D2FE4E-A7CE-4D3B-42B3-8DD37D027516}"/>
+                <a16:creationId xmlns:a16="http://schemas.microsoft.com/office/drawing/2014/main" id="{F48C9E58-D3F1-09C7-FE6C-48D612C2329F}"/>
               </a:ext>
             </a:extLst>
           </p:cNvPr>
@@ -10622,7 +10669,7 @@
           <p:cNvPr id="5" name="Slide Number Placeholder 4">
             <a:extLst>
               <a:ext uri="{FF2B5EF4-FFF2-40B4-BE49-F238E27FC236}">
-                <a16:creationId xmlns:a16="http://schemas.microsoft.com/office/drawing/2014/main" id="{CF0277D4-6825-FE55-E325-241E05EE90B4}"/>
+                <a16:creationId xmlns:a16="http://schemas.microsoft.com/office/drawing/2014/main" id="{9208607B-2CC6-16D0-6988-4DB6A51DD176}"/>
               </a:ext>
             </a:extLst>
           </p:cNvPr>
@@ -10649,7 +10696,7 @@
     </p:spTree>
     <p:extLst>
       <p:ext uri="{BB962C8B-B14F-4D97-AF65-F5344CB8AC3E}">
-        <p14:creationId xmlns:p14="http://schemas.microsoft.com/office/powerpoint/2010/main" val="1572536975"/>
+        <p14:creationId xmlns:p14="http://schemas.microsoft.com/office/powerpoint/2010/main" val="2713769145"/>
       </p:ext>
     </p:extLst>
   </p:cSld>
@@ -11204,6 +11251,22 @@
               <a:t> Zigzag Conversion.</a:t>
             </a:r>
           </a:p>
+          <a:p>
+            <a:endParaRPr lang="en-IN" dirty="0"/>
+          </a:p>
+          <a:p>
+            <a:endParaRPr lang="en-IN" dirty="0"/>
+          </a:p>
+          <a:p>
+            <a:pPr marL="0" indent="0" algn="ctr">
+              <a:buNone/>
+            </a:pPr>
+            <a:r>
+              <a:rPr lang="en-IN" b="1" dirty="0"/>
+              <a:t>PYTHON BASIC CONCEPTS COMPLETED.</a:t>
+            </a:r>
+            <a:endParaRPr lang="en-IN" dirty="0"/>
+          </a:p>
         </p:txBody>
       </p:sp>
       <p:sp>
@@ -11299,7 +11362,7 @@
           <p:cNvPr id="2" name="Title 1">
             <a:extLst>
               <a:ext uri="{FF2B5EF4-FFF2-40B4-BE49-F238E27FC236}">
-                <a16:creationId xmlns:a16="http://schemas.microsoft.com/office/drawing/2014/main" id="{2CEA5BDF-9F05-F624-FCF1-39C85E1A3DE7}"/>
+                <a16:creationId xmlns:a16="http://schemas.microsoft.com/office/drawing/2014/main" id="{F0317199-3FE4-4011-E431-B733E11096CA}"/>
               </a:ext>
             </a:extLst>
           </p:cNvPr>
@@ -11317,7 +11380,7 @@
           <a:p>
             <a:r>
               <a:rPr lang="en-GB" dirty="0"/>
-              <a:t>Web Development</a:t>
+              <a:t>PDF</a:t>
             </a:r>
             <a:endParaRPr lang="en-IN" dirty="0"/>
           </a:p>
@@ -11328,7 +11391,7 @@
           <p:cNvPr id="3" name="Content Placeholder 2">
             <a:extLst>
               <a:ext uri="{FF2B5EF4-FFF2-40B4-BE49-F238E27FC236}">
-                <a16:creationId xmlns:a16="http://schemas.microsoft.com/office/drawing/2014/main" id="{3F654F39-106A-8921-8452-34F301506A96}"/>
+                <a16:creationId xmlns:a16="http://schemas.microsoft.com/office/drawing/2014/main" id="{3417A133-ACB9-E81D-EC4A-0A5A4CF5DEE0}"/>
               </a:ext>
             </a:extLst>
           </p:cNvPr>
@@ -11348,6 +11411,51 @@
               <a:rPr lang="en-IN" dirty="0"/>
               <a:t> </a:t>
             </a:r>
+            <a:r>
+              <a:rPr lang="en-IN" b="1" dirty="0"/>
+              <a:t>Packages : </a:t>
+            </a:r>
+          </a:p>
+          <a:p>
+            <a:pPr lvl="1"/>
+            <a:r>
+              <a:rPr lang="en-IN" dirty="0"/>
+              <a:t> fpdf2 (Creating PDF’s).</a:t>
+            </a:r>
+          </a:p>
+          <a:p>
+            <a:pPr lvl="1"/>
+            <a:r>
+              <a:rPr lang="en-IN" dirty="0"/>
+              <a:t> borb (Advanced module for Creating &amp; Reading PDF’s).</a:t>
+            </a:r>
+          </a:p>
+          <a:p>
+            <a:r>
+              <a:rPr lang="en-IN" dirty="0"/>
+              <a:t> </a:t>
+            </a:r>
+            <a:r>
+              <a:rPr lang="en-IN" b="1" dirty="0"/>
+              <a:t>Functions : </a:t>
+            </a:r>
+          </a:p>
+          <a:p>
+            <a:pPr lvl="1"/>
+            <a:r>
+              <a:rPr lang="en-IN" dirty="0"/>
+              <a:t> Creating PDF ,  Adding Pages , Font Styles , Table Creation , Image Import , etc.,.</a:t>
+            </a:r>
+          </a:p>
+          <a:p>
+            <a:pPr lvl="1"/>
+            <a:r>
+              <a:rPr lang="en-IN" dirty="0"/>
+              <a:t> PDF’s with Input Features.</a:t>
+            </a:r>
+          </a:p>
+          <a:p>
+            <a:endParaRPr lang="en-IN" dirty="0"/>
           </a:p>
         </p:txBody>
       </p:sp>
@@ -11356,7 +11464,7 @@
           <p:cNvPr id="4" name="Footer Placeholder 3">
             <a:extLst>
               <a:ext uri="{FF2B5EF4-FFF2-40B4-BE49-F238E27FC236}">
-                <a16:creationId xmlns:a16="http://schemas.microsoft.com/office/drawing/2014/main" id="{B6211910-FFBC-E796-7537-DC267EB214BD}"/>
+                <a16:creationId xmlns:a16="http://schemas.microsoft.com/office/drawing/2014/main" id="{06D2FE4E-A7CE-4D3B-42B3-8DD37D027516}"/>
               </a:ext>
             </a:extLst>
           </p:cNvPr>
@@ -11385,7 +11493,7 @@
           <p:cNvPr id="5" name="Slide Number Placeholder 4">
             <a:extLst>
               <a:ext uri="{FF2B5EF4-FFF2-40B4-BE49-F238E27FC236}">
-                <a16:creationId xmlns:a16="http://schemas.microsoft.com/office/drawing/2014/main" id="{634CE741-738C-5294-3111-4971DF04E698}"/>
+                <a16:creationId xmlns:a16="http://schemas.microsoft.com/office/drawing/2014/main" id="{CF0277D4-6825-FE55-E325-241E05EE90B4}"/>
               </a:ext>
             </a:extLst>
           </p:cNvPr>
@@ -11412,7 +11520,7 @@
     </p:spTree>
     <p:extLst>
       <p:ext uri="{BB962C8B-B14F-4D97-AF65-F5344CB8AC3E}">
-        <p14:creationId xmlns:p14="http://schemas.microsoft.com/office/powerpoint/2010/main" val="35491570"/>
+        <p14:creationId xmlns:p14="http://schemas.microsoft.com/office/powerpoint/2010/main" val="1572536975"/>
       </p:ext>
     </p:extLst>
   </p:cSld>
@@ -11444,7 +11552,7 @@
           <p:cNvPr id="2" name="Title 1">
             <a:extLst>
               <a:ext uri="{FF2B5EF4-FFF2-40B4-BE49-F238E27FC236}">
-                <a16:creationId xmlns:a16="http://schemas.microsoft.com/office/drawing/2014/main" id="{0FAC2044-7BC7-BE81-4358-3C5D49931A58}"/>
+                <a16:creationId xmlns:a16="http://schemas.microsoft.com/office/drawing/2014/main" id="{2CEA5BDF-9F05-F624-FCF1-39C85E1A3DE7}"/>
               </a:ext>
             </a:extLst>
           </p:cNvPr>
@@ -11462,7 +11570,7 @@
           <a:p>
             <a:r>
               <a:rPr lang="en-GB" dirty="0"/>
-              <a:t>GUI Development</a:t>
+              <a:t>Web Development</a:t>
             </a:r>
             <a:endParaRPr lang="en-IN" dirty="0"/>
           </a:p>
@@ -11473,7 +11581,7 @@
           <p:cNvPr id="3" name="Content Placeholder 2">
             <a:extLst>
               <a:ext uri="{FF2B5EF4-FFF2-40B4-BE49-F238E27FC236}">
-                <a16:creationId xmlns:a16="http://schemas.microsoft.com/office/drawing/2014/main" id="{69841D62-3F38-AD65-B1BF-48BF3A14F8B7}"/>
+                <a16:creationId xmlns:a16="http://schemas.microsoft.com/office/drawing/2014/main" id="{3F654F39-106A-8921-8452-34F301506A96}"/>
               </a:ext>
             </a:extLst>
           </p:cNvPr>
@@ -11490,18 +11598,81 @@
           <a:lstStyle/>
           <a:p>
             <a:r>
+              <a:rPr lang="en-IN" dirty="0"/>
+              <a:t> </a:t>
+            </a:r>
+            <a:r>
+              <a:rPr lang="en-IN" b="1" dirty="0"/>
+              <a:t>Package : </a:t>
+            </a:r>
+            <a:r>
+              <a:rPr lang="en-IN" dirty="0"/>
+              <a:t>nicegui</a:t>
+            </a:r>
+          </a:p>
+          <a:p>
+            <a:r>
+              <a:rPr lang="en-IN" dirty="0"/>
+              <a:t> </a:t>
+            </a:r>
+            <a:r>
+              <a:rPr lang="en-IN" b="1" dirty="0"/>
+              <a:t>cmd : pip install  nicegui</a:t>
+            </a:r>
+          </a:p>
+          <a:p>
+            <a:r>
+              <a:rPr lang="en-IN" b="1" dirty="0"/>
+              <a:t> </a:t>
+            </a:r>
+            <a:r>
+              <a:rPr lang="en-GB" b="1" dirty="0"/>
+              <a:t>Concepts :</a:t>
+            </a:r>
+          </a:p>
+          <a:p>
+            <a:pPr lvl="1"/>
+            <a:r>
+              <a:rPr lang="en-IN" dirty="0"/>
+              <a:t> Start connection</a:t>
+            </a:r>
+          </a:p>
+          <a:p>
+            <a:pPr lvl="1"/>
+            <a:r>
+              <a:rPr lang="en-IN" dirty="0"/>
+              <a:t> UI components</a:t>
+            </a:r>
+          </a:p>
+          <a:p>
+            <a:pPr lvl="1"/>
+            <a:r>
+              <a:rPr lang="en-IN" dirty="0"/>
+              <a:t> </a:t>
+            </a:r>
+            <a:r>
               <a:rPr lang="en-GB" dirty="0"/>
+              <a:t>Custom widget creation</a:t>
+            </a:r>
+            <a:endParaRPr lang="en-IN" dirty="0"/>
+          </a:p>
+          <a:p>
+            <a:pPr lvl="1"/>
+            <a:r>
+              <a:rPr lang="en-IN" dirty="0"/>
+              <a:t> UI on-command operations</a:t>
+            </a:r>
+          </a:p>
+          <a:p>
+            <a:pPr lvl="1"/>
+            <a:r>
+              <a:rPr lang="en-IN" b="1" dirty="0"/>
               <a:t> </a:t>
             </a:r>
             <a:r>
-              <a:rPr lang="en-GB" b="1" dirty="0"/>
-              <a:t>Package : </a:t>
-            </a:r>
-            <a:r>
-              <a:rPr lang="en-GB" dirty="0"/>
-              <a:t>customtkinter &amp; tkinter</a:t>
-            </a:r>
-            <a:endParaRPr lang="en-IN" dirty="0"/>
+              <a:rPr lang="en-IN" dirty="0"/>
+              <a:t>back-end connections &amp; operations</a:t>
+            </a:r>
           </a:p>
         </p:txBody>
       </p:sp>
@@ -11510,7 +11681,7 @@
           <p:cNvPr id="4" name="Footer Placeholder 3">
             <a:extLst>
               <a:ext uri="{FF2B5EF4-FFF2-40B4-BE49-F238E27FC236}">
-                <a16:creationId xmlns:a16="http://schemas.microsoft.com/office/drawing/2014/main" id="{889662F6-22D2-D1A9-DF10-54B94C79C5D2}"/>
+                <a16:creationId xmlns:a16="http://schemas.microsoft.com/office/drawing/2014/main" id="{B6211910-FFBC-E796-7537-DC267EB214BD}"/>
               </a:ext>
             </a:extLst>
           </p:cNvPr>
@@ -11539,7 +11710,7 @@
           <p:cNvPr id="5" name="Slide Number Placeholder 4">
             <a:extLst>
               <a:ext uri="{FF2B5EF4-FFF2-40B4-BE49-F238E27FC236}">
-                <a16:creationId xmlns:a16="http://schemas.microsoft.com/office/drawing/2014/main" id="{4FCBC552-3D1D-6F58-3410-DBE1BCE8AF7F}"/>
+                <a16:creationId xmlns:a16="http://schemas.microsoft.com/office/drawing/2014/main" id="{634CE741-738C-5294-3111-4971DF04E698}"/>
               </a:ext>
             </a:extLst>
           </p:cNvPr>
@@ -11566,7 +11737,7 @@
     </p:spTree>
     <p:extLst>
       <p:ext uri="{BB962C8B-B14F-4D97-AF65-F5344CB8AC3E}">
-        <p14:creationId xmlns:p14="http://schemas.microsoft.com/office/powerpoint/2010/main" val="3562287446"/>
+        <p14:creationId xmlns:p14="http://schemas.microsoft.com/office/powerpoint/2010/main" val="35491570"/>
       </p:ext>
     </p:extLst>
   </p:cSld>
@@ -11598,7 +11769,7 @@
           <p:cNvPr id="2" name="Title 1">
             <a:extLst>
               <a:ext uri="{FF2B5EF4-FFF2-40B4-BE49-F238E27FC236}">
-                <a16:creationId xmlns:a16="http://schemas.microsoft.com/office/drawing/2014/main" id="{76B7B38D-DCBD-9C6B-CD51-7A408A67FAD1}"/>
+                <a16:creationId xmlns:a16="http://schemas.microsoft.com/office/drawing/2014/main" id="{0FAC2044-7BC7-BE81-4358-3C5D49931A58}"/>
               </a:ext>
             </a:extLst>
           </p:cNvPr>
@@ -11616,7 +11787,7 @@
           <a:p>
             <a:r>
               <a:rPr lang="en-GB" dirty="0"/>
-              <a:t>Kivy &amp; Kivymd</a:t>
+              <a:t>Desktop-App Development</a:t>
             </a:r>
             <a:endParaRPr lang="en-IN" dirty="0"/>
           </a:p>
@@ -11627,7 +11798,7 @@
           <p:cNvPr id="3" name="Content Placeholder 2">
             <a:extLst>
               <a:ext uri="{FF2B5EF4-FFF2-40B4-BE49-F238E27FC236}">
-                <a16:creationId xmlns:a16="http://schemas.microsoft.com/office/drawing/2014/main" id="{55BFC815-5867-C2BB-884C-F3691F93B019}"/>
+                <a16:creationId xmlns:a16="http://schemas.microsoft.com/office/drawing/2014/main" id="{69841D62-3F38-AD65-B1BF-48BF3A14F8B7}"/>
               </a:ext>
             </a:extLst>
           </p:cNvPr>
@@ -11649,7 +11820,80 @@
             </a:r>
             <a:r>
               <a:rPr lang="en-GB" b="1" dirty="0"/>
-              <a:t>cmd : pip install kivy kivymd</a:t>
+              <a:t>Package : </a:t>
+            </a:r>
+            <a:r>
+              <a:rPr lang="en-GB" dirty="0"/>
+              <a:t>customtkinter &amp; tkinter</a:t>
+            </a:r>
+          </a:p>
+          <a:p>
+            <a:r>
+              <a:rPr lang="en-GB" dirty="0"/>
+              <a:t> </a:t>
+            </a:r>
+            <a:r>
+              <a:rPr lang="en-GB" b="1" dirty="0"/>
+              <a:t>cmd : pip install customtkinter</a:t>
+            </a:r>
+          </a:p>
+          <a:p>
+            <a:r>
+              <a:rPr lang="en-GB" b="1" dirty="0"/>
+              <a:t> </a:t>
+            </a:r>
+            <a:r>
+              <a:rPr lang="en-GB" dirty="0"/>
+              <a:t>customtkinter is the modern UI version of tkinter</a:t>
+            </a:r>
+          </a:p>
+          <a:p>
+            <a:r>
+              <a:rPr lang="en-GB" dirty="0"/>
+              <a:t> </a:t>
+            </a:r>
+            <a:r>
+              <a:rPr lang="en-GB" b="1" dirty="0"/>
+              <a:t>Concepts : </a:t>
+            </a:r>
+          </a:p>
+          <a:p>
+            <a:pPr lvl="1"/>
+            <a:r>
+              <a:rPr lang="en-GB" b="1" dirty="0"/>
+              <a:t> </a:t>
+            </a:r>
+            <a:r>
+              <a:rPr lang="en-GB" dirty="0"/>
+              <a:t>runs the app</a:t>
+            </a:r>
+          </a:p>
+          <a:p>
+            <a:pPr lvl="1"/>
+            <a:r>
+              <a:rPr lang="en-GB" dirty="0"/>
+              <a:t> UI widgets</a:t>
+            </a:r>
+          </a:p>
+          <a:p>
+            <a:pPr lvl="1"/>
+            <a:r>
+              <a:rPr lang="en-GB" dirty="0"/>
+              <a:t> Custom widget creation</a:t>
+            </a:r>
+          </a:p>
+          <a:p>
+            <a:pPr lvl="1"/>
+            <a:r>
+              <a:rPr lang="en-GB" dirty="0"/>
+              <a:t> UI widgets on-command operations</a:t>
+            </a:r>
+          </a:p>
+          <a:p>
+            <a:pPr lvl="1"/>
+            <a:r>
+              <a:rPr lang="en-GB" dirty="0"/>
+              <a:t> back-end connections &amp; operations</a:t>
             </a:r>
             <a:endParaRPr lang="en-IN" dirty="0"/>
           </a:p>
@@ -11660,7 +11904,7 @@
           <p:cNvPr id="4" name="Footer Placeholder 3">
             <a:extLst>
               <a:ext uri="{FF2B5EF4-FFF2-40B4-BE49-F238E27FC236}">
-                <a16:creationId xmlns:a16="http://schemas.microsoft.com/office/drawing/2014/main" id="{747B2B24-B4CD-D9F0-D1F0-C426E572C6F6}"/>
+                <a16:creationId xmlns:a16="http://schemas.microsoft.com/office/drawing/2014/main" id="{889662F6-22D2-D1A9-DF10-54B94C79C5D2}"/>
               </a:ext>
             </a:extLst>
           </p:cNvPr>
@@ -11689,7 +11933,7 @@
           <p:cNvPr id="5" name="Slide Number Placeholder 4">
             <a:extLst>
               <a:ext uri="{FF2B5EF4-FFF2-40B4-BE49-F238E27FC236}">
-                <a16:creationId xmlns:a16="http://schemas.microsoft.com/office/drawing/2014/main" id="{8EC70CEB-FD02-B13C-90CC-1F1AACC0FCAC}"/>
+                <a16:creationId xmlns:a16="http://schemas.microsoft.com/office/drawing/2014/main" id="{4FCBC552-3D1D-6F58-3410-DBE1BCE8AF7F}"/>
               </a:ext>
             </a:extLst>
           </p:cNvPr>
@@ -11708,6 +11952,224 @@
             <a:fld id="{F904C42B-FE65-422C-989C-AD3E5E2A1A20}" type="slidenum">
               <a:rPr lang="en-IN" smtClean="0"/>
               <a:t>38</a:t>
+            </a:fld>
+            <a:endParaRPr lang="en-IN" dirty="0"/>
+          </a:p>
+        </p:txBody>
+      </p:sp>
+    </p:spTree>
+    <p:extLst>
+      <p:ext uri="{BB962C8B-B14F-4D97-AF65-F5344CB8AC3E}">
+        <p14:creationId xmlns:p14="http://schemas.microsoft.com/office/powerpoint/2010/main" val="3562287446"/>
+      </p:ext>
+    </p:extLst>
+  </p:cSld>
+  <p:clrMapOvr>
+    <a:masterClrMapping/>
+  </p:clrMapOvr>
+</p:sld>
+</file>
+
+<file path=ppt/slides/slide39.xml><?xml version="1.0" encoding="utf-8"?>
+<p:sld xmlns:a="http://schemas.openxmlformats.org/drawingml/2006/main" xmlns:r="http://schemas.openxmlformats.org/officeDocument/2006/relationships" xmlns:p="http://schemas.openxmlformats.org/presentationml/2006/main">
+  <p:cSld>
+    <p:spTree>
+      <p:nvGrpSpPr>
+        <p:cNvPr id="1" name=""/>
+        <p:cNvGrpSpPr/>
+        <p:nvPr/>
+      </p:nvGrpSpPr>
+      <p:grpSpPr>
+        <a:xfrm>
+          <a:off x="0" y="0"/>
+          <a:ext cx="0" cy="0"/>
+          <a:chOff x="0" y="0"/>
+          <a:chExt cx="0" cy="0"/>
+        </a:xfrm>
+      </p:grpSpPr>
+      <p:sp>
+        <p:nvSpPr>
+          <p:cNvPr id="2" name="Title 1">
+            <a:extLst>
+              <a:ext uri="{FF2B5EF4-FFF2-40B4-BE49-F238E27FC236}">
+                <a16:creationId xmlns:a16="http://schemas.microsoft.com/office/drawing/2014/main" id="{76B7B38D-DCBD-9C6B-CD51-7A408A67FAD1}"/>
+              </a:ext>
+            </a:extLst>
+          </p:cNvPr>
+          <p:cNvSpPr>
+            <a:spLocks noGrp="1"/>
+          </p:cNvSpPr>
+          <p:nvPr>
+            <p:ph type="title"/>
+          </p:nvPr>
+        </p:nvSpPr>
+        <p:spPr/>
+        <p:txBody>
+          <a:bodyPr/>
+          <a:lstStyle/>
+          <a:p>
+            <a:r>
+              <a:rPr lang="en-GB" dirty="0"/>
+              <a:t>Mobile-App Development</a:t>
+            </a:r>
+            <a:endParaRPr lang="en-IN" dirty="0"/>
+          </a:p>
+        </p:txBody>
+      </p:sp>
+      <p:sp>
+        <p:nvSpPr>
+          <p:cNvPr id="3" name="Content Placeholder 2">
+            <a:extLst>
+              <a:ext uri="{FF2B5EF4-FFF2-40B4-BE49-F238E27FC236}">
+                <a16:creationId xmlns:a16="http://schemas.microsoft.com/office/drawing/2014/main" id="{55BFC815-5867-C2BB-884C-F3691F93B019}"/>
+              </a:ext>
+            </a:extLst>
+          </p:cNvPr>
+          <p:cNvSpPr>
+            <a:spLocks noGrp="1"/>
+          </p:cNvSpPr>
+          <p:nvPr>
+            <p:ph idx="1"/>
+          </p:nvPr>
+        </p:nvSpPr>
+        <p:spPr/>
+        <p:txBody>
+          <a:bodyPr/>
+          <a:lstStyle/>
+          <a:p>
+            <a:r>
+              <a:rPr lang="en-GB" dirty="0"/>
+              <a:t> </a:t>
+            </a:r>
+            <a:r>
+              <a:rPr lang="en-GB" b="1" dirty="0"/>
+              <a:t>Packages : </a:t>
+            </a:r>
+            <a:r>
+              <a:rPr lang="en-GB" dirty="0"/>
+              <a:t>kivy &amp; kivymd</a:t>
+            </a:r>
+          </a:p>
+          <a:p>
+            <a:r>
+              <a:rPr lang="en-GB" b="1" dirty="0"/>
+              <a:t> cmd : pip install kivy kivymd</a:t>
+            </a:r>
+          </a:p>
+          <a:p>
+            <a:r>
+              <a:rPr lang="en-GB" b="1" dirty="0"/>
+              <a:t> </a:t>
+            </a:r>
+            <a:r>
+              <a:rPr lang="en-GB" dirty="0"/>
+              <a:t>kivymd is the modern UI version of kivy.</a:t>
+            </a:r>
+          </a:p>
+          <a:p>
+            <a:r>
+              <a:rPr lang="en-GB" b="1" dirty="0"/>
+              <a:t> Concepts : </a:t>
+            </a:r>
+          </a:p>
+          <a:p>
+            <a:pPr lvl="1"/>
+            <a:r>
+              <a:rPr lang="en-GB" b="1" dirty="0"/>
+              <a:t> </a:t>
+            </a:r>
+            <a:r>
+              <a:rPr lang="en-GB" dirty="0"/>
+              <a:t>runs the app</a:t>
+            </a:r>
+          </a:p>
+          <a:p>
+            <a:pPr lvl="1"/>
+            <a:r>
+              <a:rPr lang="en-GB" dirty="0"/>
+              <a:t> UI widgets</a:t>
+            </a:r>
+          </a:p>
+          <a:p>
+            <a:pPr lvl="1"/>
+            <a:r>
+              <a:rPr lang="en-GB" dirty="0"/>
+              <a:t> Custom widget creation</a:t>
+            </a:r>
+          </a:p>
+          <a:p>
+            <a:pPr lvl="1"/>
+            <a:r>
+              <a:rPr lang="en-GB" dirty="0"/>
+              <a:t> UI widgets on-command operations</a:t>
+            </a:r>
+          </a:p>
+          <a:p>
+            <a:pPr lvl="1"/>
+            <a:r>
+              <a:rPr lang="en-GB" dirty="0"/>
+              <a:t> back-end connections &amp; operations</a:t>
+            </a:r>
+            <a:endParaRPr lang="en-IN" dirty="0"/>
+          </a:p>
+          <a:p>
+            <a:endParaRPr lang="en-IN" dirty="0"/>
+          </a:p>
+        </p:txBody>
+      </p:sp>
+      <p:sp>
+        <p:nvSpPr>
+          <p:cNvPr id="4" name="Footer Placeholder 3">
+            <a:extLst>
+              <a:ext uri="{FF2B5EF4-FFF2-40B4-BE49-F238E27FC236}">
+                <a16:creationId xmlns:a16="http://schemas.microsoft.com/office/drawing/2014/main" id="{747B2B24-B4CD-D9F0-D1F0-C426E572C6F6}"/>
+              </a:ext>
+            </a:extLst>
+          </p:cNvPr>
+          <p:cNvSpPr>
+            <a:spLocks noGrp="1"/>
+          </p:cNvSpPr>
+          <p:nvPr>
+            <p:ph type="ftr" sz="quarter" idx="11"/>
+          </p:nvPr>
+        </p:nvSpPr>
+        <p:spPr/>
+        <p:txBody>
+          <a:bodyPr/>
+          <a:lstStyle/>
+          <a:p>
+            <a:r>
+              <a:rPr lang="it-IT"/>
+              <a:t>Agnie Consulting India Pvt Limited</a:t>
+            </a:r>
+            <a:endParaRPr lang="en-IN" dirty="0"/>
+          </a:p>
+        </p:txBody>
+      </p:sp>
+      <p:sp>
+        <p:nvSpPr>
+          <p:cNvPr id="5" name="Slide Number Placeholder 4">
+            <a:extLst>
+              <a:ext uri="{FF2B5EF4-FFF2-40B4-BE49-F238E27FC236}">
+                <a16:creationId xmlns:a16="http://schemas.microsoft.com/office/drawing/2014/main" id="{8EC70CEB-FD02-B13C-90CC-1F1AACC0FCAC}"/>
+              </a:ext>
+            </a:extLst>
+          </p:cNvPr>
+          <p:cNvSpPr>
+            <a:spLocks noGrp="1"/>
+          </p:cNvSpPr>
+          <p:nvPr>
+            <p:ph type="sldNum" sz="quarter" idx="12"/>
+          </p:nvPr>
+        </p:nvSpPr>
+        <p:spPr/>
+        <p:txBody>
+          <a:bodyPr/>
+          <a:lstStyle/>
+          <a:p>
+            <a:fld id="{F904C42B-FE65-422C-989C-AD3E5E2A1A20}" type="slidenum">
+              <a:rPr lang="en-IN" smtClean="0"/>
+              <a:t>39</a:t>
             </a:fld>
             <a:endParaRPr lang="en-IN" dirty="0"/>
           </a:p>

--- a/python class/Python Class.pptx
+++ b/python class/Python Class.pptx
@@ -7174,13 +7174,8 @@
           <a:p>
             <a:r>
               <a:rPr lang="en-IN" dirty="0"/>
-              <a:t> Python Comprehensions - efficient way to create new </a:t>
-            </a:r>
-            <a:r>
-              <a:rPr lang="en-IN"/>
-              <a:t>data structure.</a:t>
-            </a:r>
-            <a:endParaRPr lang="en-IN" dirty="0"/>
+              <a:t> Python Comprehensions - efficient way to create new data structure.</a:t>
+            </a:r>
           </a:p>
           <a:p>
             <a:r>

--- a/python class/Python Class.pptx
+++ b/python class/Python Class.pptx
@@ -5,7 +5,7 @@
     <p:sldMasterId id="2147483660" r:id="rId1"/>
   </p:sldMasterIdLst>
   <p:notesMasterIdLst>
-    <p:notesMasterId r:id="rId41"/>
+    <p:notesMasterId r:id="rId37"/>
   </p:notesMasterIdLst>
   <p:sldIdLst>
     <p:sldId id="256" r:id="rId2"/>
@@ -35,18 +35,14 @@
     <p:sldId id="273" r:id="rId26"/>
     <p:sldId id="282" r:id="rId27"/>
     <p:sldId id="292" r:id="rId28"/>
-    <p:sldId id="291" r:id="rId29"/>
-    <p:sldId id="286" r:id="rId30"/>
-    <p:sldId id="283" r:id="rId31"/>
-    <p:sldId id="288" r:id="rId32"/>
-    <p:sldId id="275" r:id="rId33"/>
-    <p:sldId id="280" r:id="rId34"/>
-    <p:sldId id="290" r:id="rId35"/>
-    <p:sldId id="293" r:id="rId36"/>
-    <p:sldId id="287" r:id="rId37"/>
-    <p:sldId id="279" r:id="rId38"/>
-    <p:sldId id="284" r:id="rId39"/>
-    <p:sldId id="285" r:id="rId40"/>
+    <p:sldId id="286" r:id="rId29"/>
+    <p:sldId id="283" r:id="rId30"/>
+    <p:sldId id="288" r:id="rId31"/>
+    <p:sldId id="275" r:id="rId32"/>
+    <p:sldId id="280" r:id="rId33"/>
+    <p:sldId id="290" r:id="rId34"/>
+    <p:sldId id="293" r:id="rId35"/>
+    <p:sldId id="279" r:id="rId36"/>
   </p:sldIdLst>
   <p:sldSz cx="12192000" cy="6858000"/>
   <p:notesSz cx="7104063" cy="10234613"/>
@@ -235,7 +231,7 @@
           <a:p>
             <a:fld id="{C7300FFE-222E-424B-A24A-B86ADB1660A8}" type="datetimeFigureOut">
               <a:rPr lang="en-IN" smtClean="0"/>
-              <a:t>24-08-2026</a:t>
+              <a:t>22-09-2026</a:t>
             </a:fld>
             <a:endParaRPr lang="en-IN" dirty="0"/>
           </a:p>
@@ -663,7 +659,7 @@
           <a:p>
             <a:fld id="{AD501974-91E0-4A6C-BF4F-18DDA0DBE697}" type="datetime1">
               <a:rPr lang="en-IN" smtClean="0"/>
-              <a:t>24-08-2026</a:t>
+              <a:t>22-09-2026</a:t>
             </a:fld>
             <a:endParaRPr lang="en-IN" dirty="0"/>
           </a:p>
@@ -788,7 +784,7 @@
           <a:p>
             <a:fld id="{340C70EA-229A-4802-A7BC-A1799783BDD3}" type="datetime1">
               <a:rPr lang="en-IN" smtClean="0"/>
-              <a:t>24-08-2026</a:t>
+              <a:t>22-09-2026</a:t>
             </a:fld>
             <a:endParaRPr lang="en-IN" dirty="0"/>
           </a:p>
@@ -1075,7 +1071,7 @@
           <a:p>
             <a:fld id="{BD944048-9929-4BB2-BADE-62F9A707015B}" type="datetime1">
               <a:rPr lang="en-IN" smtClean="0"/>
-              <a:t>24-08-2026</a:t>
+              <a:t>22-09-2026</a:t>
             </a:fld>
             <a:endParaRPr lang="en-IN" dirty="0"/>
           </a:p>
@@ -1381,7 +1377,7 @@
           <a:p>
             <a:fld id="{09A388D1-7504-45FD-847C-EF9E921E08DF}" type="datetime1">
               <a:rPr lang="en-IN" smtClean="0"/>
-              <a:t>24-08-2026</a:t>
+              <a:t>22-09-2026</a:t>
             </a:fld>
             <a:endParaRPr lang="en-IN" dirty="0"/>
           </a:p>
@@ -1610,7 +1606,7 @@
           <a:p>
             <a:fld id="{6015BE80-B03C-48AB-B3E2-19C5F4D60D3C}" type="datetime1">
               <a:rPr lang="en-IN" smtClean="0"/>
-              <a:t>24-08-2026</a:t>
+              <a:t>22-09-2026</a:t>
             </a:fld>
             <a:endParaRPr lang="en-IN" dirty="0"/>
           </a:p>
@@ -1881,7 +1877,7 @@
           <a:p>
             <a:fld id="{450E9977-AF0E-4B1A-B2BF-2416B4828E95}" type="datetime1">
               <a:rPr lang="en-IN" smtClean="0"/>
-              <a:t>24-08-2026</a:t>
+              <a:t>22-09-2026</a:t>
             </a:fld>
             <a:endParaRPr lang="en-IN" dirty="0"/>
           </a:p>
@@ -2108,7 +2104,7 @@
           <a:p>
             <a:fld id="{972A712B-80AB-4FDB-AFE5-C959280677B9}" type="datetime1">
               <a:rPr lang="en-IN" smtClean="0"/>
-              <a:t>24-08-2026</a:t>
+              <a:t>22-09-2026</a:t>
             </a:fld>
             <a:endParaRPr lang="en-IN" dirty="0"/>
           </a:p>
@@ -2399,7 +2395,7 @@
           <a:p>
             <a:fld id="{78FC1D50-5769-4793-A6D0-4C61D943385E}" type="datetime1">
               <a:rPr lang="en-IN" smtClean="0"/>
-              <a:t>24-08-2026</a:t>
+              <a:t>22-09-2026</a:t>
             </a:fld>
             <a:endParaRPr lang="en-IN" dirty="0"/>
           </a:p>
@@ -2664,7 +2660,7 @@
           <a:p>
             <a:fld id="{1093E9E7-66F0-49C7-87AF-7A91F126A0CA}" type="datetime1">
               <a:rPr lang="en-IN" smtClean="0"/>
-              <a:t>24-08-2026</a:t>
+              <a:t>22-09-2026</a:t>
             </a:fld>
             <a:endParaRPr lang="en-IN" dirty="0"/>
           </a:p>
@@ -3110,7 +3106,7 @@
           <a:p>
             <a:fld id="{4802E001-56FE-4C01-9545-A69D840AB1F5}" type="datetime1">
               <a:rPr lang="en-IN" smtClean="0"/>
-              <a:t>24-08-2026</a:t>
+              <a:t>22-09-2026</a:t>
             </a:fld>
             <a:endParaRPr lang="en-IN" dirty="0"/>
           </a:p>
@@ -3274,7 +3270,7 @@
           <a:p>
             <a:fld id="{FC628212-ABC2-4EAF-BB21-53D61AEEEA49}" type="datetime1">
               <a:rPr lang="en-IN" smtClean="0"/>
-              <a:t>24-08-2026</a:t>
+              <a:t>22-09-2026</a:t>
             </a:fld>
             <a:endParaRPr lang="en-IN" dirty="0"/>
           </a:p>
@@ -3438,7 +3434,7 @@
           <a:p>
             <a:fld id="{83F0C27E-97BD-4ACD-AFDF-13985BE88ECF}" type="datetime1">
               <a:rPr lang="en-IN" smtClean="0"/>
-              <a:t>24-08-2026</a:t>
+              <a:t>22-09-2026</a:t>
             </a:fld>
             <a:endParaRPr lang="en-IN" dirty="0"/>
           </a:p>
@@ -3636,7 +3632,7 @@
           <a:p>
             <a:fld id="{10A04BDC-9A72-4B08-81B7-A336A5B4E254}" type="datetime1">
               <a:rPr lang="en-IN" smtClean="0"/>
-              <a:t>24-08-2026</a:t>
+              <a:t>22-09-2026</a:t>
             </a:fld>
             <a:endParaRPr lang="en-IN" dirty="0"/>
           </a:p>
@@ -3834,7 +3830,7 @@
           <a:p>
             <a:fld id="{2E5D08A3-D96A-4309-8AF3-C610782BB2D3}" type="datetime1">
               <a:rPr lang="en-IN" smtClean="0"/>
-              <a:t>24-08-2026</a:t>
+              <a:t>22-09-2026</a:t>
             </a:fld>
             <a:endParaRPr lang="en-IN" dirty="0"/>
           </a:p>
@@ -8802,7 +8798,7 @@
           <p:cNvPr id="2" name="Title 1">
             <a:extLst>
               <a:ext uri="{FF2B5EF4-FFF2-40B4-BE49-F238E27FC236}">
-                <a16:creationId xmlns:a16="http://schemas.microsoft.com/office/drawing/2014/main" id="{F4F099D4-75DE-2228-3253-ECEEA4A44245}"/>
+                <a16:creationId xmlns:a16="http://schemas.microsoft.com/office/drawing/2014/main" id="{9E6DD218-3F31-33F2-8CDB-7DA5BBC005B5}"/>
               </a:ext>
             </a:extLst>
           </p:cNvPr>
@@ -8819,9 +8815,10 @@
           <a:lstStyle/>
           <a:p>
             <a:r>
-              <a:rPr lang="en-IN" dirty="0"/>
-              <a:t>Data Generator</a:t>
-            </a:r>
+              <a:rPr lang="en-GB" dirty="0"/>
+              <a:t>Excel</a:t>
+            </a:r>
+            <a:endParaRPr lang="en-IN" dirty="0"/>
           </a:p>
         </p:txBody>
       </p:sp>
@@ -8830,7 +8827,7 @@
           <p:cNvPr id="3" name="Content Placeholder 2">
             <a:extLst>
               <a:ext uri="{FF2B5EF4-FFF2-40B4-BE49-F238E27FC236}">
-                <a16:creationId xmlns:a16="http://schemas.microsoft.com/office/drawing/2014/main" id="{A799FB1B-936E-83C0-D314-A9D32BEFDC25}"/>
+                <a16:creationId xmlns:a16="http://schemas.microsoft.com/office/drawing/2014/main" id="{500E92CE-D89D-F2AE-C187-40E84467AA4A}"/>
               </a:ext>
             </a:extLst>
           </p:cNvPr>
@@ -8856,7 +8853,7 @@
             </a:r>
             <a:r>
               <a:rPr lang="en-IN" dirty="0"/>
-              <a:t>faker</a:t>
+              <a:t>openpyxl</a:t>
             </a:r>
           </a:p>
           <a:p>
@@ -8866,11 +8863,11 @@
             </a:r>
             <a:r>
               <a:rPr lang="en-IN" b="1" dirty="0"/>
-              <a:t>Usage : </a:t>
-            </a:r>
-            <a:r>
-              <a:rPr lang="en-IN" dirty="0"/>
-              <a:t>generates fake data</a:t>
+              <a:t>Operations : </a:t>
+            </a:r>
+            <a:r>
+              <a:rPr lang="en-IN" dirty="0"/>
+              <a:t>read , write , excel automation</a:t>
             </a:r>
           </a:p>
           <a:p>
@@ -8880,9 +8877,40 @@
             </a:r>
             <a:r>
               <a:rPr lang="en-IN" b="1" dirty="0"/>
-              <a:t>cmd : pip install faker</a:t>
-            </a:r>
-            <a:endParaRPr lang="en-IN" dirty="0"/>
+              <a:t>Sample Flow : </a:t>
+            </a:r>
+          </a:p>
+          <a:p>
+            <a:pPr lvl="1"/>
+            <a:r>
+              <a:rPr lang="en-IN" b="1" dirty="0"/>
+              <a:t> </a:t>
+            </a:r>
+            <a:r>
+              <a:rPr lang="en-IN" dirty="0"/>
+              <a:t>Create a WorkBook , Add WorkSheets , Rename Sheets , Create Tables.</a:t>
+            </a:r>
+          </a:p>
+          <a:p>
+            <a:pPr lvl="1"/>
+            <a:r>
+              <a:rPr lang="en-IN" dirty="0"/>
+              <a:t> When the WorkBook exists , load WorkBook.</a:t>
+            </a:r>
+          </a:p>
+          <a:p>
+            <a:pPr lvl="1"/>
+            <a:r>
+              <a:rPr lang="en-IN" dirty="0"/>
+              <a:t> Within WorkSheets add the data and read data.</a:t>
+            </a:r>
+          </a:p>
+          <a:p>
+            <a:pPr lvl="1"/>
+            <a:r>
+              <a:rPr lang="en-IN" dirty="0"/>
+              <a:t> Save the WorkBook.</a:t>
+            </a:r>
           </a:p>
         </p:txBody>
       </p:sp>
@@ -8891,7 +8919,7 @@
           <p:cNvPr id="4" name="Footer Placeholder 3">
             <a:extLst>
               <a:ext uri="{FF2B5EF4-FFF2-40B4-BE49-F238E27FC236}">
-                <a16:creationId xmlns:a16="http://schemas.microsoft.com/office/drawing/2014/main" id="{707FD7A8-A650-29AB-1F96-AA998CE268BB}"/>
+                <a16:creationId xmlns:a16="http://schemas.microsoft.com/office/drawing/2014/main" id="{55C92561-856D-7F47-3708-294C94D9D3BA}"/>
               </a:ext>
             </a:extLst>
           </p:cNvPr>
@@ -8920,7 +8948,7 @@
           <p:cNvPr id="5" name="Slide Number Placeholder 4">
             <a:extLst>
               <a:ext uri="{FF2B5EF4-FFF2-40B4-BE49-F238E27FC236}">
-                <a16:creationId xmlns:a16="http://schemas.microsoft.com/office/drawing/2014/main" id="{4D8E87B5-D318-9AA5-634B-EFDFEA10639F}"/>
+                <a16:creationId xmlns:a16="http://schemas.microsoft.com/office/drawing/2014/main" id="{5A544846-71AE-4EED-7C71-69CBD266AB5B}"/>
               </a:ext>
             </a:extLst>
           </p:cNvPr>
@@ -8947,7 +8975,7 @@
     </p:spTree>
     <p:extLst>
       <p:ext uri="{BB962C8B-B14F-4D97-AF65-F5344CB8AC3E}">
-        <p14:creationId xmlns:p14="http://schemas.microsoft.com/office/powerpoint/2010/main" val="683650118"/>
+        <p14:creationId xmlns:p14="http://schemas.microsoft.com/office/powerpoint/2010/main" val="1926792215"/>
       </p:ext>
     </p:extLst>
   </p:cSld>
@@ -8979,7 +9007,7 @@
           <p:cNvPr id="2" name="Title 1">
             <a:extLst>
               <a:ext uri="{FF2B5EF4-FFF2-40B4-BE49-F238E27FC236}">
-                <a16:creationId xmlns:a16="http://schemas.microsoft.com/office/drawing/2014/main" id="{9E6DD218-3F31-33F2-8CDB-7DA5BBC005B5}"/>
+                <a16:creationId xmlns:a16="http://schemas.microsoft.com/office/drawing/2014/main" id="{9FDFE934-FCD7-0FF7-3D48-FE377DC2C4BB}"/>
               </a:ext>
             </a:extLst>
           </p:cNvPr>
@@ -8997,7 +9025,7 @@
           <a:p>
             <a:r>
               <a:rPr lang="en-GB" dirty="0"/>
-              <a:t>Excel</a:t>
+              <a:t>Datetime</a:t>
             </a:r>
             <a:endParaRPr lang="en-IN" dirty="0"/>
           </a:p>
@@ -9008,7 +9036,7 @@
           <p:cNvPr id="3" name="Content Placeholder 2">
             <a:extLst>
               <a:ext uri="{FF2B5EF4-FFF2-40B4-BE49-F238E27FC236}">
-                <a16:creationId xmlns:a16="http://schemas.microsoft.com/office/drawing/2014/main" id="{500E92CE-D89D-F2AE-C187-40E84467AA4A}"/>
+                <a16:creationId xmlns:a16="http://schemas.microsoft.com/office/drawing/2014/main" id="{39006957-BA22-F06D-3CB4-AD976E5ED1FC}"/>
               </a:ext>
             </a:extLst>
           </p:cNvPr>
@@ -9025,72 +9053,59 @@
           <a:lstStyle/>
           <a:p>
             <a:r>
-              <a:rPr lang="en-IN" dirty="0"/>
+              <a:rPr lang="en-GB" dirty="0"/>
               <a:t> </a:t>
             </a:r>
             <a:r>
-              <a:rPr lang="en-IN" b="1" dirty="0"/>
-              <a:t>Package : </a:t>
-            </a:r>
-            <a:r>
-              <a:rPr lang="en-IN" dirty="0"/>
-              <a:t>openpyxl</a:t>
-            </a:r>
-          </a:p>
-          <a:p>
-            <a:r>
-              <a:rPr lang="en-IN" dirty="0"/>
+              <a:rPr lang="en-GB" b="1" dirty="0"/>
+              <a:t>Import : </a:t>
+            </a:r>
+            <a:r>
+              <a:rPr lang="en-GB" dirty="0"/>
+              <a:t>import datetime	or	from datetime import *</a:t>
+            </a:r>
+          </a:p>
+          <a:p>
+            <a:r>
+              <a:rPr lang="en-GB" dirty="0"/>
               <a:t> </a:t>
             </a:r>
             <a:r>
-              <a:rPr lang="en-IN" b="1" dirty="0"/>
-              <a:t>Operations : </a:t>
-            </a:r>
-            <a:r>
-              <a:rPr lang="en-IN" dirty="0"/>
-              <a:t>read , write , excel automation</a:t>
-            </a:r>
-          </a:p>
-          <a:p>
-            <a:r>
-              <a:rPr lang="en-IN" dirty="0"/>
+              <a:rPr lang="en-GB" b="1" dirty="0"/>
+              <a:t>Uses : </a:t>
+            </a:r>
+          </a:p>
+          <a:p>
+            <a:pPr lvl="1"/>
+            <a:r>
+              <a:rPr lang="en-GB" b="1" dirty="0"/>
               <a:t> </a:t>
             </a:r>
             <a:r>
-              <a:rPr lang="en-IN" b="1" dirty="0"/>
-              <a:t>Sample Flow : </a:t>
-            </a:r>
+              <a:rPr lang="en-GB" dirty="0"/>
+              <a:t>get current date &amp; time.</a:t>
+            </a:r>
+            <a:endParaRPr lang="en-GB" b="1" dirty="0"/>
           </a:p>
           <a:p>
             <a:pPr lvl="1"/>
             <a:r>
-              <a:rPr lang="en-IN" b="1" dirty="0"/>
-              <a:t> </a:t>
-            </a:r>
-            <a:r>
-              <a:rPr lang="en-IN" dirty="0"/>
-              <a:t>Create a WorkBook , Add WorkSheets , Rename Sheets , Create Tables.</a:t>
+              <a:rPr lang="en-GB" dirty="0"/>
+              <a:t> datetime parser in different ways.</a:t>
             </a:r>
           </a:p>
           <a:p>
             <a:pPr lvl="1"/>
             <a:r>
-              <a:rPr lang="en-IN" dirty="0"/>
-              <a:t> When the WorkBook exists , load WorkBook.</a:t>
+              <a:rPr lang="en-GB" dirty="0"/>
+              <a:t> compare 2 dates.</a:t>
             </a:r>
           </a:p>
           <a:p>
             <a:pPr lvl="1"/>
             <a:r>
-              <a:rPr lang="en-IN" dirty="0"/>
-              <a:t> Within WorkSheets add the data and read data.</a:t>
-            </a:r>
-          </a:p>
-          <a:p>
-            <a:pPr lvl="1"/>
-            <a:r>
-              <a:rPr lang="en-IN" dirty="0"/>
-              <a:t> Save the WorkBook.</a:t>
+              <a:rPr lang="en-GB" dirty="0"/>
+              <a:t> date &amp; time calculations.</a:t>
             </a:r>
           </a:p>
         </p:txBody>
@@ -9100,7 +9115,7 @@
           <p:cNvPr id="4" name="Footer Placeholder 3">
             <a:extLst>
               <a:ext uri="{FF2B5EF4-FFF2-40B4-BE49-F238E27FC236}">
-                <a16:creationId xmlns:a16="http://schemas.microsoft.com/office/drawing/2014/main" id="{55C92561-856D-7F47-3708-294C94D9D3BA}"/>
+                <a16:creationId xmlns:a16="http://schemas.microsoft.com/office/drawing/2014/main" id="{723E5E67-40AC-20E1-815F-D843004BA175}"/>
               </a:ext>
             </a:extLst>
           </p:cNvPr>
@@ -9129,7 +9144,7 @@
           <p:cNvPr id="5" name="Slide Number Placeholder 4">
             <a:extLst>
               <a:ext uri="{FF2B5EF4-FFF2-40B4-BE49-F238E27FC236}">
-                <a16:creationId xmlns:a16="http://schemas.microsoft.com/office/drawing/2014/main" id="{5A544846-71AE-4EED-7C71-69CBD266AB5B}"/>
+                <a16:creationId xmlns:a16="http://schemas.microsoft.com/office/drawing/2014/main" id="{C7832505-4646-07D5-87EB-4E8F6703AB14}"/>
               </a:ext>
             </a:extLst>
           </p:cNvPr>
@@ -9156,7 +9171,7 @@
     </p:spTree>
     <p:extLst>
       <p:ext uri="{BB962C8B-B14F-4D97-AF65-F5344CB8AC3E}">
-        <p14:creationId xmlns:p14="http://schemas.microsoft.com/office/powerpoint/2010/main" val="1926792215"/>
+        <p14:creationId xmlns:p14="http://schemas.microsoft.com/office/powerpoint/2010/main" val="682083692"/>
       </p:ext>
     </p:extLst>
   </p:cSld>
@@ -10127,7 +10142,7 @@
           <p:cNvPr id="2" name="Title 1">
             <a:extLst>
               <a:ext uri="{FF2B5EF4-FFF2-40B4-BE49-F238E27FC236}">
-                <a16:creationId xmlns:a16="http://schemas.microsoft.com/office/drawing/2014/main" id="{9FDFE934-FCD7-0FF7-3D48-FE377DC2C4BB}"/>
+                <a16:creationId xmlns:a16="http://schemas.microsoft.com/office/drawing/2014/main" id="{D70072C2-CAC4-C990-6527-C89C83DBC442}"/>
               </a:ext>
             </a:extLst>
           </p:cNvPr>
@@ -10145,7 +10160,7 @@
           <a:p>
             <a:r>
               <a:rPr lang="en-GB" dirty="0"/>
-              <a:t>Datetime</a:t>
+              <a:t>Email</a:t>
             </a:r>
             <a:endParaRPr lang="en-IN" dirty="0"/>
           </a:p>
@@ -10156,7 +10171,7 @@
           <p:cNvPr id="3" name="Content Placeholder 2">
             <a:extLst>
               <a:ext uri="{FF2B5EF4-FFF2-40B4-BE49-F238E27FC236}">
-                <a16:creationId xmlns:a16="http://schemas.microsoft.com/office/drawing/2014/main" id="{39006957-BA22-F06D-3CB4-AD976E5ED1FC}"/>
+                <a16:creationId xmlns:a16="http://schemas.microsoft.com/office/drawing/2014/main" id="{96D6ED05-9C2A-02BA-AAD4-D9D580B91181}"/>
               </a:ext>
             </a:extLst>
           </p:cNvPr>
@@ -10178,11 +10193,11 @@
             </a:r>
             <a:r>
               <a:rPr lang="en-GB" b="1" dirty="0"/>
-              <a:t>Import : </a:t>
+              <a:t>Packages : </a:t>
             </a:r>
             <a:r>
               <a:rPr lang="en-GB" dirty="0"/>
-              <a:t>import datetime	or	from datetime import *</a:t>
+              <a:t>smtplib , mimetype , email</a:t>
             </a:r>
           </a:p>
           <a:p>
@@ -10194,39 +10209,50 @@
               <a:rPr lang="en-GB" b="1" dirty="0"/>
               <a:t>Uses : </a:t>
             </a:r>
+            <a:r>
+              <a:rPr lang="en-GB" dirty="0"/>
+              <a:t>send simple mail &amp; mail with attachments</a:t>
+            </a:r>
+          </a:p>
+          <a:p>
+            <a:r>
+              <a:rPr lang="en-GB" dirty="0"/>
+              <a:t> </a:t>
+            </a:r>
+            <a:r>
+              <a:rPr lang="en-GB" b="1" dirty="0"/>
+              <a:t>Steps : </a:t>
+            </a:r>
+            <a:endParaRPr lang="en-GB" dirty="0"/>
           </a:p>
           <a:p>
             <a:pPr lvl="1"/>
             <a:r>
-              <a:rPr lang="en-GB" b="1" dirty="0"/>
-              <a:t> </a:t>
-            </a:r>
-            <a:r>
               <a:rPr lang="en-GB" dirty="0"/>
-              <a:t>get current date &amp; time.</a:t>
-            </a:r>
-            <a:endParaRPr lang="en-GB" b="1" dirty="0"/>
+              <a:t> create the app password.</a:t>
+            </a:r>
           </a:p>
           <a:p>
             <a:pPr lvl="1"/>
             <a:r>
               <a:rPr lang="en-GB" dirty="0"/>
-              <a:t> datetime parser in different ways.</a:t>
+              <a:t> two-step verification.</a:t>
             </a:r>
           </a:p>
           <a:p>
             <a:pPr lvl="1"/>
             <a:r>
               <a:rPr lang="en-GB" dirty="0"/>
-              <a:t> compare 2 dates.</a:t>
+              <a:t> securely store and read the password.</a:t>
             </a:r>
           </a:p>
           <a:p>
             <a:pPr lvl="1"/>
             <a:r>
               <a:rPr lang="en-GB" dirty="0"/>
-              <a:t> date &amp; time calculations.</a:t>
-            </a:r>
+              <a:t> make smtp encrypted connection.</a:t>
+            </a:r>
+            <a:endParaRPr lang="en-IN" dirty="0"/>
           </a:p>
         </p:txBody>
       </p:sp>
@@ -10235,7 +10261,7 @@
           <p:cNvPr id="4" name="Footer Placeholder 3">
             <a:extLst>
               <a:ext uri="{FF2B5EF4-FFF2-40B4-BE49-F238E27FC236}">
-                <a16:creationId xmlns:a16="http://schemas.microsoft.com/office/drawing/2014/main" id="{723E5E67-40AC-20E1-815F-D843004BA175}"/>
+                <a16:creationId xmlns:a16="http://schemas.microsoft.com/office/drawing/2014/main" id="{EC9EC30D-1289-FA18-7D84-4F3CF09AC37C}"/>
               </a:ext>
             </a:extLst>
           </p:cNvPr>
@@ -10264,7 +10290,7 @@
           <p:cNvPr id="5" name="Slide Number Placeholder 4">
             <a:extLst>
               <a:ext uri="{FF2B5EF4-FFF2-40B4-BE49-F238E27FC236}">
-                <a16:creationId xmlns:a16="http://schemas.microsoft.com/office/drawing/2014/main" id="{C7832505-4646-07D5-87EB-4E8F6703AB14}"/>
+                <a16:creationId xmlns:a16="http://schemas.microsoft.com/office/drawing/2014/main" id="{B42736E2-8304-D2B5-5ADA-5F4CC1D080FA}"/>
               </a:ext>
             </a:extLst>
           </p:cNvPr>
@@ -10291,7 +10317,7 @@
     </p:spTree>
     <p:extLst>
       <p:ext uri="{BB962C8B-B14F-4D97-AF65-F5344CB8AC3E}">
-        <p14:creationId xmlns:p14="http://schemas.microsoft.com/office/powerpoint/2010/main" val="682083692"/>
+        <p14:creationId xmlns:p14="http://schemas.microsoft.com/office/powerpoint/2010/main" val="479021944"/>
       </p:ext>
     </p:extLst>
   </p:cSld>
@@ -10323,7 +10349,7 @@
           <p:cNvPr id="2" name="Title 1">
             <a:extLst>
               <a:ext uri="{FF2B5EF4-FFF2-40B4-BE49-F238E27FC236}">
-                <a16:creationId xmlns:a16="http://schemas.microsoft.com/office/drawing/2014/main" id="{D70072C2-CAC4-C990-6527-C89C83DBC442}"/>
+                <a16:creationId xmlns:a16="http://schemas.microsoft.com/office/drawing/2014/main" id="{7907DEEF-0FBD-20D9-2965-3ED3E721BD53}"/>
               </a:ext>
             </a:extLst>
           </p:cNvPr>
@@ -10341,7 +10367,7 @@
           <a:p>
             <a:r>
               <a:rPr lang="en-GB" dirty="0"/>
-              <a:t>Email</a:t>
+              <a:t>MYSQL Connection</a:t>
             </a:r>
             <a:endParaRPr lang="en-IN" dirty="0"/>
           </a:p>
@@ -10352,7 +10378,7 @@
           <p:cNvPr id="3" name="Content Placeholder 2">
             <a:extLst>
               <a:ext uri="{FF2B5EF4-FFF2-40B4-BE49-F238E27FC236}">
-                <a16:creationId xmlns:a16="http://schemas.microsoft.com/office/drawing/2014/main" id="{96D6ED05-9C2A-02BA-AAD4-D9D580B91181}"/>
+                <a16:creationId xmlns:a16="http://schemas.microsoft.com/office/drawing/2014/main" id="{BD381BC6-08E5-488F-AD25-3B559783886A}"/>
               </a:ext>
             </a:extLst>
           </p:cNvPr>
@@ -10374,66 +10400,58 @@
             </a:r>
             <a:r>
               <a:rPr lang="en-GB" b="1" dirty="0"/>
-              <a:t>Packages : </a:t>
+              <a:t>cmd : pip install mysql-connector-python</a:t>
+            </a:r>
+          </a:p>
+          <a:p>
+            <a:r>
+              <a:rPr lang="en-GB" b="1" dirty="0"/>
+              <a:t> Connections : </a:t>
+            </a:r>
+          </a:p>
+          <a:p>
+            <a:pPr lvl="1"/>
+            <a:r>
+              <a:rPr lang="en-GB" b="1" dirty="0"/>
+              <a:t> </a:t>
             </a:r>
             <a:r>
               <a:rPr lang="en-GB" dirty="0"/>
-              <a:t>smtplib , mimetype , email</a:t>
-            </a:r>
-          </a:p>
-          <a:p>
+              <a:t>Normal Connection.</a:t>
+            </a:r>
+          </a:p>
+          <a:p>
+            <a:pPr lvl="1"/>
             <a:r>
               <a:rPr lang="en-GB" dirty="0"/>
+              <a:t> Connection Pooling.</a:t>
+            </a:r>
+          </a:p>
+          <a:p>
+            <a:r>
+              <a:rPr lang="en-IN" dirty="0"/>
               <a:t> </a:t>
             </a:r>
             <a:r>
               <a:rPr lang="en-GB" b="1" dirty="0"/>
-              <a:t>Uses : </a:t>
+              <a:t>CURD</a:t>
             </a:r>
             <a:r>
               <a:rPr lang="en-GB" dirty="0"/>
-              <a:t>send simple mail &amp; mail with attachments</a:t>
-            </a:r>
-          </a:p>
-          <a:p>
-            <a:r>
-              <a:rPr lang="en-GB" dirty="0"/>
-              <a:t> </a:t>
-            </a:r>
-            <a:r>
-              <a:rPr lang="en-GB" b="1" dirty="0"/>
-              <a:t>Steps : </a:t>
-            </a:r>
-            <a:endParaRPr lang="en-GB" dirty="0"/>
-          </a:p>
-          <a:p>
-            <a:pPr lvl="1"/>
-            <a:r>
-              <a:rPr lang="en-GB" dirty="0"/>
-              <a:t> create the app password.</a:t>
-            </a:r>
-          </a:p>
-          <a:p>
-            <a:pPr lvl="1"/>
-            <a:r>
-              <a:rPr lang="en-GB" dirty="0"/>
-              <a:t> two-step verification.</a:t>
-            </a:r>
-          </a:p>
-          <a:p>
-            <a:pPr lvl="1"/>
-            <a:r>
-              <a:rPr lang="en-GB" dirty="0"/>
-              <a:t> securely store and read the password.</a:t>
-            </a:r>
-          </a:p>
-          <a:p>
-            <a:pPr lvl="1"/>
-            <a:r>
-              <a:rPr lang="en-GB" dirty="0"/>
-              <a:t> make smtp encrypted connection.</a:t>
-            </a:r>
-            <a:endParaRPr lang="en-IN" dirty="0"/>
+              <a:t> Operations.</a:t>
+            </a:r>
+          </a:p>
+          <a:p>
+            <a:r>
+              <a:rPr lang="en-IN" dirty="0"/>
+              <a:t> Safe Connection handling.</a:t>
+            </a:r>
+          </a:p>
+          <a:p>
+            <a:r>
+              <a:rPr lang="en-IN" dirty="0"/>
+              <a:t> mysql connection pool concept.</a:t>
+            </a:r>
           </a:p>
         </p:txBody>
       </p:sp>
@@ -10442,7 +10460,7 @@
           <p:cNvPr id="4" name="Footer Placeholder 3">
             <a:extLst>
               <a:ext uri="{FF2B5EF4-FFF2-40B4-BE49-F238E27FC236}">
-                <a16:creationId xmlns:a16="http://schemas.microsoft.com/office/drawing/2014/main" id="{EC9EC30D-1289-FA18-7D84-4F3CF09AC37C}"/>
+                <a16:creationId xmlns:a16="http://schemas.microsoft.com/office/drawing/2014/main" id="{F48C9E58-D3F1-09C7-FE6C-48D612C2329F}"/>
               </a:ext>
             </a:extLst>
           </p:cNvPr>
@@ -10471,7 +10489,7 @@
           <p:cNvPr id="5" name="Slide Number Placeholder 4">
             <a:extLst>
               <a:ext uri="{FF2B5EF4-FFF2-40B4-BE49-F238E27FC236}">
-                <a16:creationId xmlns:a16="http://schemas.microsoft.com/office/drawing/2014/main" id="{B42736E2-8304-D2B5-5ADA-5F4CC1D080FA}"/>
+                <a16:creationId xmlns:a16="http://schemas.microsoft.com/office/drawing/2014/main" id="{9208607B-2CC6-16D0-6988-4DB6A51DD176}"/>
               </a:ext>
             </a:extLst>
           </p:cNvPr>
@@ -10498,7 +10516,7 @@
     </p:spTree>
     <p:extLst>
       <p:ext uri="{BB962C8B-B14F-4D97-AF65-F5344CB8AC3E}">
-        <p14:creationId xmlns:p14="http://schemas.microsoft.com/office/powerpoint/2010/main" val="479021944"/>
+        <p14:creationId xmlns:p14="http://schemas.microsoft.com/office/powerpoint/2010/main" val="2713769145"/>
       </p:ext>
     </p:extLst>
   </p:cSld>
@@ -10530,7 +10548,7 @@
           <p:cNvPr id="2" name="Title 1">
             <a:extLst>
               <a:ext uri="{FF2B5EF4-FFF2-40B4-BE49-F238E27FC236}">
-                <a16:creationId xmlns:a16="http://schemas.microsoft.com/office/drawing/2014/main" id="{7907DEEF-0FBD-20D9-2965-3ED3E721BD53}"/>
+                <a16:creationId xmlns:a16="http://schemas.microsoft.com/office/drawing/2014/main" id="{05537F52-D920-165C-539D-D4323D2D50DF}"/>
               </a:ext>
             </a:extLst>
           </p:cNvPr>
@@ -10548,7 +10566,7 @@
           <a:p>
             <a:r>
               <a:rPr lang="en-GB" dirty="0"/>
-              <a:t>MYSQL Connection</a:t>
+              <a:t>Custom Packages</a:t>
             </a:r>
             <a:endParaRPr lang="en-IN" dirty="0"/>
           </a:p>
@@ -10559,7 +10577,7 @@
           <p:cNvPr id="3" name="Content Placeholder 2">
             <a:extLst>
               <a:ext uri="{FF2B5EF4-FFF2-40B4-BE49-F238E27FC236}">
-                <a16:creationId xmlns:a16="http://schemas.microsoft.com/office/drawing/2014/main" id="{BD381BC6-08E5-488F-AD25-3B559783886A}"/>
+                <a16:creationId xmlns:a16="http://schemas.microsoft.com/office/drawing/2014/main" id="{0AAE2362-0572-BFD5-F478-A0EF74AB9E1A}"/>
               </a:ext>
             </a:extLst>
           </p:cNvPr>
@@ -10576,56 +10594,57 @@
           <a:lstStyle/>
           <a:p>
             <a:r>
-              <a:rPr lang="en-GB" dirty="0"/>
+              <a:rPr lang="en-IN" dirty="0"/>
+              <a:t> Create own Packages.</a:t>
+            </a:r>
+          </a:p>
+          <a:p>
+            <a:r>
+              <a:rPr lang="en-IN" dirty="0"/>
               <a:t> </a:t>
             </a:r>
             <a:r>
-              <a:rPr lang="en-GB" b="1" dirty="0"/>
-              <a:t>cmd : pip install mysql-connector-python</a:t>
-            </a:r>
-          </a:p>
-          <a:p>
-            <a:r>
-              <a:rPr lang="en-GB" b="1" dirty="0"/>
-              <a:t> Connections : </a:t>
+              <a:rPr lang="en-IN" b="1" dirty="0"/>
+              <a:t>Steps : </a:t>
             </a:r>
           </a:p>
           <a:p>
             <a:pPr lvl="1"/>
             <a:r>
-              <a:rPr lang="en-GB" b="1" dirty="0"/>
+              <a:rPr lang="en-IN" b="1" dirty="0"/>
               <a:t> </a:t>
             </a:r>
             <a:r>
-              <a:rPr lang="en-GB" dirty="0"/>
-              <a:t>Normal Connection.</a:t>
+              <a:rPr lang="en-IN" dirty="0"/>
+              <a:t>create a folder.</a:t>
             </a:r>
           </a:p>
           <a:p>
             <a:pPr lvl="1"/>
             <a:r>
-              <a:rPr lang="en-GB" dirty="0"/>
-              <a:t> Connection Pooling.</a:t>
-            </a:r>
-          </a:p>
-          <a:p>
-            <a:r>
-              <a:rPr lang="en-IN" dirty="0"/>
-              <a:t> </a:t>
-            </a:r>
-            <a:r>
-              <a:rPr lang="en-GB" b="1" dirty="0"/>
-              <a:t>CURD</a:t>
-            </a:r>
-            <a:r>
-              <a:rPr lang="en-GB" dirty="0"/>
-              <a:t> Operations.</a:t>
-            </a:r>
-          </a:p>
-          <a:p>
-            <a:r>
-              <a:rPr lang="en-IN" dirty="0"/>
-              <a:t> Safe Connection handling.</a:t>
+              <a:rPr lang="en-IN" dirty="0"/>
+              <a:t> inside that folder add src folder , gitignore , readme , license , venv , pyproject.toml.</a:t>
+            </a:r>
+          </a:p>
+          <a:p>
+            <a:pPr lvl="1"/>
+            <a:r>
+              <a:rPr lang="en-IN" dirty="0"/>
+              <a:t> pypi account login.</a:t>
+            </a:r>
+          </a:p>
+          <a:p>
+            <a:pPr lvl="1"/>
+            <a:r>
+              <a:rPr lang="en-IN" dirty="0"/>
+              <a:t> publish the branch in GitHub.</a:t>
+            </a:r>
+          </a:p>
+          <a:p>
+            <a:pPr lvl="1"/>
+            <a:r>
+              <a:rPr lang="en-IN" dirty="0"/>
+              <a:t> on cmd push the folder.</a:t>
             </a:r>
           </a:p>
         </p:txBody>
@@ -10635,7 +10654,7 @@
           <p:cNvPr id="4" name="Footer Placeholder 3">
             <a:extLst>
               <a:ext uri="{FF2B5EF4-FFF2-40B4-BE49-F238E27FC236}">
-                <a16:creationId xmlns:a16="http://schemas.microsoft.com/office/drawing/2014/main" id="{F48C9E58-D3F1-09C7-FE6C-48D612C2329F}"/>
+                <a16:creationId xmlns:a16="http://schemas.microsoft.com/office/drawing/2014/main" id="{DFE71CE4-9080-389F-EBAC-A28DAE84DAEE}"/>
               </a:ext>
             </a:extLst>
           </p:cNvPr>
@@ -10664,7 +10683,7 @@
           <p:cNvPr id="5" name="Slide Number Placeholder 4">
             <a:extLst>
               <a:ext uri="{FF2B5EF4-FFF2-40B4-BE49-F238E27FC236}">
-                <a16:creationId xmlns:a16="http://schemas.microsoft.com/office/drawing/2014/main" id="{9208607B-2CC6-16D0-6988-4DB6A51DD176}"/>
+                <a16:creationId xmlns:a16="http://schemas.microsoft.com/office/drawing/2014/main" id="{08D0C57D-0999-D180-8AC1-D9F2F4C92A21}"/>
               </a:ext>
             </a:extLst>
           </p:cNvPr>
@@ -10691,7 +10710,7 @@
     </p:spTree>
     <p:extLst>
       <p:ext uri="{BB962C8B-B14F-4D97-AF65-F5344CB8AC3E}">
-        <p14:creationId xmlns:p14="http://schemas.microsoft.com/office/powerpoint/2010/main" val="2713769145"/>
+        <p14:creationId xmlns:p14="http://schemas.microsoft.com/office/powerpoint/2010/main" val="2724122432"/>
       </p:ext>
     </p:extLst>
   </p:cSld>
@@ -10723,7 +10742,7 @@
           <p:cNvPr id="2" name="Title 1">
             <a:extLst>
               <a:ext uri="{FF2B5EF4-FFF2-40B4-BE49-F238E27FC236}">
-                <a16:creationId xmlns:a16="http://schemas.microsoft.com/office/drawing/2014/main" id="{05537F52-D920-165C-539D-D4323D2D50DF}"/>
+                <a16:creationId xmlns:a16="http://schemas.microsoft.com/office/drawing/2014/main" id="{EA46A9CF-2C01-C94A-DFD6-EFFFA8132FF4}"/>
               </a:ext>
             </a:extLst>
           </p:cNvPr>
@@ -10740,10 +10759,9 @@
           <a:lstStyle/>
           <a:p>
             <a:r>
-              <a:rPr lang="en-GB" dirty="0"/>
-              <a:t>Custom Packages</a:t>
-            </a:r>
-            <a:endParaRPr lang="en-IN" dirty="0"/>
+              <a:rPr lang="en-IN" dirty="0"/>
+              <a:t>Folder Structure</a:t>
+            </a:r>
           </a:p>
         </p:txBody>
       </p:sp>
@@ -10752,7 +10770,7 @@
           <p:cNvPr id="3" name="Content Placeholder 2">
             <a:extLst>
               <a:ext uri="{FF2B5EF4-FFF2-40B4-BE49-F238E27FC236}">
-                <a16:creationId xmlns:a16="http://schemas.microsoft.com/office/drawing/2014/main" id="{0AAE2362-0572-BFD5-F478-A0EF74AB9E1A}"/>
+                <a16:creationId xmlns:a16="http://schemas.microsoft.com/office/drawing/2014/main" id="{2839D2C2-24AC-AFC4-E450-8CABA8F02A1E}"/>
               </a:ext>
             </a:extLst>
           </p:cNvPr>
@@ -10765,14 +10783,10 @@
         </p:nvSpPr>
         <p:spPr/>
         <p:txBody>
-          <a:bodyPr/>
-          <a:lstStyle/>
-          <a:p>
-            <a:r>
-              <a:rPr lang="en-IN" dirty="0"/>
-              <a:t> Create own Packages.</a:t>
-            </a:r>
-          </a:p>
+          <a:bodyPr>
+            <a:normAutofit lnSpcReduction="10000"/>
+          </a:bodyPr>
+          <a:lstStyle/>
           <a:p>
             <a:r>
               <a:rPr lang="en-IN" dirty="0"/>
@@ -10780,46 +10794,103 @@
             </a:r>
             <a:r>
               <a:rPr lang="en-IN" b="1" dirty="0"/>
-              <a:t>Steps : </a:t>
-            </a:r>
-          </a:p>
-          <a:p>
-            <a:pPr lvl="1"/>
+              <a:t>Example : </a:t>
+            </a:r>
+            <a:r>
+              <a:rPr lang="en-IN" dirty="0"/>
+              <a:t>creating a package named customs</a:t>
+            </a:r>
+          </a:p>
+          <a:p>
+            <a:r>
+              <a:rPr lang="en-IN" dirty="0"/>
+              <a:t> </a:t>
+            </a:r>
             <a:r>
               <a:rPr lang="en-IN" b="1" dirty="0"/>
-              <a:t> </a:t>
-            </a:r>
-            <a:r>
-              <a:rPr lang="en-IN" dirty="0"/>
-              <a:t>create a folder.</a:t>
-            </a:r>
-          </a:p>
-          <a:p>
-            <a:pPr lvl="1"/>
-            <a:r>
-              <a:rPr lang="en-IN" dirty="0"/>
-              <a:t> inside that folder add src folder , gitignore , readme , license , venv , pyproject.toml.</a:t>
-            </a:r>
-          </a:p>
-          <a:p>
-            <a:pPr lvl="1"/>
-            <a:r>
-              <a:rPr lang="en-IN" dirty="0"/>
-              <a:t> pypi account login.</a:t>
-            </a:r>
-          </a:p>
-          <a:p>
-            <a:pPr lvl="1"/>
-            <a:r>
-              <a:rPr lang="en-IN" dirty="0"/>
-              <a:t> publish the branch in GitHub.</a:t>
-            </a:r>
-          </a:p>
-          <a:p>
-            <a:pPr lvl="1"/>
-            <a:r>
-              <a:rPr lang="en-IN" dirty="0"/>
-              <a:t> on cmd push the folder.</a:t>
+              <a:t>Structure : </a:t>
+            </a:r>
+            <a:endParaRPr lang="en-IN" dirty="0"/>
+          </a:p>
+          <a:p>
+            <a:pPr marL="0" indent="0">
+              <a:buNone/>
+            </a:pPr>
+            <a:r>
+              <a:rPr lang="en-IN" dirty="0"/>
+              <a:t>	- src</a:t>
+            </a:r>
+          </a:p>
+          <a:p>
+            <a:pPr marL="0" indent="0">
+              <a:buNone/>
+            </a:pPr>
+            <a:r>
+              <a:rPr lang="en-IN" dirty="0"/>
+              <a:t>		- customs</a:t>
+            </a:r>
+          </a:p>
+          <a:p>
+            <a:pPr marL="0" indent="0">
+              <a:buNone/>
+            </a:pPr>
+            <a:r>
+              <a:rPr lang="en-IN" dirty="0"/>
+              <a:t>			- venv</a:t>
+            </a:r>
+          </a:p>
+          <a:p>
+            <a:pPr marL="0" indent="0">
+              <a:buNone/>
+            </a:pPr>
+            <a:r>
+              <a:rPr lang="en-IN" dirty="0"/>
+              <a:t>			- __init__.py</a:t>
+            </a:r>
+          </a:p>
+          <a:p>
+            <a:pPr marL="0" indent="0">
+              <a:buNone/>
+            </a:pPr>
+            <a:r>
+              <a:rPr lang="en-IN" dirty="0"/>
+              <a:t>			- main.py</a:t>
+            </a:r>
+          </a:p>
+          <a:p>
+            <a:pPr marL="0" indent="0">
+              <a:buNone/>
+            </a:pPr>
+            <a:r>
+              <a:rPr lang="en-IN" dirty="0"/>
+              <a:t>	- license</a:t>
+            </a:r>
+          </a:p>
+          <a:p>
+            <a:pPr marL="0" indent="0">
+              <a:buNone/>
+            </a:pPr>
+            <a:r>
+              <a:rPr lang="en-IN" dirty="0"/>
+              <a:t>	- readme</a:t>
+            </a:r>
+          </a:p>
+          <a:p>
+            <a:pPr marL="0" indent="0">
+              <a:buNone/>
+            </a:pPr>
+            <a:r>
+              <a:rPr lang="en-IN" dirty="0"/>
+              <a:t>	- pyproject.toml</a:t>
+            </a:r>
+          </a:p>
+          <a:p>
+            <a:pPr marL="0" indent="0">
+              <a:buNone/>
+            </a:pPr>
+            <a:r>
+              <a:rPr lang="en-IN" dirty="0"/>
+              <a:t>	- .gitignore</a:t>
             </a:r>
           </a:p>
         </p:txBody>
@@ -10829,7 +10900,7 @@
           <p:cNvPr id="4" name="Footer Placeholder 3">
             <a:extLst>
               <a:ext uri="{FF2B5EF4-FFF2-40B4-BE49-F238E27FC236}">
-                <a16:creationId xmlns:a16="http://schemas.microsoft.com/office/drawing/2014/main" id="{DFE71CE4-9080-389F-EBAC-A28DAE84DAEE}"/>
+                <a16:creationId xmlns:a16="http://schemas.microsoft.com/office/drawing/2014/main" id="{8367D499-21CA-1608-F638-E9171FD79A35}"/>
               </a:ext>
             </a:extLst>
           </p:cNvPr>
@@ -10858,7 +10929,7 @@
           <p:cNvPr id="5" name="Slide Number Placeholder 4">
             <a:extLst>
               <a:ext uri="{FF2B5EF4-FFF2-40B4-BE49-F238E27FC236}">
-                <a16:creationId xmlns:a16="http://schemas.microsoft.com/office/drawing/2014/main" id="{08D0C57D-0999-D180-8AC1-D9F2F4C92A21}"/>
+                <a16:creationId xmlns:a16="http://schemas.microsoft.com/office/drawing/2014/main" id="{2FE49377-ACB1-2199-795C-1989FA4FA786}"/>
               </a:ext>
             </a:extLst>
           </p:cNvPr>
@@ -10885,7 +10956,7 @@
     </p:spTree>
     <p:extLst>
       <p:ext uri="{BB962C8B-B14F-4D97-AF65-F5344CB8AC3E}">
-        <p14:creationId xmlns:p14="http://schemas.microsoft.com/office/powerpoint/2010/main" val="2724122432"/>
+        <p14:creationId xmlns:p14="http://schemas.microsoft.com/office/powerpoint/2010/main" val="1743211506"/>
       </p:ext>
     </p:extLst>
   </p:cSld>
@@ -10917,7 +10988,7 @@
           <p:cNvPr id="2" name="Title 1">
             <a:extLst>
               <a:ext uri="{FF2B5EF4-FFF2-40B4-BE49-F238E27FC236}">
-                <a16:creationId xmlns:a16="http://schemas.microsoft.com/office/drawing/2014/main" id="{EA46A9CF-2C01-C94A-DFD6-EFFFA8132FF4}"/>
+                <a16:creationId xmlns:a16="http://schemas.microsoft.com/office/drawing/2014/main" id="{89A40D6B-3A8E-67A6-6A68-010B58DAC4FC}"/>
               </a:ext>
             </a:extLst>
           </p:cNvPr>
@@ -10935,7 +11006,7 @@
           <a:p>
             <a:r>
               <a:rPr lang="en-IN" dirty="0"/>
-              <a:t>Folder Structure</a:t>
+              <a:t>Problems</a:t>
             </a:r>
           </a:p>
         </p:txBody>
@@ -10945,7 +11016,7 @@
           <p:cNvPr id="3" name="Content Placeholder 2">
             <a:extLst>
               <a:ext uri="{FF2B5EF4-FFF2-40B4-BE49-F238E27FC236}">
-                <a16:creationId xmlns:a16="http://schemas.microsoft.com/office/drawing/2014/main" id="{2839D2C2-24AC-AFC4-E450-8CABA8F02A1E}"/>
+                <a16:creationId xmlns:a16="http://schemas.microsoft.com/office/drawing/2014/main" id="{2EA13D08-34E8-FF65-D42D-B7D8201AF8B5}"/>
               </a:ext>
             </a:extLst>
           </p:cNvPr>
@@ -10958,115 +11029,63 @@
         </p:nvSpPr>
         <p:spPr/>
         <p:txBody>
-          <a:bodyPr>
-            <a:normAutofit lnSpcReduction="10000"/>
-          </a:bodyPr>
-          <a:lstStyle/>
+          <a:bodyPr/>
+          <a:lstStyle/>
+          <a:p>
+            <a:r>
+              <a:rPr lang="en-IN" dirty="0"/>
+              <a:t> Valid Parentheses.</a:t>
+            </a:r>
+          </a:p>
           <a:p>
             <a:r>
               <a:rPr lang="en-IN" dirty="0"/>
               <a:t> </a:t>
             </a:r>
             <a:r>
-              <a:rPr lang="en-IN" b="1" dirty="0"/>
-              <a:t>Example : </a:t>
-            </a:r>
-            <a:r>
-              <a:rPr lang="en-IN" dirty="0"/>
-              <a:t>creating a package named customs</a:t>
-            </a:r>
-          </a:p>
-          <a:p>
-            <a:r>
-              <a:rPr lang="en-IN" dirty="0"/>
-              <a:t> </a:t>
-            </a:r>
-            <a:r>
-              <a:rPr lang="en-IN" b="1" dirty="0"/>
-              <a:t>Structure : </a:t>
-            </a:r>
-            <a:endParaRPr lang="en-IN" dirty="0"/>
-          </a:p>
-          <a:p>
-            <a:pPr marL="0" indent="0">
+              <a:rPr lang="en-GB" dirty="0"/>
+              <a:t>Reverse Vowels of a String.</a:t>
+            </a:r>
+          </a:p>
+          <a:p>
+            <a:r>
+              <a:rPr lang="en-IN" dirty="0"/>
+              <a:t> Keyboard Row.</a:t>
+            </a:r>
+          </a:p>
+          <a:p>
+            <a:r>
+              <a:rPr lang="en-IN" dirty="0"/>
+              <a:t> Form words in diagonal flow.</a:t>
+            </a:r>
+          </a:p>
+          <a:p>
+            <a:r>
+              <a:rPr lang="en-IN" dirty="0"/>
+              <a:t> Equal Score Substrings.</a:t>
+            </a:r>
+          </a:p>
+          <a:p>
+            <a:r>
+              <a:rPr lang="en-IN" dirty="0"/>
+              <a:t> Zigzag Conversion.</a:t>
+            </a:r>
+          </a:p>
+          <a:p>
+            <a:endParaRPr lang="en-IN" dirty="0"/>
+          </a:p>
+          <a:p>
+            <a:endParaRPr lang="en-IN" dirty="0"/>
+          </a:p>
+          <a:p>
+            <a:pPr marL="0" indent="0" algn="ctr">
               <a:buNone/>
             </a:pPr>
             <a:r>
-              <a:rPr lang="en-IN" dirty="0"/>
-              <a:t>	- src</a:t>
-            </a:r>
-          </a:p>
-          <a:p>
-            <a:pPr marL="0" indent="0">
-              <a:buNone/>
-            </a:pPr>
-            <a:r>
-              <a:rPr lang="en-IN" dirty="0"/>
-              <a:t>		- customs</a:t>
-            </a:r>
-          </a:p>
-          <a:p>
-            <a:pPr marL="0" indent="0">
-              <a:buNone/>
-            </a:pPr>
-            <a:r>
-              <a:rPr lang="en-IN" dirty="0"/>
-              <a:t>			- venv</a:t>
-            </a:r>
-          </a:p>
-          <a:p>
-            <a:pPr marL="0" indent="0">
-              <a:buNone/>
-            </a:pPr>
-            <a:r>
-              <a:rPr lang="en-IN" dirty="0"/>
-              <a:t>			- __init__.py</a:t>
-            </a:r>
-          </a:p>
-          <a:p>
-            <a:pPr marL="0" indent="0">
-              <a:buNone/>
-            </a:pPr>
-            <a:r>
-              <a:rPr lang="en-IN" dirty="0"/>
-              <a:t>			- main.py</a:t>
-            </a:r>
-          </a:p>
-          <a:p>
-            <a:pPr marL="0" indent="0">
-              <a:buNone/>
-            </a:pPr>
-            <a:r>
-              <a:rPr lang="en-IN" dirty="0"/>
-              <a:t>	- license</a:t>
-            </a:r>
-          </a:p>
-          <a:p>
-            <a:pPr marL="0" indent="0">
-              <a:buNone/>
-            </a:pPr>
-            <a:r>
-              <a:rPr lang="en-IN" dirty="0"/>
-              <a:t>	- readme</a:t>
-            </a:r>
-          </a:p>
-          <a:p>
-            <a:pPr marL="0" indent="0">
-              <a:buNone/>
-            </a:pPr>
-            <a:r>
-              <a:rPr lang="en-IN" dirty="0"/>
-              <a:t>	- pyproject.toml</a:t>
-            </a:r>
-          </a:p>
-          <a:p>
-            <a:pPr marL="0" indent="0">
-              <a:buNone/>
-            </a:pPr>
-            <a:r>
-              <a:rPr lang="en-IN" dirty="0"/>
-              <a:t>	- .gitignore</a:t>
-            </a:r>
+              <a:rPr lang="en-IN" b="1" dirty="0"/>
+              <a:t>PYTHON BASIC CONCEPTS COMPLETED.</a:t>
+            </a:r>
+            <a:endParaRPr lang="en-IN" dirty="0"/>
           </a:p>
         </p:txBody>
       </p:sp>
@@ -11075,7 +11094,7 @@
           <p:cNvPr id="4" name="Footer Placeholder 3">
             <a:extLst>
               <a:ext uri="{FF2B5EF4-FFF2-40B4-BE49-F238E27FC236}">
-                <a16:creationId xmlns:a16="http://schemas.microsoft.com/office/drawing/2014/main" id="{8367D499-21CA-1608-F638-E9171FD79A35}"/>
+                <a16:creationId xmlns:a16="http://schemas.microsoft.com/office/drawing/2014/main" id="{4E75C686-45D5-51B5-CE9B-92CFD65EA4D6}"/>
               </a:ext>
             </a:extLst>
           </p:cNvPr>
@@ -11104,7 +11123,7 @@
           <p:cNvPr id="5" name="Slide Number Placeholder 4">
             <a:extLst>
               <a:ext uri="{FF2B5EF4-FFF2-40B4-BE49-F238E27FC236}">
-                <a16:creationId xmlns:a16="http://schemas.microsoft.com/office/drawing/2014/main" id="{2FE49377-ACB1-2199-795C-1989FA4FA786}"/>
+                <a16:creationId xmlns:a16="http://schemas.microsoft.com/office/drawing/2014/main" id="{4E967A4D-DE2A-311F-9BB5-EC319655B787}"/>
               </a:ext>
             </a:extLst>
           </p:cNvPr>
@@ -11131,7 +11150,7 @@
     </p:spTree>
     <p:extLst>
       <p:ext uri="{BB962C8B-B14F-4D97-AF65-F5344CB8AC3E}">
-        <p14:creationId xmlns:p14="http://schemas.microsoft.com/office/powerpoint/2010/main" val="1743211506"/>
+        <p14:creationId xmlns:p14="http://schemas.microsoft.com/office/powerpoint/2010/main" val="2943109998"/>
       </p:ext>
     </p:extLst>
   </p:cSld>
@@ -11163,7 +11182,7 @@
           <p:cNvPr id="2" name="Title 1">
             <a:extLst>
               <a:ext uri="{FF2B5EF4-FFF2-40B4-BE49-F238E27FC236}">
-                <a16:creationId xmlns:a16="http://schemas.microsoft.com/office/drawing/2014/main" id="{89A40D6B-3A8E-67A6-6A68-010B58DAC4FC}"/>
+                <a16:creationId xmlns:a16="http://schemas.microsoft.com/office/drawing/2014/main" id="{2CEA5BDF-9F05-F624-FCF1-39C85E1A3DE7}"/>
               </a:ext>
             </a:extLst>
           </p:cNvPr>
@@ -11180,9 +11199,10 @@
           <a:lstStyle/>
           <a:p>
             <a:r>
-              <a:rPr lang="en-IN" dirty="0"/>
-              <a:t>Problems</a:t>
-            </a:r>
+              <a:rPr lang="en-GB" dirty="0"/>
+              <a:t>Web Development</a:t>
+            </a:r>
+            <a:endParaRPr lang="en-IN" dirty="0"/>
           </a:p>
         </p:txBody>
       </p:sp>
@@ -11191,7 +11211,7 @@
           <p:cNvPr id="3" name="Content Placeholder 2">
             <a:extLst>
               <a:ext uri="{FF2B5EF4-FFF2-40B4-BE49-F238E27FC236}">
-                <a16:creationId xmlns:a16="http://schemas.microsoft.com/office/drawing/2014/main" id="{2EA13D08-34E8-FF65-D42D-B7D8201AF8B5}"/>
+                <a16:creationId xmlns:a16="http://schemas.microsoft.com/office/drawing/2014/main" id="{3F654F39-106A-8921-8452-34F301506A96}"/>
               </a:ext>
             </a:extLst>
           </p:cNvPr>
@@ -11209,58 +11229,80 @@
           <a:p>
             <a:r>
               <a:rPr lang="en-IN" dirty="0"/>
-              <a:t> Valid Parentheses.</a:t>
-            </a:r>
-          </a:p>
-          <a:p>
-            <a:r>
-              <a:rPr lang="en-IN" dirty="0"/>
               <a:t> </a:t>
             </a:r>
             <a:r>
+              <a:rPr lang="en-IN" b="1" dirty="0"/>
+              <a:t>Package : </a:t>
+            </a:r>
+            <a:r>
+              <a:rPr lang="en-IN" dirty="0"/>
+              <a:t>nicegui</a:t>
+            </a:r>
+          </a:p>
+          <a:p>
+            <a:r>
+              <a:rPr lang="en-IN" dirty="0"/>
+              <a:t> </a:t>
+            </a:r>
+            <a:r>
+              <a:rPr lang="en-IN" b="1" dirty="0"/>
+              <a:t>cmd : pip install  nicegui</a:t>
+            </a:r>
+          </a:p>
+          <a:p>
+            <a:r>
+              <a:rPr lang="en-IN" b="1" dirty="0"/>
+              <a:t> </a:t>
+            </a:r>
+            <a:r>
+              <a:rPr lang="en-GB" b="1" dirty="0"/>
+              <a:t>Concepts :</a:t>
+            </a:r>
+          </a:p>
+          <a:p>
+            <a:pPr lvl="1"/>
+            <a:r>
+              <a:rPr lang="en-IN" dirty="0"/>
+              <a:t> Start connection</a:t>
+            </a:r>
+          </a:p>
+          <a:p>
+            <a:pPr lvl="1"/>
+            <a:r>
+              <a:rPr lang="en-IN" dirty="0"/>
+              <a:t> UI components</a:t>
+            </a:r>
+          </a:p>
+          <a:p>
+            <a:pPr lvl="1"/>
+            <a:r>
+              <a:rPr lang="en-IN" dirty="0"/>
+              <a:t> </a:t>
+            </a:r>
+            <a:r>
               <a:rPr lang="en-GB" dirty="0"/>
-              <a:t>Reverse Vowels of a String.</a:t>
-            </a:r>
-          </a:p>
-          <a:p>
-            <a:r>
-              <a:rPr lang="en-IN" dirty="0"/>
-              <a:t> Keyboard Row.</a:t>
-            </a:r>
-          </a:p>
-          <a:p>
-            <a:r>
-              <a:rPr lang="en-IN" dirty="0"/>
-              <a:t> Form words in diagonal flow.</a:t>
-            </a:r>
-          </a:p>
-          <a:p>
-            <a:r>
-              <a:rPr lang="en-IN" dirty="0"/>
-              <a:t> Equal Score Substrings.</a:t>
-            </a:r>
-          </a:p>
-          <a:p>
-            <a:r>
-              <a:rPr lang="en-IN" dirty="0"/>
-              <a:t> Zigzag Conversion.</a:t>
-            </a:r>
-          </a:p>
-          <a:p>
-            <a:endParaRPr lang="en-IN" dirty="0"/>
-          </a:p>
-          <a:p>
-            <a:endParaRPr lang="en-IN" dirty="0"/>
-          </a:p>
-          <a:p>
-            <a:pPr marL="0" indent="0" algn="ctr">
-              <a:buNone/>
-            </a:pPr>
+              <a:t>Custom widget creation</a:t>
+            </a:r>
+            <a:endParaRPr lang="en-IN" dirty="0"/>
+          </a:p>
+          <a:p>
+            <a:pPr lvl="1"/>
+            <a:r>
+              <a:rPr lang="en-IN" dirty="0"/>
+              <a:t> UI on-command operations</a:t>
+            </a:r>
+          </a:p>
+          <a:p>
+            <a:pPr lvl="1"/>
             <a:r>
               <a:rPr lang="en-IN" b="1" dirty="0"/>
-              <a:t>PYTHON BASIC CONCEPTS COMPLETED.</a:t>
-            </a:r>
-            <a:endParaRPr lang="en-IN" dirty="0"/>
+              <a:t> </a:t>
+            </a:r>
+            <a:r>
+              <a:rPr lang="en-IN" dirty="0"/>
+              <a:t>back-end connections &amp; operations</a:t>
+            </a:r>
           </a:p>
         </p:txBody>
       </p:sp>
@@ -11269,7 +11311,7 @@
           <p:cNvPr id="4" name="Footer Placeholder 3">
             <a:extLst>
               <a:ext uri="{FF2B5EF4-FFF2-40B4-BE49-F238E27FC236}">
-                <a16:creationId xmlns:a16="http://schemas.microsoft.com/office/drawing/2014/main" id="{4E75C686-45D5-51B5-CE9B-92CFD65EA4D6}"/>
+                <a16:creationId xmlns:a16="http://schemas.microsoft.com/office/drawing/2014/main" id="{B6211910-FFBC-E796-7537-DC267EB214BD}"/>
               </a:ext>
             </a:extLst>
           </p:cNvPr>
@@ -11298,7 +11340,7 @@
           <p:cNvPr id="5" name="Slide Number Placeholder 4">
             <a:extLst>
               <a:ext uri="{FF2B5EF4-FFF2-40B4-BE49-F238E27FC236}">
-                <a16:creationId xmlns:a16="http://schemas.microsoft.com/office/drawing/2014/main" id="{4E967A4D-DE2A-311F-9BB5-EC319655B787}"/>
+                <a16:creationId xmlns:a16="http://schemas.microsoft.com/office/drawing/2014/main" id="{634CE741-738C-5294-3111-4971DF04E698}"/>
               </a:ext>
             </a:extLst>
           </p:cNvPr>
@@ -11325,855 +11367,7 @@
     </p:spTree>
     <p:extLst>
       <p:ext uri="{BB962C8B-B14F-4D97-AF65-F5344CB8AC3E}">
-        <p14:creationId xmlns:p14="http://schemas.microsoft.com/office/powerpoint/2010/main" val="2943109998"/>
-      </p:ext>
-    </p:extLst>
-  </p:cSld>
-  <p:clrMapOvr>
-    <a:masterClrMapping/>
-  </p:clrMapOvr>
-</p:sld>
-</file>
-
-<file path=ppt/slides/slide36.xml><?xml version="1.0" encoding="utf-8"?>
-<p:sld xmlns:a="http://schemas.openxmlformats.org/drawingml/2006/main" xmlns:r="http://schemas.openxmlformats.org/officeDocument/2006/relationships" xmlns:p="http://schemas.openxmlformats.org/presentationml/2006/main">
-  <p:cSld>
-    <p:spTree>
-      <p:nvGrpSpPr>
-        <p:cNvPr id="1" name=""/>
-        <p:cNvGrpSpPr/>
-        <p:nvPr/>
-      </p:nvGrpSpPr>
-      <p:grpSpPr>
-        <a:xfrm>
-          <a:off x="0" y="0"/>
-          <a:ext cx="0" cy="0"/>
-          <a:chOff x="0" y="0"/>
-          <a:chExt cx="0" cy="0"/>
-        </a:xfrm>
-      </p:grpSpPr>
-      <p:sp>
-        <p:nvSpPr>
-          <p:cNvPr id="2" name="Title 1">
-            <a:extLst>
-              <a:ext uri="{FF2B5EF4-FFF2-40B4-BE49-F238E27FC236}">
-                <a16:creationId xmlns:a16="http://schemas.microsoft.com/office/drawing/2014/main" id="{F0317199-3FE4-4011-E431-B733E11096CA}"/>
-              </a:ext>
-            </a:extLst>
-          </p:cNvPr>
-          <p:cNvSpPr>
-            <a:spLocks noGrp="1"/>
-          </p:cNvSpPr>
-          <p:nvPr>
-            <p:ph type="title"/>
-          </p:nvPr>
-        </p:nvSpPr>
-        <p:spPr/>
-        <p:txBody>
-          <a:bodyPr/>
-          <a:lstStyle/>
-          <a:p>
-            <a:r>
-              <a:rPr lang="en-GB" dirty="0"/>
-              <a:t>PDF</a:t>
-            </a:r>
-            <a:endParaRPr lang="en-IN" dirty="0"/>
-          </a:p>
-        </p:txBody>
-      </p:sp>
-      <p:sp>
-        <p:nvSpPr>
-          <p:cNvPr id="3" name="Content Placeholder 2">
-            <a:extLst>
-              <a:ext uri="{FF2B5EF4-FFF2-40B4-BE49-F238E27FC236}">
-                <a16:creationId xmlns:a16="http://schemas.microsoft.com/office/drawing/2014/main" id="{3417A133-ACB9-E81D-EC4A-0A5A4CF5DEE0}"/>
-              </a:ext>
-            </a:extLst>
-          </p:cNvPr>
-          <p:cNvSpPr>
-            <a:spLocks noGrp="1"/>
-          </p:cNvSpPr>
-          <p:nvPr>
-            <p:ph idx="1"/>
-          </p:nvPr>
-        </p:nvSpPr>
-        <p:spPr/>
-        <p:txBody>
-          <a:bodyPr/>
-          <a:lstStyle/>
-          <a:p>
-            <a:r>
-              <a:rPr lang="en-IN" dirty="0"/>
-              <a:t> </a:t>
-            </a:r>
-            <a:r>
-              <a:rPr lang="en-IN" b="1" dirty="0"/>
-              <a:t>Packages : </a:t>
-            </a:r>
-          </a:p>
-          <a:p>
-            <a:pPr lvl="1"/>
-            <a:r>
-              <a:rPr lang="en-IN" dirty="0"/>
-              <a:t> fpdf2 (Creating PDF’s).</a:t>
-            </a:r>
-          </a:p>
-          <a:p>
-            <a:pPr lvl="1"/>
-            <a:r>
-              <a:rPr lang="en-IN" dirty="0"/>
-              <a:t> borb (Advanced module for Creating &amp; Reading PDF’s).</a:t>
-            </a:r>
-          </a:p>
-          <a:p>
-            <a:r>
-              <a:rPr lang="en-IN" dirty="0"/>
-              <a:t> </a:t>
-            </a:r>
-            <a:r>
-              <a:rPr lang="en-IN" b="1" dirty="0"/>
-              <a:t>Functions : </a:t>
-            </a:r>
-          </a:p>
-          <a:p>
-            <a:pPr lvl="1"/>
-            <a:r>
-              <a:rPr lang="en-IN" dirty="0"/>
-              <a:t> Creating PDF ,  Adding Pages , Font Styles , Table Creation , Image Import , etc.,.</a:t>
-            </a:r>
-          </a:p>
-          <a:p>
-            <a:pPr lvl="1"/>
-            <a:r>
-              <a:rPr lang="en-IN" dirty="0"/>
-              <a:t> PDF’s with Input Features.</a:t>
-            </a:r>
-          </a:p>
-          <a:p>
-            <a:endParaRPr lang="en-IN" dirty="0"/>
-          </a:p>
-        </p:txBody>
-      </p:sp>
-      <p:sp>
-        <p:nvSpPr>
-          <p:cNvPr id="4" name="Footer Placeholder 3">
-            <a:extLst>
-              <a:ext uri="{FF2B5EF4-FFF2-40B4-BE49-F238E27FC236}">
-                <a16:creationId xmlns:a16="http://schemas.microsoft.com/office/drawing/2014/main" id="{06D2FE4E-A7CE-4D3B-42B3-8DD37D027516}"/>
-              </a:ext>
-            </a:extLst>
-          </p:cNvPr>
-          <p:cNvSpPr>
-            <a:spLocks noGrp="1"/>
-          </p:cNvSpPr>
-          <p:nvPr>
-            <p:ph type="ftr" sz="quarter" idx="11"/>
-          </p:nvPr>
-        </p:nvSpPr>
-        <p:spPr/>
-        <p:txBody>
-          <a:bodyPr/>
-          <a:lstStyle/>
-          <a:p>
-            <a:r>
-              <a:rPr lang="it-IT"/>
-              <a:t>Agnie Consulting India Pvt Limited</a:t>
-            </a:r>
-            <a:endParaRPr lang="en-IN" dirty="0"/>
-          </a:p>
-        </p:txBody>
-      </p:sp>
-      <p:sp>
-        <p:nvSpPr>
-          <p:cNvPr id="5" name="Slide Number Placeholder 4">
-            <a:extLst>
-              <a:ext uri="{FF2B5EF4-FFF2-40B4-BE49-F238E27FC236}">
-                <a16:creationId xmlns:a16="http://schemas.microsoft.com/office/drawing/2014/main" id="{CF0277D4-6825-FE55-E325-241E05EE90B4}"/>
-              </a:ext>
-            </a:extLst>
-          </p:cNvPr>
-          <p:cNvSpPr>
-            <a:spLocks noGrp="1"/>
-          </p:cNvSpPr>
-          <p:nvPr>
-            <p:ph type="sldNum" sz="quarter" idx="12"/>
-          </p:nvPr>
-        </p:nvSpPr>
-        <p:spPr/>
-        <p:txBody>
-          <a:bodyPr/>
-          <a:lstStyle/>
-          <a:p>
-            <a:fld id="{F904C42B-FE65-422C-989C-AD3E5E2A1A20}" type="slidenum">
-              <a:rPr lang="en-IN" smtClean="0"/>
-              <a:t>36</a:t>
-            </a:fld>
-            <a:endParaRPr lang="en-IN" dirty="0"/>
-          </a:p>
-        </p:txBody>
-      </p:sp>
-    </p:spTree>
-    <p:extLst>
-      <p:ext uri="{BB962C8B-B14F-4D97-AF65-F5344CB8AC3E}">
-        <p14:creationId xmlns:p14="http://schemas.microsoft.com/office/powerpoint/2010/main" val="1572536975"/>
-      </p:ext>
-    </p:extLst>
-  </p:cSld>
-  <p:clrMapOvr>
-    <a:masterClrMapping/>
-  </p:clrMapOvr>
-</p:sld>
-</file>
-
-<file path=ppt/slides/slide37.xml><?xml version="1.0" encoding="utf-8"?>
-<p:sld xmlns:a="http://schemas.openxmlformats.org/drawingml/2006/main" xmlns:r="http://schemas.openxmlformats.org/officeDocument/2006/relationships" xmlns:p="http://schemas.openxmlformats.org/presentationml/2006/main">
-  <p:cSld>
-    <p:spTree>
-      <p:nvGrpSpPr>
-        <p:cNvPr id="1" name=""/>
-        <p:cNvGrpSpPr/>
-        <p:nvPr/>
-      </p:nvGrpSpPr>
-      <p:grpSpPr>
-        <a:xfrm>
-          <a:off x="0" y="0"/>
-          <a:ext cx="0" cy="0"/>
-          <a:chOff x="0" y="0"/>
-          <a:chExt cx="0" cy="0"/>
-        </a:xfrm>
-      </p:grpSpPr>
-      <p:sp>
-        <p:nvSpPr>
-          <p:cNvPr id="2" name="Title 1">
-            <a:extLst>
-              <a:ext uri="{FF2B5EF4-FFF2-40B4-BE49-F238E27FC236}">
-                <a16:creationId xmlns:a16="http://schemas.microsoft.com/office/drawing/2014/main" id="{2CEA5BDF-9F05-F624-FCF1-39C85E1A3DE7}"/>
-              </a:ext>
-            </a:extLst>
-          </p:cNvPr>
-          <p:cNvSpPr>
-            <a:spLocks noGrp="1"/>
-          </p:cNvSpPr>
-          <p:nvPr>
-            <p:ph type="title"/>
-          </p:nvPr>
-        </p:nvSpPr>
-        <p:spPr/>
-        <p:txBody>
-          <a:bodyPr/>
-          <a:lstStyle/>
-          <a:p>
-            <a:r>
-              <a:rPr lang="en-GB" dirty="0"/>
-              <a:t>Web Development</a:t>
-            </a:r>
-            <a:endParaRPr lang="en-IN" dirty="0"/>
-          </a:p>
-        </p:txBody>
-      </p:sp>
-      <p:sp>
-        <p:nvSpPr>
-          <p:cNvPr id="3" name="Content Placeholder 2">
-            <a:extLst>
-              <a:ext uri="{FF2B5EF4-FFF2-40B4-BE49-F238E27FC236}">
-                <a16:creationId xmlns:a16="http://schemas.microsoft.com/office/drawing/2014/main" id="{3F654F39-106A-8921-8452-34F301506A96}"/>
-              </a:ext>
-            </a:extLst>
-          </p:cNvPr>
-          <p:cNvSpPr>
-            <a:spLocks noGrp="1"/>
-          </p:cNvSpPr>
-          <p:nvPr>
-            <p:ph idx="1"/>
-          </p:nvPr>
-        </p:nvSpPr>
-        <p:spPr/>
-        <p:txBody>
-          <a:bodyPr/>
-          <a:lstStyle/>
-          <a:p>
-            <a:r>
-              <a:rPr lang="en-IN" dirty="0"/>
-              <a:t> </a:t>
-            </a:r>
-            <a:r>
-              <a:rPr lang="en-IN" b="1" dirty="0"/>
-              <a:t>Package : </a:t>
-            </a:r>
-            <a:r>
-              <a:rPr lang="en-IN" dirty="0"/>
-              <a:t>nicegui</a:t>
-            </a:r>
-          </a:p>
-          <a:p>
-            <a:r>
-              <a:rPr lang="en-IN" dirty="0"/>
-              <a:t> </a:t>
-            </a:r>
-            <a:r>
-              <a:rPr lang="en-IN" b="1" dirty="0"/>
-              <a:t>cmd : pip install  nicegui</a:t>
-            </a:r>
-          </a:p>
-          <a:p>
-            <a:r>
-              <a:rPr lang="en-IN" b="1" dirty="0"/>
-              <a:t> </a:t>
-            </a:r>
-            <a:r>
-              <a:rPr lang="en-GB" b="1" dirty="0"/>
-              <a:t>Concepts :</a:t>
-            </a:r>
-          </a:p>
-          <a:p>
-            <a:pPr lvl="1"/>
-            <a:r>
-              <a:rPr lang="en-IN" dirty="0"/>
-              <a:t> Start connection</a:t>
-            </a:r>
-          </a:p>
-          <a:p>
-            <a:pPr lvl="1"/>
-            <a:r>
-              <a:rPr lang="en-IN" dirty="0"/>
-              <a:t> UI components</a:t>
-            </a:r>
-          </a:p>
-          <a:p>
-            <a:pPr lvl="1"/>
-            <a:r>
-              <a:rPr lang="en-IN" dirty="0"/>
-              <a:t> </a:t>
-            </a:r>
-            <a:r>
-              <a:rPr lang="en-GB" dirty="0"/>
-              <a:t>Custom widget creation</a:t>
-            </a:r>
-            <a:endParaRPr lang="en-IN" dirty="0"/>
-          </a:p>
-          <a:p>
-            <a:pPr lvl="1"/>
-            <a:r>
-              <a:rPr lang="en-IN" dirty="0"/>
-              <a:t> UI on-command operations</a:t>
-            </a:r>
-          </a:p>
-          <a:p>
-            <a:pPr lvl="1"/>
-            <a:r>
-              <a:rPr lang="en-IN" b="1" dirty="0"/>
-              <a:t> </a:t>
-            </a:r>
-            <a:r>
-              <a:rPr lang="en-IN" dirty="0"/>
-              <a:t>back-end connections &amp; operations</a:t>
-            </a:r>
-          </a:p>
-        </p:txBody>
-      </p:sp>
-      <p:sp>
-        <p:nvSpPr>
-          <p:cNvPr id="4" name="Footer Placeholder 3">
-            <a:extLst>
-              <a:ext uri="{FF2B5EF4-FFF2-40B4-BE49-F238E27FC236}">
-                <a16:creationId xmlns:a16="http://schemas.microsoft.com/office/drawing/2014/main" id="{B6211910-FFBC-E796-7537-DC267EB214BD}"/>
-              </a:ext>
-            </a:extLst>
-          </p:cNvPr>
-          <p:cNvSpPr>
-            <a:spLocks noGrp="1"/>
-          </p:cNvSpPr>
-          <p:nvPr>
-            <p:ph type="ftr" sz="quarter" idx="11"/>
-          </p:nvPr>
-        </p:nvSpPr>
-        <p:spPr/>
-        <p:txBody>
-          <a:bodyPr/>
-          <a:lstStyle/>
-          <a:p>
-            <a:r>
-              <a:rPr lang="it-IT"/>
-              <a:t>Agnie Consulting India Pvt Limited</a:t>
-            </a:r>
-            <a:endParaRPr lang="en-IN" dirty="0"/>
-          </a:p>
-        </p:txBody>
-      </p:sp>
-      <p:sp>
-        <p:nvSpPr>
-          <p:cNvPr id="5" name="Slide Number Placeholder 4">
-            <a:extLst>
-              <a:ext uri="{FF2B5EF4-FFF2-40B4-BE49-F238E27FC236}">
-                <a16:creationId xmlns:a16="http://schemas.microsoft.com/office/drawing/2014/main" id="{634CE741-738C-5294-3111-4971DF04E698}"/>
-              </a:ext>
-            </a:extLst>
-          </p:cNvPr>
-          <p:cNvSpPr>
-            <a:spLocks noGrp="1"/>
-          </p:cNvSpPr>
-          <p:nvPr>
-            <p:ph type="sldNum" sz="quarter" idx="12"/>
-          </p:nvPr>
-        </p:nvSpPr>
-        <p:spPr/>
-        <p:txBody>
-          <a:bodyPr/>
-          <a:lstStyle/>
-          <a:p>
-            <a:fld id="{F904C42B-FE65-422C-989C-AD3E5E2A1A20}" type="slidenum">
-              <a:rPr lang="en-IN" smtClean="0"/>
-              <a:t>37</a:t>
-            </a:fld>
-            <a:endParaRPr lang="en-IN" dirty="0"/>
-          </a:p>
-        </p:txBody>
-      </p:sp>
-    </p:spTree>
-    <p:extLst>
-      <p:ext uri="{BB962C8B-B14F-4D97-AF65-F5344CB8AC3E}">
         <p14:creationId xmlns:p14="http://schemas.microsoft.com/office/powerpoint/2010/main" val="35491570"/>
-      </p:ext>
-    </p:extLst>
-  </p:cSld>
-  <p:clrMapOvr>
-    <a:masterClrMapping/>
-  </p:clrMapOvr>
-</p:sld>
-</file>
-
-<file path=ppt/slides/slide38.xml><?xml version="1.0" encoding="utf-8"?>
-<p:sld xmlns:a="http://schemas.openxmlformats.org/drawingml/2006/main" xmlns:r="http://schemas.openxmlformats.org/officeDocument/2006/relationships" xmlns:p="http://schemas.openxmlformats.org/presentationml/2006/main">
-  <p:cSld>
-    <p:spTree>
-      <p:nvGrpSpPr>
-        <p:cNvPr id="1" name=""/>
-        <p:cNvGrpSpPr/>
-        <p:nvPr/>
-      </p:nvGrpSpPr>
-      <p:grpSpPr>
-        <a:xfrm>
-          <a:off x="0" y="0"/>
-          <a:ext cx="0" cy="0"/>
-          <a:chOff x="0" y="0"/>
-          <a:chExt cx="0" cy="0"/>
-        </a:xfrm>
-      </p:grpSpPr>
-      <p:sp>
-        <p:nvSpPr>
-          <p:cNvPr id="2" name="Title 1">
-            <a:extLst>
-              <a:ext uri="{FF2B5EF4-FFF2-40B4-BE49-F238E27FC236}">
-                <a16:creationId xmlns:a16="http://schemas.microsoft.com/office/drawing/2014/main" id="{0FAC2044-7BC7-BE81-4358-3C5D49931A58}"/>
-              </a:ext>
-            </a:extLst>
-          </p:cNvPr>
-          <p:cNvSpPr>
-            <a:spLocks noGrp="1"/>
-          </p:cNvSpPr>
-          <p:nvPr>
-            <p:ph type="title"/>
-          </p:nvPr>
-        </p:nvSpPr>
-        <p:spPr/>
-        <p:txBody>
-          <a:bodyPr/>
-          <a:lstStyle/>
-          <a:p>
-            <a:r>
-              <a:rPr lang="en-GB" dirty="0"/>
-              <a:t>Desktop-App Development</a:t>
-            </a:r>
-            <a:endParaRPr lang="en-IN" dirty="0"/>
-          </a:p>
-        </p:txBody>
-      </p:sp>
-      <p:sp>
-        <p:nvSpPr>
-          <p:cNvPr id="3" name="Content Placeholder 2">
-            <a:extLst>
-              <a:ext uri="{FF2B5EF4-FFF2-40B4-BE49-F238E27FC236}">
-                <a16:creationId xmlns:a16="http://schemas.microsoft.com/office/drawing/2014/main" id="{69841D62-3F38-AD65-B1BF-48BF3A14F8B7}"/>
-              </a:ext>
-            </a:extLst>
-          </p:cNvPr>
-          <p:cNvSpPr>
-            <a:spLocks noGrp="1"/>
-          </p:cNvSpPr>
-          <p:nvPr>
-            <p:ph idx="1"/>
-          </p:nvPr>
-        </p:nvSpPr>
-        <p:spPr/>
-        <p:txBody>
-          <a:bodyPr/>
-          <a:lstStyle/>
-          <a:p>
-            <a:r>
-              <a:rPr lang="en-GB" dirty="0"/>
-              <a:t> </a:t>
-            </a:r>
-            <a:r>
-              <a:rPr lang="en-GB" b="1" dirty="0"/>
-              <a:t>Package : </a:t>
-            </a:r>
-            <a:r>
-              <a:rPr lang="en-GB" dirty="0"/>
-              <a:t>customtkinter &amp; tkinter</a:t>
-            </a:r>
-          </a:p>
-          <a:p>
-            <a:r>
-              <a:rPr lang="en-GB" dirty="0"/>
-              <a:t> </a:t>
-            </a:r>
-            <a:r>
-              <a:rPr lang="en-GB" b="1" dirty="0"/>
-              <a:t>cmd : pip install customtkinter</a:t>
-            </a:r>
-          </a:p>
-          <a:p>
-            <a:r>
-              <a:rPr lang="en-GB" b="1" dirty="0"/>
-              <a:t> </a:t>
-            </a:r>
-            <a:r>
-              <a:rPr lang="en-GB" dirty="0"/>
-              <a:t>customtkinter is the modern UI version of tkinter</a:t>
-            </a:r>
-          </a:p>
-          <a:p>
-            <a:r>
-              <a:rPr lang="en-GB" dirty="0"/>
-              <a:t> </a:t>
-            </a:r>
-            <a:r>
-              <a:rPr lang="en-GB" b="1" dirty="0"/>
-              <a:t>Concepts : </a:t>
-            </a:r>
-          </a:p>
-          <a:p>
-            <a:pPr lvl="1"/>
-            <a:r>
-              <a:rPr lang="en-GB" b="1" dirty="0"/>
-              <a:t> </a:t>
-            </a:r>
-            <a:r>
-              <a:rPr lang="en-GB" dirty="0"/>
-              <a:t>runs the app</a:t>
-            </a:r>
-          </a:p>
-          <a:p>
-            <a:pPr lvl="1"/>
-            <a:r>
-              <a:rPr lang="en-GB" dirty="0"/>
-              <a:t> UI widgets</a:t>
-            </a:r>
-          </a:p>
-          <a:p>
-            <a:pPr lvl="1"/>
-            <a:r>
-              <a:rPr lang="en-GB" dirty="0"/>
-              <a:t> Custom widget creation</a:t>
-            </a:r>
-          </a:p>
-          <a:p>
-            <a:pPr lvl="1"/>
-            <a:r>
-              <a:rPr lang="en-GB" dirty="0"/>
-              <a:t> UI widgets on-command operations</a:t>
-            </a:r>
-          </a:p>
-          <a:p>
-            <a:pPr lvl="1"/>
-            <a:r>
-              <a:rPr lang="en-GB" dirty="0"/>
-              <a:t> back-end connections &amp; operations</a:t>
-            </a:r>
-            <a:endParaRPr lang="en-IN" dirty="0"/>
-          </a:p>
-        </p:txBody>
-      </p:sp>
-      <p:sp>
-        <p:nvSpPr>
-          <p:cNvPr id="4" name="Footer Placeholder 3">
-            <a:extLst>
-              <a:ext uri="{FF2B5EF4-FFF2-40B4-BE49-F238E27FC236}">
-                <a16:creationId xmlns:a16="http://schemas.microsoft.com/office/drawing/2014/main" id="{889662F6-22D2-D1A9-DF10-54B94C79C5D2}"/>
-              </a:ext>
-            </a:extLst>
-          </p:cNvPr>
-          <p:cNvSpPr>
-            <a:spLocks noGrp="1"/>
-          </p:cNvSpPr>
-          <p:nvPr>
-            <p:ph type="ftr" sz="quarter" idx="11"/>
-          </p:nvPr>
-        </p:nvSpPr>
-        <p:spPr/>
-        <p:txBody>
-          <a:bodyPr/>
-          <a:lstStyle/>
-          <a:p>
-            <a:r>
-              <a:rPr lang="it-IT"/>
-              <a:t>Agnie Consulting India Pvt Limited</a:t>
-            </a:r>
-            <a:endParaRPr lang="en-IN" dirty="0"/>
-          </a:p>
-        </p:txBody>
-      </p:sp>
-      <p:sp>
-        <p:nvSpPr>
-          <p:cNvPr id="5" name="Slide Number Placeholder 4">
-            <a:extLst>
-              <a:ext uri="{FF2B5EF4-FFF2-40B4-BE49-F238E27FC236}">
-                <a16:creationId xmlns:a16="http://schemas.microsoft.com/office/drawing/2014/main" id="{4FCBC552-3D1D-6F58-3410-DBE1BCE8AF7F}"/>
-              </a:ext>
-            </a:extLst>
-          </p:cNvPr>
-          <p:cNvSpPr>
-            <a:spLocks noGrp="1"/>
-          </p:cNvSpPr>
-          <p:nvPr>
-            <p:ph type="sldNum" sz="quarter" idx="12"/>
-          </p:nvPr>
-        </p:nvSpPr>
-        <p:spPr/>
-        <p:txBody>
-          <a:bodyPr/>
-          <a:lstStyle/>
-          <a:p>
-            <a:fld id="{F904C42B-FE65-422C-989C-AD3E5E2A1A20}" type="slidenum">
-              <a:rPr lang="en-IN" smtClean="0"/>
-              <a:t>38</a:t>
-            </a:fld>
-            <a:endParaRPr lang="en-IN" dirty="0"/>
-          </a:p>
-        </p:txBody>
-      </p:sp>
-    </p:spTree>
-    <p:extLst>
-      <p:ext uri="{BB962C8B-B14F-4D97-AF65-F5344CB8AC3E}">
-        <p14:creationId xmlns:p14="http://schemas.microsoft.com/office/powerpoint/2010/main" val="3562287446"/>
-      </p:ext>
-    </p:extLst>
-  </p:cSld>
-  <p:clrMapOvr>
-    <a:masterClrMapping/>
-  </p:clrMapOvr>
-</p:sld>
-</file>
-
-<file path=ppt/slides/slide39.xml><?xml version="1.0" encoding="utf-8"?>
-<p:sld xmlns:a="http://schemas.openxmlformats.org/drawingml/2006/main" xmlns:r="http://schemas.openxmlformats.org/officeDocument/2006/relationships" xmlns:p="http://schemas.openxmlformats.org/presentationml/2006/main">
-  <p:cSld>
-    <p:spTree>
-      <p:nvGrpSpPr>
-        <p:cNvPr id="1" name=""/>
-        <p:cNvGrpSpPr/>
-        <p:nvPr/>
-      </p:nvGrpSpPr>
-      <p:grpSpPr>
-        <a:xfrm>
-          <a:off x="0" y="0"/>
-          <a:ext cx="0" cy="0"/>
-          <a:chOff x="0" y="0"/>
-          <a:chExt cx="0" cy="0"/>
-        </a:xfrm>
-      </p:grpSpPr>
-      <p:sp>
-        <p:nvSpPr>
-          <p:cNvPr id="2" name="Title 1">
-            <a:extLst>
-              <a:ext uri="{FF2B5EF4-FFF2-40B4-BE49-F238E27FC236}">
-                <a16:creationId xmlns:a16="http://schemas.microsoft.com/office/drawing/2014/main" id="{76B7B38D-DCBD-9C6B-CD51-7A408A67FAD1}"/>
-              </a:ext>
-            </a:extLst>
-          </p:cNvPr>
-          <p:cNvSpPr>
-            <a:spLocks noGrp="1"/>
-          </p:cNvSpPr>
-          <p:nvPr>
-            <p:ph type="title"/>
-          </p:nvPr>
-        </p:nvSpPr>
-        <p:spPr/>
-        <p:txBody>
-          <a:bodyPr/>
-          <a:lstStyle/>
-          <a:p>
-            <a:r>
-              <a:rPr lang="en-GB" dirty="0"/>
-              <a:t>Mobile-App Development</a:t>
-            </a:r>
-            <a:endParaRPr lang="en-IN" dirty="0"/>
-          </a:p>
-        </p:txBody>
-      </p:sp>
-      <p:sp>
-        <p:nvSpPr>
-          <p:cNvPr id="3" name="Content Placeholder 2">
-            <a:extLst>
-              <a:ext uri="{FF2B5EF4-FFF2-40B4-BE49-F238E27FC236}">
-                <a16:creationId xmlns:a16="http://schemas.microsoft.com/office/drawing/2014/main" id="{55BFC815-5867-C2BB-884C-F3691F93B019}"/>
-              </a:ext>
-            </a:extLst>
-          </p:cNvPr>
-          <p:cNvSpPr>
-            <a:spLocks noGrp="1"/>
-          </p:cNvSpPr>
-          <p:nvPr>
-            <p:ph idx="1"/>
-          </p:nvPr>
-        </p:nvSpPr>
-        <p:spPr/>
-        <p:txBody>
-          <a:bodyPr/>
-          <a:lstStyle/>
-          <a:p>
-            <a:r>
-              <a:rPr lang="en-GB" dirty="0"/>
-              <a:t> </a:t>
-            </a:r>
-            <a:r>
-              <a:rPr lang="en-GB" b="1" dirty="0"/>
-              <a:t>Packages : </a:t>
-            </a:r>
-            <a:r>
-              <a:rPr lang="en-GB" dirty="0"/>
-              <a:t>kivy &amp; kivymd</a:t>
-            </a:r>
-          </a:p>
-          <a:p>
-            <a:r>
-              <a:rPr lang="en-GB" b="1" dirty="0"/>
-              <a:t> cmd : pip install kivy kivymd</a:t>
-            </a:r>
-          </a:p>
-          <a:p>
-            <a:r>
-              <a:rPr lang="en-GB" b="1" dirty="0"/>
-              <a:t> </a:t>
-            </a:r>
-            <a:r>
-              <a:rPr lang="en-GB" dirty="0"/>
-              <a:t>kivymd is the modern UI version of kivy.</a:t>
-            </a:r>
-          </a:p>
-          <a:p>
-            <a:r>
-              <a:rPr lang="en-GB" b="1" dirty="0"/>
-              <a:t> Concepts : </a:t>
-            </a:r>
-          </a:p>
-          <a:p>
-            <a:pPr lvl="1"/>
-            <a:r>
-              <a:rPr lang="en-GB" b="1" dirty="0"/>
-              <a:t> </a:t>
-            </a:r>
-            <a:r>
-              <a:rPr lang="en-GB" dirty="0"/>
-              <a:t>runs the app</a:t>
-            </a:r>
-          </a:p>
-          <a:p>
-            <a:pPr lvl="1"/>
-            <a:r>
-              <a:rPr lang="en-GB" dirty="0"/>
-              <a:t> UI widgets</a:t>
-            </a:r>
-          </a:p>
-          <a:p>
-            <a:pPr lvl="1"/>
-            <a:r>
-              <a:rPr lang="en-GB" dirty="0"/>
-              <a:t> Custom widget creation</a:t>
-            </a:r>
-          </a:p>
-          <a:p>
-            <a:pPr lvl="1"/>
-            <a:r>
-              <a:rPr lang="en-GB" dirty="0"/>
-              <a:t> UI widgets on-command operations</a:t>
-            </a:r>
-          </a:p>
-          <a:p>
-            <a:pPr lvl="1"/>
-            <a:r>
-              <a:rPr lang="en-GB" dirty="0"/>
-              <a:t> back-end connections &amp; operations</a:t>
-            </a:r>
-            <a:endParaRPr lang="en-IN" dirty="0"/>
-          </a:p>
-          <a:p>
-            <a:endParaRPr lang="en-IN" dirty="0"/>
-          </a:p>
-        </p:txBody>
-      </p:sp>
-      <p:sp>
-        <p:nvSpPr>
-          <p:cNvPr id="4" name="Footer Placeholder 3">
-            <a:extLst>
-              <a:ext uri="{FF2B5EF4-FFF2-40B4-BE49-F238E27FC236}">
-                <a16:creationId xmlns:a16="http://schemas.microsoft.com/office/drawing/2014/main" id="{747B2B24-B4CD-D9F0-D1F0-C426E572C6F6}"/>
-              </a:ext>
-            </a:extLst>
-          </p:cNvPr>
-          <p:cNvSpPr>
-            <a:spLocks noGrp="1"/>
-          </p:cNvSpPr>
-          <p:nvPr>
-            <p:ph type="ftr" sz="quarter" idx="11"/>
-          </p:nvPr>
-        </p:nvSpPr>
-        <p:spPr/>
-        <p:txBody>
-          <a:bodyPr/>
-          <a:lstStyle/>
-          <a:p>
-            <a:r>
-              <a:rPr lang="it-IT"/>
-              <a:t>Agnie Consulting India Pvt Limited</a:t>
-            </a:r>
-            <a:endParaRPr lang="en-IN" dirty="0"/>
-          </a:p>
-        </p:txBody>
-      </p:sp>
-      <p:sp>
-        <p:nvSpPr>
-          <p:cNvPr id="5" name="Slide Number Placeholder 4">
-            <a:extLst>
-              <a:ext uri="{FF2B5EF4-FFF2-40B4-BE49-F238E27FC236}">
-                <a16:creationId xmlns:a16="http://schemas.microsoft.com/office/drawing/2014/main" id="{8EC70CEB-FD02-B13C-90CC-1F1AACC0FCAC}"/>
-              </a:ext>
-            </a:extLst>
-          </p:cNvPr>
-          <p:cNvSpPr>
-            <a:spLocks noGrp="1"/>
-          </p:cNvSpPr>
-          <p:nvPr>
-            <p:ph type="sldNum" sz="quarter" idx="12"/>
-          </p:nvPr>
-        </p:nvSpPr>
-        <p:spPr/>
-        <p:txBody>
-          <a:bodyPr/>
-          <a:lstStyle/>
-          <a:p>
-            <a:fld id="{F904C42B-FE65-422C-989C-AD3E5E2A1A20}" type="slidenum">
-              <a:rPr lang="en-IN" smtClean="0"/>
-              <a:t>39</a:t>
-            </a:fld>
-            <a:endParaRPr lang="en-IN" dirty="0"/>
-          </a:p>
-        </p:txBody>
-      </p:sp>
-    </p:spTree>
-    <p:extLst>
-      <p:ext uri="{BB962C8B-B14F-4D97-AF65-F5344CB8AC3E}">
-        <p14:creationId xmlns:p14="http://schemas.microsoft.com/office/powerpoint/2010/main" val="340499084"/>
       </p:ext>
     </p:extLst>
   </p:cSld>

--- a/python class/Python Class.pptx
+++ b/python class/Python Class.pptx
@@ -5,7 +5,7 @@
     <p:sldMasterId id="2147483660" r:id="rId1"/>
   </p:sldMasterIdLst>
   <p:notesMasterIdLst>
-    <p:notesMasterId r:id="rId37"/>
+    <p:notesMasterId r:id="rId35"/>
   </p:notesMasterIdLst>
   <p:sldIdLst>
     <p:sldId id="256" r:id="rId2"/>
@@ -39,10 +39,8 @@
     <p:sldId id="283" r:id="rId30"/>
     <p:sldId id="288" r:id="rId31"/>
     <p:sldId id="275" r:id="rId32"/>
-    <p:sldId id="280" r:id="rId33"/>
-    <p:sldId id="290" r:id="rId34"/>
-    <p:sldId id="293" r:id="rId35"/>
-    <p:sldId id="279" r:id="rId36"/>
+    <p:sldId id="293" r:id="rId33"/>
+    <p:sldId id="279" r:id="rId34"/>
   </p:sldIdLst>
   <p:sldSz cx="12192000" cy="6858000"/>
   <p:notesSz cx="7104063" cy="10234613"/>
@@ -10548,7 +10546,7 @@
           <p:cNvPr id="2" name="Title 1">
             <a:extLst>
               <a:ext uri="{FF2B5EF4-FFF2-40B4-BE49-F238E27FC236}">
-                <a16:creationId xmlns:a16="http://schemas.microsoft.com/office/drawing/2014/main" id="{05537F52-D920-165C-539D-D4323D2D50DF}"/>
+                <a16:creationId xmlns:a16="http://schemas.microsoft.com/office/drawing/2014/main" id="{89A40D6B-3A8E-67A6-6A68-010B58DAC4FC}"/>
               </a:ext>
             </a:extLst>
           </p:cNvPr>
@@ -10565,87 +10563,105 @@
           <a:lstStyle/>
           <a:p>
             <a:r>
+              <a:rPr lang="en-IN" dirty="0"/>
+              <a:t>Problems</a:t>
+            </a:r>
+          </a:p>
+        </p:txBody>
+      </p:sp>
+      <p:sp>
+        <p:nvSpPr>
+          <p:cNvPr id="3" name="Content Placeholder 2">
+            <a:extLst>
+              <a:ext uri="{FF2B5EF4-FFF2-40B4-BE49-F238E27FC236}">
+                <a16:creationId xmlns:a16="http://schemas.microsoft.com/office/drawing/2014/main" id="{2EA13D08-34E8-FF65-D42D-B7D8201AF8B5}"/>
+              </a:ext>
+            </a:extLst>
+          </p:cNvPr>
+          <p:cNvSpPr>
+            <a:spLocks noGrp="1"/>
+          </p:cNvSpPr>
+          <p:nvPr>
+            <p:ph idx="1"/>
+          </p:nvPr>
+        </p:nvSpPr>
+        <p:spPr/>
+        <p:txBody>
+          <a:bodyPr/>
+          <a:lstStyle/>
+          <a:p>
+            <a:r>
+              <a:rPr lang="en-IN" dirty="0"/>
+              <a:t> Valid Parentheses.</a:t>
+            </a:r>
+          </a:p>
+          <a:p>
+            <a:r>
+              <a:rPr lang="en-IN" dirty="0"/>
+              <a:t> </a:t>
+            </a:r>
+            <a:r>
               <a:rPr lang="en-GB" dirty="0"/>
-              <a:t>Custom Packages</a:t>
-            </a:r>
-            <a:endParaRPr lang="en-IN" dirty="0"/>
-          </a:p>
-        </p:txBody>
-      </p:sp>
-      <p:sp>
-        <p:nvSpPr>
-          <p:cNvPr id="3" name="Content Placeholder 2">
-            <a:extLst>
-              <a:ext uri="{FF2B5EF4-FFF2-40B4-BE49-F238E27FC236}">
-                <a16:creationId xmlns:a16="http://schemas.microsoft.com/office/drawing/2014/main" id="{0AAE2362-0572-BFD5-F478-A0EF74AB9E1A}"/>
-              </a:ext>
-            </a:extLst>
-          </p:cNvPr>
-          <p:cNvSpPr>
-            <a:spLocks noGrp="1"/>
-          </p:cNvSpPr>
-          <p:nvPr>
-            <p:ph idx="1"/>
-          </p:nvPr>
-        </p:nvSpPr>
-        <p:spPr/>
-        <p:txBody>
-          <a:bodyPr/>
-          <a:lstStyle/>
-          <a:p>
-            <a:r>
-              <a:rPr lang="en-IN" dirty="0"/>
-              <a:t> Create own Packages.</a:t>
-            </a:r>
-          </a:p>
-          <a:p>
-            <a:r>
-              <a:rPr lang="en-IN" dirty="0"/>
-              <a:t> </a:t>
-            </a:r>
+              <a:t>Reverse Vowels of a String.</a:t>
+            </a:r>
+          </a:p>
+          <a:p>
+            <a:r>
+              <a:rPr lang="en-IN" dirty="0"/>
+              <a:t> Keyboard Row.</a:t>
+            </a:r>
+          </a:p>
+          <a:p>
+            <a:r>
+              <a:rPr lang="en-IN" dirty="0"/>
+              <a:t> Form words in diagonal flow.</a:t>
+            </a:r>
+          </a:p>
+          <a:p>
+            <a:r>
+              <a:rPr lang="en-IN" dirty="0"/>
+              <a:t> Equal Score Substrings.</a:t>
+            </a:r>
+          </a:p>
+          <a:p>
+            <a:r>
+              <a:rPr lang="en-IN" dirty="0"/>
+              <a:t> Zigzag Conversion.</a:t>
+            </a:r>
+          </a:p>
+          <a:p>
+            <a:endParaRPr lang="en-IN" dirty="0"/>
+          </a:p>
+          <a:p>
+            <a:pPr marL="0" indent="0" algn="ctr">
+              <a:buNone/>
+            </a:pPr>
             <a:r>
               <a:rPr lang="en-IN" b="1" dirty="0"/>
-              <a:t>Steps : </a:t>
-            </a:r>
-          </a:p>
-          <a:p>
-            <a:pPr lvl="1"/>
-            <a:r>
-              <a:rPr lang="en-IN" b="1" dirty="0"/>
-              <a:t> </a:t>
-            </a:r>
-            <a:r>
-              <a:rPr lang="en-IN" dirty="0"/>
-              <a:t>create a folder.</a:t>
-            </a:r>
-          </a:p>
-          <a:p>
-            <a:pPr lvl="1"/>
-            <a:r>
-              <a:rPr lang="en-IN" dirty="0"/>
-              <a:t> inside that folder add src folder , gitignore , readme , license , venv , pyproject.toml.</a:t>
-            </a:r>
-          </a:p>
-          <a:p>
-            <a:pPr lvl="1"/>
-            <a:r>
-              <a:rPr lang="en-IN" dirty="0"/>
-              <a:t> pypi account login.</a:t>
-            </a:r>
-          </a:p>
-          <a:p>
-            <a:pPr lvl="1"/>
-            <a:r>
-              <a:rPr lang="en-IN" dirty="0"/>
-              <a:t> publish the branch in GitHub.</a:t>
-            </a:r>
-          </a:p>
-          <a:p>
-            <a:pPr lvl="1"/>
-            <a:r>
-              <a:rPr lang="en-IN" dirty="0"/>
-              <a:t> on cmd push the folder.</a:t>
-            </a:r>
+              <a:t>PYTHON BASIC CONCEPTS COMPLETED.</a:t>
+            </a:r>
+          </a:p>
+          <a:p>
+            <a:pPr marL="0" indent="0">
+              <a:buNone/>
+            </a:pPr>
+            <a:endParaRPr lang="en-IN" dirty="0"/>
+          </a:p>
+          <a:p>
+            <a:pPr marL="0" indent="0">
+              <a:buNone/>
+            </a:pPr>
+            <a:r>
+              <a:rPr lang="en-IN" dirty="0"/>
+              <a:t>GitHub Link : </a:t>
+            </a:r>
+            <a:r>
+              <a:rPr lang="en-IN" dirty="0">
+                <a:hlinkClick r:id="rId2"/>
+              </a:rPr>
+              <a:t>https://github.com/nikishdaniel1-del/Python-Cls</a:t>
+            </a:r>
+            <a:endParaRPr lang="en-IN" dirty="0"/>
           </a:p>
         </p:txBody>
       </p:sp>
@@ -10654,7 +10670,7 @@
           <p:cNvPr id="4" name="Footer Placeholder 3">
             <a:extLst>
               <a:ext uri="{FF2B5EF4-FFF2-40B4-BE49-F238E27FC236}">
-                <a16:creationId xmlns:a16="http://schemas.microsoft.com/office/drawing/2014/main" id="{DFE71CE4-9080-389F-EBAC-A28DAE84DAEE}"/>
+                <a16:creationId xmlns:a16="http://schemas.microsoft.com/office/drawing/2014/main" id="{4E75C686-45D5-51B5-CE9B-92CFD65EA4D6}"/>
               </a:ext>
             </a:extLst>
           </p:cNvPr>
@@ -10683,7 +10699,7 @@
           <p:cNvPr id="5" name="Slide Number Placeholder 4">
             <a:extLst>
               <a:ext uri="{FF2B5EF4-FFF2-40B4-BE49-F238E27FC236}">
-                <a16:creationId xmlns:a16="http://schemas.microsoft.com/office/drawing/2014/main" id="{08D0C57D-0999-D180-8AC1-D9F2F4C92A21}"/>
+                <a16:creationId xmlns:a16="http://schemas.microsoft.com/office/drawing/2014/main" id="{4E967A4D-DE2A-311F-9BB5-EC319655B787}"/>
               </a:ext>
             </a:extLst>
           </p:cNvPr>
@@ -10710,7 +10726,7 @@
     </p:spTree>
     <p:extLst>
       <p:ext uri="{BB962C8B-B14F-4D97-AF65-F5344CB8AC3E}">
-        <p14:creationId xmlns:p14="http://schemas.microsoft.com/office/powerpoint/2010/main" val="2724122432"/>
+        <p14:creationId xmlns:p14="http://schemas.microsoft.com/office/powerpoint/2010/main" val="2943109998"/>
       </p:ext>
     </p:extLst>
   </p:cSld>
@@ -10742,7 +10758,7 @@
           <p:cNvPr id="2" name="Title 1">
             <a:extLst>
               <a:ext uri="{FF2B5EF4-FFF2-40B4-BE49-F238E27FC236}">
-                <a16:creationId xmlns:a16="http://schemas.microsoft.com/office/drawing/2014/main" id="{EA46A9CF-2C01-C94A-DFD6-EFFFA8132FF4}"/>
+                <a16:creationId xmlns:a16="http://schemas.microsoft.com/office/drawing/2014/main" id="{2CEA5BDF-9F05-F624-FCF1-39C85E1A3DE7}"/>
               </a:ext>
             </a:extLst>
           </p:cNvPr>
@@ -10759,9 +10775,10 @@
           <a:lstStyle/>
           <a:p>
             <a:r>
-              <a:rPr lang="en-IN" dirty="0"/>
-              <a:t>Folder Structure</a:t>
-            </a:r>
+              <a:rPr lang="en-GB" dirty="0"/>
+              <a:t>Web Development</a:t>
+            </a:r>
+            <a:endParaRPr lang="en-IN" dirty="0"/>
           </a:p>
         </p:txBody>
       </p:sp>
@@ -10770,7 +10787,7 @@
           <p:cNvPr id="3" name="Content Placeholder 2">
             <a:extLst>
               <a:ext uri="{FF2B5EF4-FFF2-40B4-BE49-F238E27FC236}">
-                <a16:creationId xmlns:a16="http://schemas.microsoft.com/office/drawing/2014/main" id="{2839D2C2-24AC-AFC4-E450-8CABA8F02A1E}"/>
+                <a16:creationId xmlns:a16="http://schemas.microsoft.com/office/drawing/2014/main" id="{3F654F39-106A-8921-8452-34F301506A96}"/>
               </a:ext>
             </a:extLst>
           </p:cNvPr>
@@ -10783,9 +10800,7 @@
         </p:nvSpPr>
         <p:spPr/>
         <p:txBody>
-          <a:bodyPr>
-            <a:normAutofit lnSpcReduction="10000"/>
-          </a:bodyPr>
+          <a:bodyPr/>
           <a:lstStyle/>
           <a:p>
             <a:r>
@@ -10794,11 +10809,11 @@
             </a:r>
             <a:r>
               <a:rPr lang="en-IN" b="1" dirty="0"/>
-              <a:t>Example : </a:t>
-            </a:r>
-            <a:r>
-              <a:rPr lang="en-IN" dirty="0"/>
-              <a:t>creating a package named customs</a:t>
+              <a:t>Package : </a:t>
+            </a:r>
+            <a:r>
+              <a:rPr lang="en-IN" dirty="0"/>
+              <a:t>nicegui</a:t>
             </a:r>
           </a:p>
           <a:p>
@@ -10808,89 +10823,68 @@
             </a:r>
             <a:r>
               <a:rPr lang="en-IN" b="1" dirty="0"/>
-              <a:t>Structure : </a:t>
-            </a:r>
-            <a:endParaRPr lang="en-IN" dirty="0"/>
-          </a:p>
-          <a:p>
-            <a:pPr marL="0" indent="0">
-              <a:buNone/>
-            </a:pPr>
-            <a:r>
-              <a:rPr lang="en-IN" dirty="0"/>
-              <a:t>	- src</a:t>
-            </a:r>
-          </a:p>
-          <a:p>
-            <a:pPr marL="0" indent="0">
-              <a:buNone/>
-            </a:pPr>
-            <a:r>
-              <a:rPr lang="en-IN" dirty="0"/>
-              <a:t>		- customs</a:t>
-            </a:r>
-          </a:p>
-          <a:p>
-            <a:pPr marL="0" indent="0">
-              <a:buNone/>
-            </a:pPr>
-            <a:r>
-              <a:rPr lang="en-IN" dirty="0"/>
-              <a:t>			- venv</a:t>
-            </a:r>
-          </a:p>
-          <a:p>
-            <a:pPr marL="0" indent="0">
-              <a:buNone/>
-            </a:pPr>
-            <a:r>
-              <a:rPr lang="en-IN" dirty="0"/>
-              <a:t>			- __init__.py</a:t>
-            </a:r>
-          </a:p>
-          <a:p>
-            <a:pPr marL="0" indent="0">
-              <a:buNone/>
-            </a:pPr>
-            <a:r>
-              <a:rPr lang="en-IN" dirty="0"/>
-              <a:t>			- main.py</a:t>
-            </a:r>
-          </a:p>
-          <a:p>
-            <a:pPr marL="0" indent="0">
-              <a:buNone/>
-            </a:pPr>
-            <a:r>
-              <a:rPr lang="en-IN" dirty="0"/>
-              <a:t>	- license</a:t>
-            </a:r>
-          </a:p>
-          <a:p>
-            <a:pPr marL="0" indent="0">
-              <a:buNone/>
-            </a:pPr>
-            <a:r>
-              <a:rPr lang="en-IN" dirty="0"/>
-              <a:t>	- readme</a:t>
-            </a:r>
-          </a:p>
-          <a:p>
-            <a:pPr marL="0" indent="0">
-              <a:buNone/>
-            </a:pPr>
-            <a:r>
-              <a:rPr lang="en-IN" dirty="0"/>
-              <a:t>	- pyproject.toml</a:t>
-            </a:r>
-          </a:p>
-          <a:p>
-            <a:pPr marL="0" indent="0">
-              <a:buNone/>
-            </a:pPr>
-            <a:r>
-              <a:rPr lang="en-IN" dirty="0"/>
-              <a:t>	- .gitignore</a:t>
+              <a:t>cmd : pip install  nicegui</a:t>
+            </a:r>
+          </a:p>
+          <a:p>
+            <a:r>
+              <a:rPr lang="en-IN" b="1" dirty="0"/>
+              <a:t> </a:t>
+            </a:r>
+            <a:r>
+              <a:rPr lang="en-GB" b="1" dirty="0"/>
+              <a:t>Concepts :</a:t>
+            </a:r>
+          </a:p>
+          <a:p>
+            <a:pPr lvl="1"/>
+            <a:r>
+              <a:rPr lang="en-IN" dirty="0"/>
+              <a:t> Start connection</a:t>
+            </a:r>
+          </a:p>
+          <a:p>
+            <a:pPr lvl="1"/>
+            <a:r>
+              <a:rPr lang="en-IN" dirty="0"/>
+              <a:t> Add Static Files</a:t>
+            </a:r>
+          </a:p>
+          <a:p>
+            <a:pPr lvl="1"/>
+            <a:r>
+              <a:rPr lang="en-IN" dirty="0"/>
+              <a:t> UI components</a:t>
+            </a:r>
+          </a:p>
+          <a:p>
+            <a:pPr lvl="1"/>
+            <a:r>
+              <a:rPr lang="en-IN" dirty="0"/>
+              <a:t> </a:t>
+            </a:r>
+            <a:r>
+              <a:rPr lang="en-GB" dirty="0"/>
+              <a:t>Custom widget creation</a:t>
+            </a:r>
+            <a:endParaRPr lang="en-IN" dirty="0"/>
+          </a:p>
+          <a:p>
+            <a:pPr lvl="1"/>
+            <a:r>
+              <a:rPr lang="en-IN" dirty="0"/>
+              <a:t> UI on-command operations</a:t>
+            </a:r>
+          </a:p>
+          <a:p>
+            <a:pPr lvl="1"/>
+            <a:r>
+              <a:rPr lang="en-IN" b="1" dirty="0"/>
+              <a:t> </a:t>
+            </a:r>
+            <a:r>
+              <a:rPr lang="en-IN" dirty="0"/>
+              <a:t>back-end connections &amp; operations</a:t>
             </a:r>
           </a:p>
         </p:txBody>
@@ -10900,7 +10894,7 @@
           <p:cNvPr id="4" name="Footer Placeholder 3">
             <a:extLst>
               <a:ext uri="{FF2B5EF4-FFF2-40B4-BE49-F238E27FC236}">
-                <a16:creationId xmlns:a16="http://schemas.microsoft.com/office/drawing/2014/main" id="{8367D499-21CA-1608-F638-E9171FD79A35}"/>
+                <a16:creationId xmlns:a16="http://schemas.microsoft.com/office/drawing/2014/main" id="{B6211910-FFBC-E796-7537-DC267EB214BD}"/>
               </a:ext>
             </a:extLst>
           </p:cNvPr>
@@ -10929,7 +10923,7 @@
           <p:cNvPr id="5" name="Slide Number Placeholder 4">
             <a:extLst>
               <a:ext uri="{FF2B5EF4-FFF2-40B4-BE49-F238E27FC236}">
-                <a16:creationId xmlns:a16="http://schemas.microsoft.com/office/drawing/2014/main" id="{2FE49377-ACB1-2199-795C-1989FA4FA786}"/>
+                <a16:creationId xmlns:a16="http://schemas.microsoft.com/office/drawing/2014/main" id="{634CE741-738C-5294-3111-4971DF04E698}"/>
               </a:ext>
             </a:extLst>
           </p:cNvPr>
@@ -10948,417 +10942,6 @@
             <a:fld id="{F904C42B-FE65-422C-989C-AD3E5E2A1A20}" type="slidenum">
               <a:rPr lang="en-IN" smtClean="0"/>
               <a:t>33</a:t>
-            </a:fld>
-            <a:endParaRPr lang="en-IN" dirty="0"/>
-          </a:p>
-        </p:txBody>
-      </p:sp>
-    </p:spTree>
-    <p:extLst>
-      <p:ext uri="{BB962C8B-B14F-4D97-AF65-F5344CB8AC3E}">
-        <p14:creationId xmlns:p14="http://schemas.microsoft.com/office/powerpoint/2010/main" val="1743211506"/>
-      </p:ext>
-    </p:extLst>
-  </p:cSld>
-  <p:clrMapOvr>
-    <a:masterClrMapping/>
-  </p:clrMapOvr>
-</p:sld>
-</file>
-
-<file path=ppt/slides/slide34.xml><?xml version="1.0" encoding="utf-8"?>
-<p:sld xmlns:a="http://schemas.openxmlformats.org/drawingml/2006/main" xmlns:r="http://schemas.openxmlformats.org/officeDocument/2006/relationships" xmlns:p="http://schemas.openxmlformats.org/presentationml/2006/main">
-  <p:cSld>
-    <p:spTree>
-      <p:nvGrpSpPr>
-        <p:cNvPr id="1" name=""/>
-        <p:cNvGrpSpPr/>
-        <p:nvPr/>
-      </p:nvGrpSpPr>
-      <p:grpSpPr>
-        <a:xfrm>
-          <a:off x="0" y="0"/>
-          <a:ext cx="0" cy="0"/>
-          <a:chOff x="0" y="0"/>
-          <a:chExt cx="0" cy="0"/>
-        </a:xfrm>
-      </p:grpSpPr>
-      <p:sp>
-        <p:nvSpPr>
-          <p:cNvPr id="2" name="Title 1">
-            <a:extLst>
-              <a:ext uri="{FF2B5EF4-FFF2-40B4-BE49-F238E27FC236}">
-                <a16:creationId xmlns:a16="http://schemas.microsoft.com/office/drawing/2014/main" id="{89A40D6B-3A8E-67A6-6A68-010B58DAC4FC}"/>
-              </a:ext>
-            </a:extLst>
-          </p:cNvPr>
-          <p:cNvSpPr>
-            <a:spLocks noGrp="1"/>
-          </p:cNvSpPr>
-          <p:nvPr>
-            <p:ph type="title"/>
-          </p:nvPr>
-        </p:nvSpPr>
-        <p:spPr/>
-        <p:txBody>
-          <a:bodyPr/>
-          <a:lstStyle/>
-          <a:p>
-            <a:r>
-              <a:rPr lang="en-IN" dirty="0"/>
-              <a:t>Problems</a:t>
-            </a:r>
-          </a:p>
-        </p:txBody>
-      </p:sp>
-      <p:sp>
-        <p:nvSpPr>
-          <p:cNvPr id="3" name="Content Placeholder 2">
-            <a:extLst>
-              <a:ext uri="{FF2B5EF4-FFF2-40B4-BE49-F238E27FC236}">
-                <a16:creationId xmlns:a16="http://schemas.microsoft.com/office/drawing/2014/main" id="{2EA13D08-34E8-FF65-D42D-B7D8201AF8B5}"/>
-              </a:ext>
-            </a:extLst>
-          </p:cNvPr>
-          <p:cNvSpPr>
-            <a:spLocks noGrp="1"/>
-          </p:cNvSpPr>
-          <p:nvPr>
-            <p:ph idx="1"/>
-          </p:nvPr>
-        </p:nvSpPr>
-        <p:spPr/>
-        <p:txBody>
-          <a:bodyPr/>
-          <a:lstStyle/>
-          <a:p>
-            <a:r>
-              <a:rPr lang="en-IN" dirty="0"/>
-              <a:t> Valid Parentheses.</a:t>
-            </a:r>
-          </a:p>
-          <a:p>
-            <a:r>
-              <a:rPr lang="en-IN" dirty="0"/>
-              <a:t> </a:t>
-            </a:r>
-            <a:r>
-              <a:rPr lang="en-GB" dirty="0"/>
-              <a:t>Reverse Vowels of a String.</a:t>
-            </a:r>
-          </a:p>
-          <a:p>
-            <a:r>
-              <a:rPr lang="en-IN" dirty="0"/>
-              <a:t> Keyboard Row.</a:t>
-            </a:r>
-          </a:p>
-          <a:p>
-            <a:r>
-              <a:rPr lang="en-IN" dirty="0"/>
-              <a:t> Form words in diagonal flow.</a:t>
-            </a:r>
-          </a:p>
-          <a:p>
-            <a:r>
-              <a:rPr lang="en-IN" dirty="0"/>
-              <a:t> Equal Score Substrings.</a:t>
-            </a:r>
-          </a:p>
-          <a:p>
-            <a:r>
-              <a:rPr lang="en-IN" dirty="0"/>
-              <a:t> Zigzag Conversion.</a:t>
-            </a:r>
-          </a:p>
-          <a:p>
-            <a:endParaRPr lang="en-IN" dirty="0"/>
-          </a:p>
-          <a:p>
-            <a:endParaRPr lang="en-IN" dirty="0"/>
-          </a:p>
-          <a:p>
-            <a:pPr marL="0" indent="0" algn="ctr">
-              <a:buNone/>
-            </a:pPr>
-            <a:r>
-              <a:rPr lang="en-IN" b="1" dirty="0"/>
-              <a:t>PYTHON BASIC CONCEPTS COMPLETED.</a:t>
-            </a:r>
-            <a:endParaRPr lang="en-IN" dirty="0"/>
-          </a:p>
-        </p:txBody>
-      </p:sp>
-      <p:sp>
-        <p:nvSpPr>
-          <p:cNvPr id="4" name="Footer Placeholder 3">
-            <a:extLst>
-              <a:ext uri="{FF2B5EF4-FFF2-40B4-BE49-F238E27FC236}">
-                <a16:creationId xmlns:a16="http://schemas.microsoft.com/office/drawing/2014/main" id="{4E75C686-45D5-51B5-CE9B-92CFD65EA4D6}"/>
-              </a:ext>
-            </a:extLst>
-          </p:cNvPr>
-          <p:cNvSpPr>
-            <a:spLocks noGrp="1"/>
-          </p:cNvSpPr>
-          <p:nvPr>
-            <p:ph type="ftr" sz="quarter" idx="11"/>
-          </p:nvPr>
-        </p:nvSpPr>
-        <p:spPr/>
-        <p:txBody>
-          <a:bodyPr/>
-          <a:lstStyle/>
-          <a:p>
-            <a:r>
-              <a:rPr lang="it-IT"/>
-              <a:t>Agnie Consulting India Pvt Limited</a:t>
-            </a:r>
-            <a:endParaRPr lang="en-IN" dirty="0"/>
-          </a:p>
-        </p:txBody>
-      </p:sp>
-      <p:sp>
-        <p:nvSpPr>
-          <p:cNvPr id="5" name="Slide Number Placeholder 4">
-            <a:extLst>
-              <a:ext uri="{FF2B5EF4-FFF2-40B4-BE49-F238E27FC236}">
-                <a16:creationId xmlns:a16="http://schemas.microsoft.com/office/drawing/2014/main" id="{4E967A4D-DE2A-311F-9BB5-EC319655B787}"/>
-              </a:ext>
-            </a:extLst>
-          </p:cNvPr>
-          <p:cNvSpPr>
-            <a:spLocks noGrp="1"/>
-          </p:cNvSpPr>
-          <p:nvPr>
-            <p:ph type="sldNum" sz="quarter" idx="12"/>
-          </p:nvPr>
-        </p:nvSpPr>
-        <p:spPr/>
-        <p:txBody>
-          <a:bodyPr/>
-          <a:lstStyle/>
-          <a:p>
-            <a:fld id="{F904C42B-FE65-422C-989C-AD3E5E2A1A20}" type="slidenum">
-              <a:rPr lang="en-IN" smtClean="0"/>
-              <a:t>34</a:t>
-            </a:fld>
-            <a:endParaRPr lang="en-IN" dirty="0"/>
-          </a:p>
-        </p:txBody>
-      </p:sp>
-    </p:spTree>
-    <p:extLst>
-      <p:ext uri="{BB962C8B-B14F-4D97-AF65-F5344CB8AC3E}">
-        <p14:creationId xmlns:p14="http://schemas.microsoft.com/office/powerpoint/2010/main" val="2943109998"/>
-      </p:ext>
-    </p:extLst>
-  </p:cSld>
-  <p:clrMapOvr>
-    <a:masterClrMapping/>
-  </p:clrMapOvr>
-</p:sld>
-</file>
-
-<file path=ppt/slides/slide35.xml><?xml version="1.0" encoding="utf-8"?>
-<p:sld xmlns:a="http://schemas.openxmlformats.org/drawingml/2006/main" xmlns:r="http://schemas.openxmlformats.org/officeDocument/2006/relationships" xmlns:p="http://schemas.openxmlformats.org/presentationml/2006/main">
-  <p:cSld>
-    <p:spTree>
-      <p:nvGrpSpPr>
-        <p:cNvPr id="1" name=""/>
-        <p:cNvGrpSpPr/>
-        <p:nvPr/>
-      </p:nvGrpSpPr>
-      <p:grpSpPr>
-        <a:xfrm>
-          <a:off x="0" y="0"/>
-          <a:ext cx="0" cy="0"/>
-          <a:chOff x="0" y="0"/>
-          <a:chExt cx="0" cy="0"/>
-        </a:xfrm>
-      </p:grpSpPr>
-      <p:sp>
-        <p:nvSpPr>
-          <p:cNvPr id="2" name="Title 1">
-            <a:extLst>
-              <a:ext uri="{FF2B5EF4-FFF2-40B4-BE49-F238E27FC236}">
-                <a16:creationId xmlns:a16="http://schemas.microsoft.com/office/drawing/2014/main" id="{2CEA5BDF-9F05-F624-FCF1-39C85E1A3DE7}"/>
-              </a:ext>
-            </a:extLst>
-          </p:cNvPr>
-          <p:cNvSpPr>
-            <a:spLocks noGrp="1"/>
-          </p:cNvSpPr>
-          <p:nvPr>
-            <p:ph type="title"/>
-          </p:nvPr>
-        </p:nvSpPr>
-        <p:spPr/>
-        <p:txBody>
-          <a:bodyPr/>
-          <a:lstStyle/>
-          <a:p>
-            <a:r>
-              <a:rPr lang="en-GB" dirty="0"/>
-              <a:t>Web Development</a:t>
-            </a:r>
-            <a:endParaRPr lang="en-IN" dirty="0"/>
-          </a:p>
-        </p:txBody>
-      </p:sp>
-      <p:sp>
-        <p:nvSpPr>
-          <p:cNvPr id="3" name="Content Placeholder 2">
-            <a:extLst>
-              <a:ext uri="{FF2B5EF4-FFF2-40B4-BE49-F238E27FC236}">
-                <a16:creationId xmlns:a16="http://schemas.microsoft.com/office/drawing/2014/main" id="{3F654F39-106A-8921-8452-34F301506A96}"/>
-              </a:ext>
-            </a:extLst>
-          </p:cNvPr>
-          <p:cNvSpPr>
-            <a:spLocks noGrp="1"/>
-          </p:cNvSpPr>
-          <p:nvPr>
-            <p:ph idx="1"/>
-          </p:nvPr>
-        </p:nvSpPr>
-        <p:spPr/>
-        <p:txBody>
-          <a:bodyPr/>
-          <a:lstStyle/>
-          <a:p>
-            <a:r>
-              <a:rPr lang="en-IN" dirty="0"/>
-              <a:t> </a:t>
-            </a:r>
-            <a:r>
-              <a:rPr lang="en-IN" b="1" dirty="0"/>
-              <a:t>Package : </a:t>
-            </a:r>
-            <a:r>
-              <a:rPr lang="en-IN" dirty="0"/>
-              <a:t>nicegui</a:t>
-            </a:r>
-          </a:p>
-          <a:p>
-            <a:r>
-              <a:rPr lang="en-IN" dirty="0"/>
-              <a:t> </a:t>
-            </a:r>
-            <a:r>
-              <a:rPr lang="en-IN" b="1" dirty="0"/>
-              <a:t>cmd : pip install  nicegui</a:t>
-            </a:r>
-          </a:p>
-          <a:p>
-            <a:r>
-              <a:rPr lang="en-IN" b="1" dirty="0"/>
-              <a:t> </a:t>
-            </a:r>
-            <a:r>
-              <a:rPr lang="en-GB" b="1" dirty="0"/>
-              <a:t>Concepts :</a:t>
-            </a:r>
-          </a:p>
-          <a:p>
-            <a:pPr lvl="1"/>
-            <a:r>
-              <a:rPr lang="en-IN" dirty="0"/>
-              <a:t> Start connection</a:t>
-            </a:r>
-          </a:p>
-          <a:p>
-            <a:pPr lvl="1"/>
-            <a:r>
-              <a:rPr lang="en-IN" dirty="0"/>
-              <a:t> UI components</a:t>
-            </a:r>
-          </a:p>
-          <a:p>
-            <a:pPr lvl="1"/>
-            <a:r>
-              <a:rPr lang="en-IN" dirty="0"/>
-              <a:t> </a:t>
-            </a:r>
-            <a:r>
-              <a:rPr lang="en-GB" dirty="0"/>
-              <a:t>Custom widget creation</a:t>
-            </a:r>
-            <a:endParaRPr lang="en-IN" dirty="0"/>
-          </a:p>
-          <a:p>
-            <a:pPr lvl="1"/>
-            <a:r>
-              <a:rPr lang="en-IN" dirty="0"/>
-              <a:t> UI on-command operations</a:t>
-            </a:r>
-          </a:p>
-          <a:p>
-            <a:pPr lvl="1"/>
-            <a:r>
-              <a:rPr lang="en-IN" b="1" dirty="0"/>
-              <a:t> </a:t>
-            </a:r>
-            <a:r>
-              <a:rPr lang="en-IN" dirty="0"/>
-              <a:t>back-end connections &amp; operations</a:t>
-            </a:r>
-          </a:p>
-        </p:txBody>
-      </p:sp>
-      <p:sp>
-        <p:nvSpPr>
-          <p:cNvPr id="4" name="Footer Placeholder 3">
-            <a:extLst>
-              <a:ext uri="{FF2B5EF4-FFF2-40B4-BE49-F238E27FC236}">
-                <a16:creationId xmlns:a16="http://schemas.microsoft.com/office/drawing/2014/main" id="{B6211910-FFBC-E796-7537-DC267EB214BD}"/>
-              </a:ext>
-            </a:extLst>
-          </p:cNvPr>
-          <p:cNvSpPr>
-            <a:spLocks noGrp="1"/>
-          </p:cNvSpPr>
-          <p:nvPr>
-            <p:ph type="ftr" sz="quarter" idx="11"/>
-          </p:nvPr>
-        </p:nvSpPr>
-        <p:spPr/>
-        <p:txBody>
-          <a:bodyPr/>
-          <a:lstStyle/>
-          <a:p>
-            <a:r>
-              <a:rPr lang="it-IT"/>
-              <a:t>Agnie Consulting India Pvt Limited</a:t>
-            </a:r>
-            <a:endParaRPr lang="en-IN" dirty="0"/>
-          </a:p>
-        </p:txBody>
-      </p:sp>
-      <p:sp>
-        <p:nvSpPr>
-          <p:cNvPr id="5" name="Slide Number Placeholder 4">
-            <a:extLst>
-              <a:ext uri="{FF2B5EF4-FFF2-40B4-BE49-F238E27FC236}">
-                <a16:creationId xmlns:a16="http://schemas.microsoft.com/office/drawing/2014/main" id="{634CE741-738C-5294-3111-4971DF04E698}"/>
-              </a:ext>
-            </a:extLst>
-          </p:cNvPr>
-          <p:cNvSpPr>
-            <a:spLocks noGrp="1"/>
-          </p:cNvSpPr>
-          <p:nvPr>
-            <p:ph type="sldNum" sz="quarter" idx="12"/>
-          </p:nvPr>
-        </p:nvSpPr>
-        <p:spPr/>
-        <p:txBody>
-          <a:bodyPr/>
-          <a:lstStyle/>
-          <a:p>
-            <a:fld id="{F904C42B-FE65-422C-989C-AD3E5E2A1A20}" type="slidenum">
-              <a:rPr lang="en-IN" smtClean="0"/>
-              <a:t>35</a:t>
             </a:fld>
             <a:endParaRPr lang="en-IN" dirty="0"/>
           </a:p>
@@ -12474,7 +12057,7 @@
           <a:p>
             <a:r>
               <a:rPr lang="en-IN" dirty="0"/>
-              <a:t>Example (range())</a:t>
+              <a:t>Example - range()</a:t>
             </a:r>
           </a:p>
         </p:txBody>

--- a/python class/Python Class.pptx
+++ b/python class/Python Class.pptx
@@ -229,7 +229,7 @@
           <a:p>
             <a:fld id="{C7300FFE-222E-424B-A24A-B86ADB1660A8}" type="datetimeFigureOut">
               <a:rPr lang="en-IN" smtClean="0"/>
-              <a:t>22-09-2026</a:t>
+              <a:t>05-10-2026</a:t>
             </a:fld>
             <a:endParaRPr lang="en-IN" dirty="0"/>
           </a:p>
@@ -657,7 +657,7 @@
           <a:p>
             <a:fld id="{AD501974-91E0-4A6C-BF4F-18DDA0DBE697}" type="datetime1">
               <a:rPr lang="en-IN" smtClean="0"/>
-              <a:t>22-09-2026</a:t>
+              <a:t>05-10-2026</a:t>
             </a:fld>
             <a:endParaRPr lang="en-IN" dirty="0"/>
           </a:p>
@@ -782,7 +782,7 @@
           <a:p>
             <a:fld id="{340C70EA-229A-4802-A7BC-A1799783BDD3}" type="datetime1">
               <a:rPr lang="en-IN" smtClean="0"/>
-              <a:t>22-09-2026</a:t>
+              <a:t>05-10-2026</a:t>
             </a:fld>
             <a:endParaRPr lang="en-IN" dirty="0"/>
           </a:p>
@@ -1069,7 +1069,7 @@
           <a:p>
             <a:fld id="{BD944048-9929-4BB2-BADE-62F9A707015B}" type="datetime1">
               <a:rPr lang="en-IN" smtClean="0"/>
-              <a:t>22-09-2026</a:t>
+              <a:t>05-10-2026</a:t>
             </a:fld>
             <a:endParaRPr lang="en-IN" dirty="0"/>
           </a:p>
@@ -1375,7 +1375,7 @@
           <a:p>
             <a:fld id="{09A388D1-7504-45FD-847C-EF9E921E08DF}" type="datetime1">
               <a:rPr lang="en-IN" smtClean="0"/>
-              <a:t>22-09-2026</a:t>
+              <a:t>05-10-2026</a:t>
             </a:fld>
             <a:endParaRPr lang="en-IN" dirty="0"/>
           </a:p>
@@ -1604,7 +1604,7 @@
           <a:p>
             <a:fld id="{6015BE80-B03C-48AB-B3E2-19C5F4D60D3C}" type="datetime1">
               <a:rPr lang="en-IN" smtClean="0"/>
-              <a:t>22-09-2026</a:t>
+              <a:t>05-10-2026</a:t>
             </a:fld>
             <a:endParaRPr lang="en-IN" dirty="0"/>
           </a:p>
@@ -1875,7 +1875,7 @@
           <a:p>
             <a:fld id="{450E9977-AF0E-4B1A-B2BF-2416B4828E95}" type="datetime1">
               <a:rPr lang="en-IN" smtClean="0"/>
-              <a:t>22-09-2026</a:t>
+              <a:t>05-10-2026</a:t>
             </a:fld>
             <a:endParaRPr lang="en-IN" dirty="0"/>
           </a:p>
@@ -2102,7 +2102,7 @@
           <a:p>
             <a:fld id="{972A712B-80AB-4FDB-AFE5-C959280677B9}" type="datetime1">
               <a:rPr lang="en-IN" smtClean="0"/>
-              <a:t>22-09-2026</a:t>
+              <a:t>05-10-2026</a:t>
             </a:fld>
             <a:endParaRPr lang="en-IN" dirty="0"/>
           </a:p>
@@ -2393,7 +2393,7 @@
           <a:p>
             <a:fld id="{78FC1D50-5769-4793-A6D0-4C61D943385E}" type="datetime1">
               <a:rPr lang="en-IN" smtClean="0"/>
-              <a:t>22-09-2026</a:t>
+              <a:t>05-10-2026</a:t>
             </a:fld>
             <a:endParaRPr lang="en-IN" dirty="0"/>
           </a:p>
@@ -2658,7 +2658,7 @@
           <a:p>
             <a:fld id="{1093E9E7-66F0-49C7-87AF-7A91F126A0CA}" type="datetime1">
               <a:rPr lang="en-IN" smtClean="0"/>
-              <a:t>22-09-2026</a:t>
+              <a:t>05-10-2026</a:t>
             </a:fld>
             <a:endParaRPr lang="en-IN" dirty="0"/>
           </a:p>
@@ -3104,7 +3104,7 @@
           <a:p>
             <a:fld id="{4802E001-56FE-4C01-9545-A69D840AB1F5}" type="datetime1">
               <a:rPr lang="en-IN" smtClean="0"/>
-              <a:t>22-09-2026</a:t>
+              <a:t>05-10-2026</a:t>
             </a:fld>
             <a:endParaRPr lang="en-IN" dirty="0"/>
           </a:p>
@@ -3268,7 +3268,7 @@
           <a:p>
             <a:fld id="{FC628212-ABC2-4EAF-BB21-53D61AEEEA49}" type="datetime1">
               <a:rPr lang="en-IN" smtClean="0"/>
-              <a:t>22-09-2026</a:t>
+              <a:t>05-10-2026</a:t>
             </a:fld>
             <a:endParaRPr lang="en-IN" dirty="0"/>
           </a:p>
@@ -3432,7 +3432,7 @@
           <a:p>
             <a:fld id="{83F0C27E-97BD-4ACD-AFDF-13985BE88ECF}" type="datetime1">
               <a:rPr lang="en-IN" smtClean="0"/>
-              <a:t>22-09-2026</a:t>
+              <a:t>05-10-2026</a:t>
             </a:fld>
             <a:endParaRPr lang="en-IN" dirty="0"/>
           </a:p>
@@ -3630,7 +3630,7 @@
           <a:p>
             <a:fld id="{10A04BDC-9A72-4B08-81B7-A336A5B4E254}" type="datetime1">
               <a:rPr lang="en-IN" smtClean="0"/>
-              <a:t>22-09-2026</a:t>
+              <a:t>05-10-2026</a:t>
             </a:fld>
             <a:endParaRPr lang="en-IN" dirty="0"/>
           </a:p>
@@ -3828,7 +3828,7 @@
           <a:p>
             <a:fld id="{2E5D08A3-D96A-4309-8AF3-C610782BB2D3}" type="datetime1">
               <a:rPr lang="en-IN" smtClean="0"/>
-              <a:t>22-09-2026</a:t>
+              <a:t>05-10-2026</a:t>
             </a:fld>
             <a:endParaRPr lang="en-IN" dirty="0"/>
           </a:p>
@@ -6006,6 +6006,12 @@
               <a:rPr lang="en-IN" dirty="0"/>
               <a:t>Word Pattern : pattern="abba" , sentence="dog cat cat dog" . o/p : True.</a:t>
             </a:r>
+          </a:p>
+          <a:p>
+            <a:r>
+              <a:rPr lang="en-IN"/>
+              <a:t> total value of the string : Input : s = '1a12b8z1’ , Output : 55</a:t>
+            </a:r>
             <a:endParaRPr lang="en-GB" dirty="0"/>
           </a:p>
         </p:txBody>
@@ -7660,6 +7666,9 @@
               <a:rPr lang="en-IN" dirty="0"/>
               <a:t> database operations.</a:t>
             </a:r>
+          </a:p>
+          <a:p>
+            <a:endParaRPr lang="en-IN" dirty="0"/>
           </a:p>
         </p:txBody>
       </p:sp>

--- a/python class/Python Class.pptx
+++ b/python class/Python Class.pptx
@@ -229,7 +229,7 @@
           <a:p>
             <a:fld id="{C7300FFE-222E-424B-A24A-B86ADB1660A8}" type="datetimeFigureOut">
               <a:rPr lang="en-IN" smtClean="0"/>
-              <a:t>05-10-2026</a:t>
+              <a:t>06-10-2026</a:t>
             </a:fld>
             <a:endParaRPr lang="en-IN" dirty="0"/>
           </a:p>
@@ -657,7 +657,7 @@
           <a:p>
             <a:fld id="{AD501974-91E0-4A6C-BF4F-18DDA0DBE697}" type="datetime1">
               <a:rPr lang="en-IN" smtClean="0"/>
-              <a:t>05-10-2026</a:t>
+              <a:t>06-10-2026</a:t>
             </a:fld>
             <a:endParaRPr lang="en-IN" dirty="0"/>
           </a:p>
@@ -782,7 +782,7 @@
           <a:p>
             <a:fld id="{340C70EA-229A-4802-A7BC-A1799783BDD3}" type="datetime1">
               <a:rPr lang="en-IN" smtClean="0"/>
-              <a:t>05-10-2026</a:t>
+              <a:t>06-10-2026</a:t>
             </a:fld>
             <a:endParaRPr lang="en-IN" dirty="0"/>
           </a:p>
@@ -1069,7 +1069,7 @@
           <a:p>
             <a:fld id="{BD944048-9929-4BB2-BADE-62F9A707015B}" type="datetime1">
               <a:rPr lang="en-IN" smtClean="0"/>
-              <a:t>05-10-2026</a:t>
+              <a:t>06-10-2026</a:t>
             </a:fld>
             <a:endParaRPr lang="en-IN" dirty="0"/>
           </a:p>
@@ -1375,7 +1375,7 @@
           <a:p>
             <a:fld id="{09A388D1-7504-45FD-847C-EF9E921E08DF}" type="datetime1">
               <a:rPr lang="en-IN" smtClean="0"/>
-              <a:t>05-10-2026</a:t>
+              <a:t>06-10-2026</a:t>
             </a:fld>
             <a:endParaRPr lang="en-IN" dirty="0"/>
           </a:p>
@@ -1604,7 +1604,7 @@
           <a:p>
             <a:fld id="{6015BE80-B03C-48AB-B3E2-19C5F4D60D3C}" type="datetime1">
               <a:rPr lang="en-IN" smtClean="0"/>
-              <a:t>05-10-2026</a:t>
+              <a:t>06-10-2026</a:t>
             </a:fld>
             <a:endParaRPr lang="en-IN" dirty="0"/>
           </a:p>
@@ -1875,7 +1875,7 @@
           <a:p>
             <a:fld id="{450E9977-AF0E-4B1A-B2BF-2416B4828E95}" type="datetime1">
               <a:rPr lang="en-IN" smtClean="0"/>
-              <a:t>05-10-2026</a:t>
+              <a:t>06-10-2026</a:t>
             </a:fld>
             <a:endParaRPr lang="en-IN" dirty="0"/>
           </a:p>
@@ -2102,7 +2102,7 @@
           <a:p>
             <a:fld id="{972A712B-80AB-4FDB-AFE5-C959280677B9}" type="datetime1">
               <a:rPr lang="en-IN" smtClean="0"/>
-              <a:t>05-10-2026</a:t>
+              <a:t>06-10-2026</a:t>
             </a:fld>
             <a:endParaRPr lang="en-IN" dirty="0"/>
           </a:p>
@@ -2393,7 +2393,7 @@
           <a:p>
             <a:fld id="{78FC1D50-5769-4793-A6D0-4C61D943385E}" type="datetime1">
               <a:rPr lang="en-IN" smtClean="0"/>
-              <a:t>05-10-2026</a:t>
+              <a:t>06-10-2026</a:t>
             </a:fld>
             <a:endParaRPr lang="en-IN" dirty="0"/>
           </a:p>
@@ -2658,7 +2658,7 @@
           <a:p>
             <a:fld id="{1093E9E7-66F0-49C7-87AF-7A91F126A0CA}" type="datetime1">
               <a:rPr lang="en-IN" smtClean="0"/>
-              <a:t>05-10-2026</a:t>
+              <a:t>06-10-2026</a:t>
             </a:fld>
             <a:endParaRPr lang="en-IN" dirty="0"/>
           </a:p>
@@ -3104,7 +3104,7 @@
           <a:p>
             <a:fld id="{4802E001-56FE-4C01-9545-A69D840AB1F5}" type="datetime1">
               <a:rPr lang="en-IN" smtClean="0"/>
-              <a:t>05-10-2026</a:t>
+              <a:t>06-10-2026</a:t>
             </a:fld>
             <a:endParaRPr lang="en-IN" dirty="0"/>
           </a:p>
@@ -3268,7 +3268,7 @@
           <a:p>
             <a:fld id="{FC628212-ABC2-4EAF-BB21-53D61AEEEA49}" type="datetime1">
               <a:rPr lang="en-IN" smtClean="0"/>
-              <a:t>05-10-2026</a:t>
+              <a:t>06-10-2026</a:t>
             </a:fld>
             <a:endParaRPr lang="en-IN" dirty="0"/>
           </a:p>
@@ -3432,7 +3432,7 @@
           <a:p>
             <a:fld id="{83F0C27E-97BD-4ACD-AFDF-13985BE88ECF}" type="datetime1">
               <a:rPr lang="en-IN" smtClean="0"/>
-              <a:t>05-10-2026</a:t>
+              <a:t>06-10-2026</a:t>
             </a:fld>
             <a:endParaRPr lang="en-IN" dirty="0"/>
           </a:p>
@@ -3630,7 +3630,7 @@
           <a:p>
             <a:fld id="{10A04BDC-9A72-4B08-81B7-A336A5B4E254}" type="datetime1">
               <a:rPr lang="en-IN" smtClean="0"/>
-              <a:t>05-10-2026</a:t>
+              <a:t>06-10-2026</a:t>
             </a:fld>
             <a:endParaRPr lang="en-IN" dirty="0"/>
           </a:p>
@@ -3828,7 +3828,7 @@
           <a:p>
             <a:fld id="{2E5D08A3-D96A-4309-8AF3-C610782BB2D3}" type="datetime1">
               <a:rPr lang="en-IN" smtClean="0"/>
-              <a:t>05-10-2026</a:t>
+              <a:t>06-10-2026</a:t>
             </a:fld>
             <a:endParaRPr lang="en-IN" dirty="0"/>
           </a:p>
